--- a/LabBook_20.pptx
+++ b/LabBook_20.pptx
@@ -5,30 +5,21 @@
     <p:sldMasterId id="2147483648" r:id="rId1"/>
   </p:sldMasterIdLst>
   <p:notesMasterIdLst>
-    <p:notesMasterId r:id="rId20"/>
+    <p:notesMasterId r:id="rId11"/>
   </p:notesMasterIdLst>
   <p:handoutMasterIdLst>
-    <p:handoutMasterId r:id="rId21"/>
+    <p:handoutMasterId r:id="rId12"/>
   </p:handoutMasterIdLst>
   <p:sldIdLst>
     <p:sldId id="256" r:id="rId2"/>
     <p:sldId id="289" r:id="rId3"/>
-    <p:sldId id="295" r:id="rId4"/>
-    <p:sldId id="304" r:id="rId5"/>
-    <p:sldId id="302" r:id="rId6"/>
-    <p:sldId id="303" r:id="rId7"/>
-    <p:sldId id="291" r:id="rId8"/>
-    <p:sldId id="296" r:id="rId9"/>
-    <p:sldId id="293" r:id="rId10"/>
-    <p:sldId id="294" r:id="rId11"/>
-    <p:sldId id="299" r:id="rId12"/>
-    <p:sldId id="300" r:id="rId13"/>
-    <p:sldId id="301" r:id="rId14"/>
-    <p:sldId id="290" r:id="rId15"/>
-    <p:sldId id="297" r:id="rId16"/>
-    <p:sldId id="292" r:id="rId17"/>
-    <p:sldId id="298" r:id="rId18"/>
-    <p:sldId id="288" r:id="rId19"/>
+    <p:sldId id="290" r:id="rId4"/>
+    <p:sldId id="291" r:id="rId5"/>
+    <p:sldId id="292" r:id="rId6"/>
+    <p:sldId id="293" r:id="rId7"/>
+    <p:sldId id="294" r:id="rId8"/>
+    <p:sldId id="301" r:id="rId9"/>
+    <p:sldId id="288" r:id="rId10"/>
   </p:sldIdLst>
   <p:sldSz cx="12192000" cy="6858000"/>
   <p:notesSz cx="12192000" cy="6858000"/>
@@ -149,582 +140,6 @@
 </p:presentation>
 </file>
 
-<file path=ppt/revisionInfo.xml><?xml version="1.0" encoding="utf-8"?>
-<p1510:revInfo xmlns:a="http://schemas.openxmlformats.org/drawingml/2006/main" xmlns:r="http://schemas.openxmlformats.org/officeDocument/2006/relationships" xmlns:p1510="http://schemas.microsoft.com/office/powerpoint/2015/10/main">
-  <p1510:revLst>
-    <p1510:client id="{83A706B2-AA95-4CDC-834C-F4D908C80230}" v="95" dt="2025-02-09T23:48:29.268"/>
-  </p1510:revLst>
-</p1510:revInfo>
-</file>
-
-<file path=ppt/changesInfos/changesInfo1.xml><?xml version="1.0" encoding="utf-8"?>
-<pc:chgInfo xmlns:a="http://schemas.openxmlformats.org/drawingml/2006/main" xmlns:r="http://schemas.openxmlformats.org/officeDocument/2006/relationships" xmlns:ac="http://schemas.microsoft.com/office/drawing/2013/main/command" xmlns:pc="http://schemas.microsoft.com/office/powerpoint/2013/main/command">
-  <pc:docChgLst>
-    <pc:chgData name="Christian Camilo Cano Vasquez" userId="8c73a2a4-758b-4e34-81ed-39462e48bd92" providerId="ADAL" clId="{83A706B2-AA95-4CDC-834C-F4D908C80230}"/>
-    <pc:docChg chg="undo redo custSel addSld delSld modSld">
-      <pc:chgData name="Christian Camilo Cano Vasquez" userId="8c73a2a4-758b-4e34-81ed-39462e48bd92" providerId="ADAL" clId="{83A706B2-AA95-4CDC-834C-F4D908C80230}" dt="2025-02-10T11:46:25.185" v="655" actId="20577"/>
-      <pc:docMkLst>
-        <pc:docMk/>
-      </pc:docMkLst>
-      <pc:sldChg chg="modSp mod">
-        <pc:chgData name="Christian Camilo Cano Vasquez" userId="8c73a2a4-758b-4e34-81ed-39462e48bd92" providerId="ADAL" clId="{83A706B2-AA95-4CDC-834C-F4D908C80230}" dt="2025-02-09T23:21:47.550" v="170" actId="20577"/>
-        <pc:sldMkLst>
-          <pc:docMk/>
-          <pc:sldMk cId="0" sldId="256"/>
-        </pc:sldMkLst>
-        <pc:spChg chg="mod">
-          <ac:chgData name="Christian Camilo Cano Vasquez" userId="8c73a2a4-758b-4e34-81ed-39462e48bd92" providerId="ADAL" clId="{83A706B2-AA95-4CDC-834C-F4D908C80230}" dt="2025-02-09T23:21:47.550" v="170" actId="20577"/>
-          <ac:spMkLst>
-            <pc:docMk/>
-            <pc:sldMk cId="0" sldId="256"/>
-            <ac:spMk id="3" creationId="{00000000-0000-0000-0000-000000000000}"/>
-          </ac:spMkLst>
-        </pc:spChg>
-      </pc:sldChg>
-      <pc:sldChg chg="modSp mod">
-        <pc:chgData name="Christian Camilo Cano Vasquez" userId="8c73a2a4-758b-4e34-81ed-39462e48bd92" providerId="ADAL" clId="{83A706B2-AA95-4CDC-834C-F4D908C80230}" dt="2025-02-09T22:54:55.862" v="0" actId="20577"/>
-        <pc:sldMkLst>
-          <pc:docMk/>
-          <pc:sldMk cId="560234623" sldId="289"/>
-        </pc:sldMkLst>
-        <pc:spChg chg="mod">
-          <ac:chgData name="Christian Camilo Cano Vasquez" userId="8c73a2a4-758b-4e34-81ed-39462e48bd92" providerId="ADAL" clId="{83A706B2-AA95-4CDC-834C-F4D908C80230}" dt="2025-02-09T22:54:55.862" v="0" actId="20577"/>
-          <ac:spMkLst>
-            <pc:docMk/>
-            <pc:sldMk cId="560234623" sldId="289"/>
-            <ac:spMk id="4" creationId="{9F7BC140-B3D8-C3CB-55AD-9064C7CDE9CA}"/>
-          </ac:spMkLst>
-        </pc:spChg>
-      </pc:sldChg>
-      <pc:sldChg chg="addSp delSp modSp mod">
-        <pc:chgData name="Christian Camilo Cano Vasquez" userId="8c73a2a4-758b-4e34-81ed-39462e48bd92" providerId="ADAL" clId="{83A706B2-AA95-4CDC-834C-F4D908C80230}" dt="2025-02-09T23:24:42.493" v="173" actId="20577"/>
-        <pc:sldMkLst>
-          <pc:docMk/>
-          <pc:sldMk cId="730501311" sldId="290"/>
-        </pc:sldMkLst>
-        <pc:spChg chg="mod">
-          <ac:chgData name="Christian Camilo Cano Vasquez" userId="8c73a2a4-758b-4e34-81ed-39462e48bd92" providerId="ADAL" clId="{83A706B2-AA95-4CDC-834C-F4D908C80230}" dt="2025-02-09T23:04:13.626" v="39" actId="20577"/>
-          <ac:spMkLst>
-            <pc:docMk/>
-            <pc:sldMk cId="730501311" sldId="290"/>
-            <ac:spMk id="2" creationId="{D0F8CF3B-B920-DBFC-F825-0C87B51EADA7}"/>
-          </ac:spMkLst>
-        </pc:spChg>
-        <pc:spChg chg="del">
-          <ac:chgData name="Christian Camilo Cano Vasquez" userId="8c73a2a4-758b-4e34-81ed-39462e48bd92" providerId="ADAL" clId="{83A706B2-AA95-4CDC-834C-F4D908C80230}" dt="2025-02-09T22:59:02.631" v="2" actId="478"/>
-          <ac:spMkLst>
-            <pc:docMk/>
-            <pc:sldMk cId="730501311" sldId="290"/>
-            <ac:spMk id="4" creationId="{AA9E72FF-B948-6B7A-8909-97C6BE95D6FB}"/>
-          </ac:spMkLst>
-        </pc:spChg>
-        <pc:spChg chg="add mod">
-          <ac:chgData name="Christian Camilo Cano Vasquez" userId="8c73a2a4-758b-4e34-81ed-39462e48bd92" providerId="ADAL" clId="{83A706B2-AA95-4CDC-834C-F4D908C80230}" dt="2025-02-09T23:00:11.400" v="3"/>
-          <ac:spMkLst>
-            <pc:docMk/>
-            <pc:sldMk cId="730501311" sldId="290"/>
-            <ac:spMk id="5" creationId="{E7488849-10A1-FB48-F511-E57B062CD7E2}"/>
-          </ac:spMkLst>
-        </pc:spChg>
-        <pc:spChg chg="add mod">
-          <ac:chgData name="Christian Camilo Cano Vasquez" userId="8c73a2a4-758b-4e34-81ed-39462e48bd92" providerId="ADAL" clId="{83A706B2-AA95-4CDC-834C-F4D908C80230}" dt="2025-02-09T23:00:11.400" v="3"/>
-          <ac:spMkLst>
-            <pc:docMk/>
-            <pc:sldMk cId="730501311" sldId="290"/>
-            <ac:spMk id="6" creationId="{68726DAB-1B5F-39D1-63A0-BB708EA6E17F}"/>
-          </ac:spMkLst>
-        </pc:spChg>
-        <pc:spChg chg="add mod">
-          <ac:chgData name="Christian Camilo Cano Vasquez" userId="8c73a2a4-758b-4e34-81ed-39462e48bd92" providerId="ADAL" clId="{83A706B2-AA95-4CDC-834C-F4D908C80230}" dt="2025-02-09T23:00:11.400" v="3"/>
-          <ac:spMkLst>
-            <pc:docMk/>
-            <pc:sldMk cId="730501311" sldId="290"/>
-            <ac:spMk id="7" creationId="{6D309BFB-98FD-0CBA-3C6A-346D8859893B}"/>
-          </ac:spMkLst>
-        </pc:spChg>
-        <pc:spChg chg="add mod">
-          <ac:chgData name="Christian Camilo Cano Vasquez" userId="8c73a2a4-758b-4e34-81ed-39462e48bd92" providerId="ADAL" clId="{83A706B2-AA95-4CDC-834C-F4D908C80230}" dt="2025-02-09T23:02:26.970" v="32" actId="20577"/>
-          <ac:spMkLst>
-            <pc:docMk/>
-            <pc:sldMk cId="730501311" sldId="290"/>
-            <ac:spMk id="8" creationId="{E9BD6C85-02F1-7B54-41E3-E3D9883786D8}"/>
-          </ac:spMkLst>
-        </pc:spChg>
-        <pc:spChg chg="add mod">
-          <ac:chgData name="Christian Camilo Cano Vasquez" userId="8c73a2a4-758b-4e34-81ed-39462e48bd92" providerId="ADAL" clId="{83A706B2-AA95-4CDC-834C-F4D908C80230}" dt="2025-02-09T23:02:32.780" v="33"/>
-          <ac:spMkLst>
-            <pc:docMk/>
-            <pc:sldMk cId="730501311" sldId="290"/>
-            <ac:spMk id="9" creationId="{7431A41C-EEB3-44D0-4622-A915E258C8F0}"/>
-          </ac:spMkLst>
-        </pc:spChg>
-        <pc:spChg chg="mod">
-          <ac:chgData name="Christian Camilo Cano Vasquez" userId="8c73a2a4-758b-4e34-81ed-39462e48bd92" providerId="ADAL" clId="{83A706B2-AA95-4CDC-834C-F4D908C80230}" dt="2025-02-09T23:24:42.493" v="173" actId="20577"/>
-          <ac:spMkLst>
-            <pc:docMk/>
-            <pc:sldMk cId="730501311" sldId="290"/>
-            <ac:spMk id="16" creationId="{471E1424-6C4B-2D9A-1352-30AFB987AD41}"/>
-          </ac:spMkLst>
-        </pc:spChg>
-      </pc:sldChg>
-      <pc:sldChg chg="addSp delSp modSp mod">
-        <pc:chgData name="Christian Camilo Cano Vasquez" userId="8c73a2a4-758b-4e34-81ed-39462e48bd92" providerId="ADAL" clId="{83A706B2-AA95-4CDC-834C-F4D908C80230}" dt="2025-02-09T23:24:47.352" v="175" actId="20577"/>
-        <pc:sldMkLst>
-          <pc:docMk/>
-          <pc:sldMk cId="3712356003" sldId="291"/>
-        </pc:sldMkLst>
-        <pc:spChg chg="mod">
-          <ac:chgData name="Christian Camilo Cano Vasquez" userId="8c73a2a4-758b-4e34-81ed-39462e48bd92" providerId="ADAL" clId="{83A706B2-AA95-4CDC-834C-F4D908C80230}" dt="2025-02-09T23:15:16.003" v="106" actId="20577"/>
-          <ac:spMkLst>
-            <pc:docMk/>
-            <pc:sldMk cId="3712356003" sldId="291"/>
-            <ac:spMk id="2" creationId="{CA5F0FDF-2A95-453B-4ECA-AEB637FF2694}"/>
-          </ac:spMkLst>
-        </pc:spChg>
-        <pc:spChg chg="add mod">
-          <ac:chgData name="Christian Camilo Cano Vasquez" userId="8c73a2a4-758b-4e34-81ed-39462e48bd92" providerId="ADAL" clId="{83A706B2-AA95-4CDC-834C-F4D908C80230}" dt="2025-02-09T23:14:26.914" v="81" actId="1035"/>
-          <ac:spMkLst>
-            <pc:docMk/>
-            <pc:sldMk cId="3712356003" sldId="291"/>
-            <ac:spMk id="4" creationId="{FB4B77A0-B37C-3130-FB52-4E560C66946F}"/>
-          </ac:spMkLst>
-        </pc:spChg>
-        <pc:spChg chg="add mod">
-          <ac:chgData name="Christian Camilo Cano Vasquez" userId="8c73a2a4-758b-4e34-81ed-39462e48bd92" providerId="ADAL" clId="{83A706B2-AA95-4CDC-834C-F4D908C80230}" dt="2025-02-09T23:14:26.914" v="81" actId="1035"/>
-          <ac:spMkLst>
-            <pc:docMk/>
-            <pc:sldMk cId="3712356003" sldId="291"/>
-            <ac:spMk id="5" creationId="{DA7ECAA3-0876-C0FB-D7E5-448FCC5ED226}"/>
-          </ac:spMkLst>
-        </pc:spChg>
-        <pc:spChg chg="del">
-          <ac:chgData name="Christian Camilo Cano Vasquez" userId="8c73a2a4-758b-4e34-81ed-39462e48bd92" providerId="ADAL" clId="{83A706B2-AA95-4CDC-834C-F4D908C80230}" dt="2025-02-09T23:09:07.294" v="48" actId="478"/>
-          <ac:spMkLst>
-            <pc:docMk/>
-            <pc:sldMk cId="3712356003" sldId="291"/>
-            <ac:spMk id="7" creationId="{21F754A5-65BC-14A3-5F55-75716FFA9027}"/>
-          </ac:spMkLst>
-        </pc:spChg>
-        <pc:spChg chg="del">
-          <ac:chgData name="Christian Camilo Cano Vasquez" userId="8c73a2a4-758b-4e34-81ed-39462e48bd92" providerId="ADAL" clId="{83A706B2-AA95-4CDC-834C-F4D908C80230}" dt="2025-02-09T23:09:11.050" v="49" actId="478"/>
-          <ac:spMkLst>
-            <pc:docMk/>
-            <pc:sldMk cId="3712356003" sldId="291"/>
-            <ac:spMk id="8" creationId="{CD9C65D4-5494-F5CE-1094-CB0A32C33876}"/>
-          </ac:spMkLst>
-        </pc:spChg>
-        <pc:spChg chg="add mod">
-          <ac:chgData name="Christian Camilo Cano Vasquez" userId="8c73a2a4-758b-4e34-81ed-39462e48bd92" providerId="ADAL" clId="{83A706B2-AA95-4CDC-834C-F4D908C80230}" dt="2025-02-09T23:14:26.914" v="81" actId="1035"/>
-          <ac:spMkLst>
-            <pc:docMk/>
-            <pc:sldMk cId="3712356003" sldId="291"/>
-            <ac:spMk id="9" creationId="{C1467207-8D05-D4C6-EBD2-209F796AE977}"/>
-          </ac:spMkLst>
-        </pc:spChg>
-        <pc:spChg chg="add mod">
-          <ac:chgData name="Christian Camilo Cano Vasquez" userId="8c73a2a4-758b-4e34-81ed-39462e48bd92" providerId="ADAL" clId="{83A706B2-AA95-4CDC-834C-F4D908C80230}" dt="2025-02-09T23:14:26.914" v="81" actId="1035"/>
-          <ac:spMkLst>
-            <pc:docMk/>
-            <pc:sldMk cId="3712356003" sldId="291"/>
-            <ac:spMk id="10" creationId="{32E39C0C-95E1-ED90-891A-5D634D9DB76B}"/>
-          </ac:spMkLst>
-        </pc:spChg>
-        <pc:spChg chg="mod">
-          <ac:chgData name="Christian Camilo Cano Vasquez" userId="8c73a2a4-758b-4e34-81ed-39462e48bd92" providerId="ADAL" clId="{83A706B2-AA95-4CDC-834C-F4D908C80230}" dt="2025-02-09T23:24:47.352" v="175" actId="20577"/>
-          <ac:spMkLst>
-            <pc:docMk/>
-            <pc:sldMk cId="3712356003" sldId="291"/>
-            <ac:spMk id="16" creationId="{5431EA70-9578-8BF1-5A05-77CDC26788B4}"/>
-          </ac:spMkLst>
-        </pc:spChg>
-        <pc:picChg chg="del">
-          <ac:chgData name="Christian Camilo Cano Vasquez" userId="8c73a2a4-758b-4e34-81ed-39462e48bd92" providerId="ADAL" clId="{83A706B2-AA95-4CDC-834C-F4D908C80230}" dt="2025-02-09T23:08:10.270" v="47" actId="478"/>
-          <ac:picMkLst>
-            <pc:docMk/>
-            <pc:sldMk cId="3712356003" sldId="291"/>
-            <ac:picMk id="6" creationId="{380A8455-6386-C7D5-7BB6-B79D8D91F0EF}"/>
-          </ac:picMkLst>
-        </pc:picChg>
-      </pc:sldChg>
-      <pc:sldChg chg="addSp delSp modSp mod">
-        <pc:chgData name="Christian Camilo Cano Vasquez" userId="8c73a2a4-758b-4e34-81ed-39462e48bd92" providerId="ADAL" clId="{83A706B2-AA95-4CDC-834C-F4D908C80230}" dt="2025-02-09T23:31:23.910" v="296" actId="20577"/>
-        <pc:sldMkLst>
-          <pc:docMk/>
-          <pc:sldMk cId="2900117438" sldId="292"/>
-        </pc:sldMkLst>
-        <pc:spChg chg="mod">
-          <ac:chgData name="Christian Camilo Cano Vasquez" userId="8c73a2a4-758b-4e34-81ed-39462e48bd92" providerId="ADAL" clId="{83A706B2-AA95-4CDC-834C-F4D908C80230}" dt="2025-02-09T23:31:23.910" v="296" actId="20577"/>
-          <ac:spMkLst>
-            <pc:docMk/>
-            <pc:sldMk cId="2900117438" sldId="292"/>
-            <ac:spMk id="2" creationId="{82A62DD6-5488-72A1-9926-0CAEE59089A9}"/>
-          </ac:spMkLst>
-        </pc:spChg>
-        <pc:spChg chg="add mod">
-          <ac:chgData name="Christian Camilo Cano Vasquez" userId="8c73a2a4-758b-4e34-81ed-39462e48bd92" providerId="ADAL" clId="{83A706B2-AA95-4CDC-834C-F4D908C80230}" dt="2025-02-09T23:30:25.991" v="253"/>
-          <ac:spMkLst>
-            <pc:docMk/>
-            <pc:sldMk cId="2900117438" sldId="292"/>
-            <ac:spMk id="4" creationId="{796EDE51-D41E-C23B-F402-2F7357DE8714}"/>
-          </ac:spMkLst>
-        </pc:spChg>
-        <pc:spChg chg="add mod">
-          <ac:chgData name="Christian Camilo Cano Vasquez" userId="8c73a2a4-758b-4e34-81ed-39462e48bd92" providerId="ADAL" clId="{83A706B2-AA95-4CDC-834C-F4D908C80230}" dt="2025-02-09T23:30:25.991" v="253"/>
-          <ac:spMkLst>
-            <pc:docMk/>
-            <pc:sldMk cId="2900117438" sldId="292"/>
-            <ac:spMk id="5" creationId="{5A3233C9-FE6F-52D8-4D87-224222BDA8E1}"/>
-          </ac:spMkLst>
-        </pc:spChg>
-        <pc:spChg chg="add mod">
-          <ac:chgData name="Christian Camilo Cano Vasquez" userId="8c73a2a4-758b-4e34-81ed-39462e48bd92" providerId="ADAL" clId="{83A706B2-AA95-4CDC-834C-F4D908C80230}" dt="2025-02-09T23:30:25.991" v="253"/>
-          <ac:spMkLst>
-            <pc:docMk/>
-            <pc:sldMk cId="2900117438" sldId="292"/>
-            <ac:spMk id="6" creationId="{0C016548-01A2-6E58-B80D-148384B98EB3}"/>
-          </ac:spMkLst>
-        </pc:spChg>
-        <pc:spChg chg="del">
-          <ac:chgData name="Christian Camilo Cano Vasquez" userId="8c73a2a4-758b-4e34-81ed-39462e48bd92" providerId="ADAL" clId="{83A706B2-AA95-4CDC-834C-F4D908C80230}" dt="2025-02-09T23:30:21.832" v="251" actId="478"/>
-          <ac:spMkLst>
-            <pc:docMk/>
-            <pc:sldMk cId="2900117438" sldId="292"/>
-            <ac:spMk id="7" creationId="{FBC7D187-267A-ADD4-764C-D3820B8ED302}"/>
-          </ac:spMkLst>
-        </pc:spChg>
-        <pc:spChg chg="del">
-          <ac:chgData name="Christian Camilo Cano Vasquez" userId="8c73a2a4-758b-4e34-81ed-39462e48bd92" providerId="ADAL" clId="{83A706B2-AA95-4CDC-834C-F4D908C80230}" dt="2025-02-09T23:30:25.360" v="252" actId="478"/>
-          <ac:spMkLst>
-            <pc:docMk/>
-            <pc:sldMk cId="2900117438" sldId="292"/>
-            <ac:spMk id="8" creationId="{1EF5BFDA-8EC1-8C73-A932-F36C4DB93C73}"/>
-          </ac:spMkLst>
-        </pc:spChg>
-        <pc:spChg chg="add mod">
-          <ac:chgData name="Christian Camilo Cano Vasquez" userId="8c73a2a4-758b-4e34-81ed-39462e48bd92" providerId="ADAL" clId="{83A706B2-AA95-4CDC-834C-F4D908C80230}" dt="2025-02-09T23:30:25.991" v="253"/>
-          <ac:spMkLst>
-            <pc:docMk/>
-            <pc:sldMk cId="2900117438" sldId="292"/>
-            <ac:spMk id="9" creationId="{075D03BE-0D6A-89E5-3C68-D7BD97B4676E}"/>
-          </ac:spMkLst>
-        </pc:spChg>
-        <pc:spChg chg="add mod">
-          <ac:chgData name="Christian Camilo Cano Vasquez" userId="8c73a2a4-758b-4e34-81ed-39462e48bd92" providerId="ADAL" clId="{83A706B2-AA95-4CDC-834C-F4D908C80230}" dt="2025-02-09T23:30:25.991" v="253"/>
-          <ac:spMkLst>
-            <pc:docMk/>
-            <pc:sldMk cId="2900117438" sldId="292"/>
-            <ac:spMk id="10" creationId="{AC01EDEE-71CC-C570-700B-076F03FCF7E1}"/>
-          </ac:spMkLst>
-        </pc:spChg>
-        <pc:spChg chg="mod">
-          <ac:chgData name="Christian Camilo Cano Vasquez" userId="8c73a2a4-758b-4e34-81ed-39462e48bd92" providerId="ADAL" clId="{83A706B2-AA95-4CDC-834C-F4D908C80230}" dt="2025-02-09T23:29:51.940" v="250" actId="20577"/>
-          <ac:spMkLst>
-            <pc:docMk/>
-            <pc:sldMk cId="2900117438" sldId="292"/>
-            <ac:spMk id="16" creationId="{6AA2E789-F7AE-F068-274C-E0F13A22DBCA}"/>
-          </ac:spMkLst>
-        </pc:spChg>
-      </pc:sldChg>
-      <pc:sldChg chg="del">
-        <pc:chgData name="Christian Camilo Cano Vasquez" userId="8c73a2a4-758b-4e34-81ed-39462e48bd92" providerId="ADAL" clId="{83A706B2-AA95-4CDC-834C-F4D908C80230}" dt="2025-02-09T23:36:40.142" v="343" actId="47"/>
-        <pc:sldMkLst>
-          <pc:docMk/>
-          <pc:sldMk cId="3660438245" sldId="293"/>
-        </pc:sldMkLst>
-      </pc:sldChg>
-      <pc:sldChg chg="addSp delSp modSp mod">
-        <pc:chgData name="Christian Camilo Cano Vasquez" userId="8c73a2a4-758b-4e34-81ed-39462e48bd92" providerId="ADAL" clId="{83A706B2-AA95-4CDC-834C-F4D908C80230}" dt="2025-02-09T23:43:58.113" v="517" actId="20577"/>
-        <pc:sldMkLst>
-          <pc:docMk/>
-          <pc:sldMk cId="2815679427" sldId="294"/>
-        </pc:sldMkLst>
-        <pc:spChg chg="add del mod">
-          <ac:chgData name="Christian Camilo Cano Vasquez" userId="8c73a2a4-758b-4e34-81ed-39462e48bd92" providerId="ADAL" clId="{83A706B2-AA95-4CDC-834C-F4D908C80230}" dt="2025-02-09T23:39:50.840" v="385" actId="20577"/>
-          <ac:spMkLst>
-            <pc:docMk/>
-            <pc:sldMk cId="2815679427" sldId="294"/>
-            <ac:spMk id="2" creationId="{B5029729-ADF3-3B30-4FF9-83BE1DB82BD7}"/>
-          </ac:spMkLst>
-        </pc:spChg>
-        <pc:spChg chg="add mod">
-          <ac:chgData name="Christian Camilo Cano Vasquez" userId="8c73a2a4-758b-4e34-81ed-39462e48bd92" providerId="ADAL" clId="{83A706B2-AA95-4CDC-834C-F4D908C80230}" dt="2025-02-09T23:38:32.744" v="355" actId="1076"/>
-          <ac:spMkLst>
-            <pc:docMk/>
-            <pc:sldMk cId="2815679427" sldId="294"/>
-            <ac:spMk id="4" creationId="{06A90612-6654-786D-6F6A-F4EA67014379}"/>
-          </ac:spMkLst>
-        </pc:spChg>
-        <pc:spChg chg="add mod">
-          <ac:chgData name="Christian Camilo Cano Vasquez" userId="8c73a2a4-758b-4e34-81ed-39462e48bd92" providerId="ADAL" clId="{83A706B2-AA95-4CDC-834C-F4D908C80230}" dt="2025-02-09T23:38:32.744" v="355" actId="1076"/>
-          <ac:spMkLst>
-            <pc:docMk/>
-            <pc:sldMk cId="2815679427" sldId="294"/>
-            <ac:spMk id="5" creationId="{5032AC03-DEF1-DAF0-236E-A42778A7A062}"/>
-          </ac:spMkLst>
-        </pc:spChg>
-        <pc:spChg chg="add mod">
-          <ac:chgData name="Christian Camilo Cano Vasquez" userId="8c73a2a4-758b-4e34-81ed-39462e48bd92" providerId="ADAL" clId="{83A706B2-AA95-4CDC-834C-F4D908C80230}" dt="2025-02-09T23:37:46.370" v="351"/>
-          <ac:spMkLst>
-            <pc:docMk/>
-            <pc:sldMk cId="2815679427" sldId="294"/>
-            <ac:spMk id="6" creationId="{3338A34B-BF11-73AC-D891-565FD218C2F6}"/>
-          </ac:spMkLst>
-        </pc:spChg>
-        <pc:spChg chg="add del mod">
-          <ac:chgData name="Christian Camilo Cano Vasquez" userId="8c73a2a4-758b-4e34-81ed-39462e48bd92" providerId="ADAL" clId="{83A706B2-AA95-4CDC-834C-F4D908C80230}" dt="2025-02-09T23:39:04.073" v="372" actId="1036"/>
-          <ac:spMkLst>
-            <pc:docMk/>
-            <pc:sldMk cId="2815679427" sldId="294"/>
-            <ac:spMk id="7" creationId="{98DE5FDA-4E91-E843-E84A-1467BFAA9986}"/>
-          </ac:spMkLst>
-        </pc:spChg>
-        <pc:spChg chg="add del mod">
-          <ac:chgData name="Christian Camilo Cano Vasquez" userId="8c73a2a4-758b-4e34-81ed-39462e48bd92" providerId="ADAL" clId="{83A706B2-AA95-4CDC-834C-F4D908C80230}" dt="2025-02-09T23:43:58.113" v="517" actId="20577"/>
-          <ac:spMkLst>
-            <pc:docMk/>
-            <pc:sldMk cId="2815679427" sldId="294"/>
-            <ac:spMk id="8" creationId="{0DA14DBA-172E-DA2C-0573-6A00BF18F4A5}"/>
-          </ac:spMkLst>
-        </pc:spChg>
-        <pc:spChg chg="add mod">
-          <ac:chgData name="Christian Camilo Cano Vasquez" userId="8c73a2a4-758b-4e34-81ed-39462e48bd92" providerId="ADAL" clId="{83A706B2-AA95-4CDC-834C-F4D908C80230}" dt="2025-02-09T23:38:32.744" v="355" actId="1076"/>
-          <ac:spMkLst>
-            <pc:docMk/>
-            <pc:sldMk cId="2815679427" sldId="294"/>
-            <ac:spMk id="9" creationId="{4D1551B0-A822-E426-5721-B1FC37702FCB}"/>
-          </ac:spMkLst>
-        </pc:spChg>
-        <pc:spChg chg="add mod">
-          <ac:chgData name="Christian Camilo Cano Vasquez" userId="8c73a2a4-758b-4e34-81ed-39462e48bd92" providerId="ADAL" clId="{83A706B2-AA95-4CDC-834C-F4D908C80230}" dt="2025-02-09T23:38:32.744" v="355" actId="1076"/>
-          <ac:spMkLst>
-            <pc:docMk/>
-            <pc:sldMk cId="2815679427" sldId="294"/>
-            <ac:spMk id="11" creationId="{EFED69C0-44A5-9995-03AC-A48118DEE677}"/>
-          </ac:spMkLst>
-        </pc:spChg>
-        <pc:spChg chg="mod">
-          <ac:chgData name="Christian Camilo Cano Vasquez" userId="8c73a2a4-758b-4e34-81ed-39462e48bd92" providerId="ADAL" clId="{83A706B2-AA95-4CDC-834C-F4D908C80230}" dt="2025-02-09T23:38:57.830" v="367" actId="20577"/>
-          <ac:spMkLst>
-            <pc:docMk/>
-            <pc:sldMk cId="2815679427" sldId="294"/>
-            <ac:spMk id="16" creationId="{2B8D44BF-A3B5-6BED-C39C-FA8260E83536}"/>
-          </ac:spMkLst>
-        </pc:spChg>
-        <pc:picChg chg="add mod">
-          <ac:chgData name="Christian Camilo Cano Vasquez" userId="8c73a2a4-758b-4e34-81ed-39462e48bd92" providerId="ADAL" clId="{83A706B2-AA95-4CDC-834C-F4D908C80230}" dt="2025-02-09T23:38:32.744" v="355" actId="1076"/>
-          <ac:picMkLst>
-            <pc:docMk/>
-            <pc:sldMk cId="2815679427" sldId="294"/>
-            <ac:picMk id="10" creationId="{EA7B2FC2-D98A-62A1-228C-2882147646FE}"/>
-          </ac:picMkLst>
-        </pc:picChg>
-      </pc:sldChg>
-      <pc:sldChg chg="addSp delSp modSp new mod">
-        <pc:chgData name="Christian Camilo Cano Vasquez" userId="8c73a2a4-758b-4e34-81ed-39462e48bd92" providerId="ADAL" clId="{83A706B2-AA95-4CDC-834C-F4D908C80230}" dt="2025-02-09T23:17:54.551" v="115" actId="403"/>
-        <pc:sldMkLst>
-          <pc:docMk/>
-          <pc:sldMk cId="1640019522" sldId="295"/>
-        </pc:sldMkLst>
-        <pc:spChg chg="del">
-          <ac:chgData name="Christian Camilo Cano Vasquez" userId="8c73a2a4-758b-4e34-81ed-39462e48bd92" providerId="ADAL" clId="{83A706B2-AA95-4CDC-834C-F4D908C80230}" dt="2025-02-09T23:17:37.829" v="108" actId="478"/>
-          <ac:spMkLst>
-            <pc:docMk/>
-            <pc:sldMk cId="1640019522" sldId="295"/>
-            <ac:spMk id="2" creationId="{5D66A4B3-0EC3-435E-57A3-EB664561ABDB}"/>
-          </ac:spMkLst>
-        </pc:spChg>
-        <pc:spChg chg="del">
-          <ac:chgData name="Christian Camilo Cano Vasquez" userId="8c73a2a4-758b-4e34-81ed-39462e48bd92" providerId="ADAL" clId="{83A706B2-AA95-4CDC-834C-F4D908C80230}" dt="2025-02-09T23:17:45.590" v="109"/>
-          <ac:spMkLst>
-            <pc:docMk/>
-            <pc:sldMk cId="1640019522" sldId="295"/>
-            <ac:spMk id="3" creationId="{A7B12427-6892-E9F1-A7EF-25CEDC14529C}"/>
-          </ac:spMkLst>
-        </pc:spChg>
-        <pc:spChg chg="add mod">
-          <ac:chgData name="Christian Camilo Cano Vasquez" userId="8c73a2a4-758b-4e34-81ed-39462e48bd92" providerId="ADAL" clId="{83A706B2-AA95-4CDC-834C-F4D908C80230}" dt="2025-02-09T23:17:54.551" v="115" actId="403"/>
-          <ac:spMkLst>
-            <pc:docMk/>
-            <pc:sldMk cId="1640019522" sldId="295"/>
-            <ac:spMk id="6" creationId="{AF6692CA-D0D0-2BAF-E673-933E02AE2BB8}"/>
-          </ac:spMkLst>
-        </pc:spChg>
-      </pc:sldChg>
-      <pc:sldChg chg="modSp add mod">
-        <pc:chgData name="Christian Camilo Cano Vasquez" userId="8c73a2a4-758b-4e34-81ed-39462e48bd92" providerId="ADAL" clId="{83A706B2-AA95-4CDC-834C-F4D908C80230}" dt="2025-02-09T23:18:46.605" v="158" actId="20577"/>
-        <pc:sldMkLst>
-          <pc:docMk/>
-          <pc:sldMk cId="3873318961" sldId="296"/>
-        </pc:sldMkLst>
-        <pc:spChg chg="mod">
-          <ac:chgData name="Christian Camilo Cano Vasquez" userId="8c73a2a4-758b-4e34-81ed-39462e48bd92" providerId="ADAL" clId="{83A706B2-AA95-4CDC-834C-F4D908C80230}" dt="2025-02-09T23:18:46.605" v="158" actId="20577"/>
-          <ac:spMkLst>
-            <pc:docMk/>
-            <pc:sldMk cId="3873318961" sldId="296"/>
-            <ac:spMk id="6" creationId="{8111062F-F9A0-241E-6CCB-6E8BE4D8C60A}"/>
-          </ac:spMkLst>
-        </pc:spChg>
-      </pc:sldChg>
-      <pc:sldChg chg="modSp add mod">
-        <pc:chgData name="Christian Camilo Cano Vasquez" userId="8c73a2a4-758b-4e34-81ed-39462e48bd92" providerId="ADAL" clId="{83A706B2-AA95-4CDC-834C-F4D908C80230}" dt="2025-02-10T11:46:25.185" v="655" actId="20577"/>
-        <pc:sldMkLst>
-          <pc:docMk/>
-          <pc:sldMk cId="3454032079" sldId="297"/>
-        </pc:sldMkLst>
-        <pc:spChg chg="mod">
-          <ac:chgData name="Christian Camilo Cano Vasquez" userId="8c73a2a4-758b-4e34-81ed-39462e48bd92" providerId="ADAL" clId="{83A706B2-AA95-4CDC-834C-F4D908C80230}" dt="2025-02-09T23:26:45.534" v="237" actId="20577"/>
-          <ac:spMkLst>
-            <pc:docMk/>
-            <pc:sldMk cId="3454032079" sldId="297"/>
-            <ac:spMk id="2" creationId="{181326FD-308E-2C47-D5D2-57B3357241AA}"/>
-          </ac:spMkLst>
-        </pc:spChg>
-        <pc:spChg chg="mod">
-          <ac:chgData name="Christian Camilo Cano Vasquez" userId="8c73a2a4-758b-4e34-81ed-39462e48bd92" providerId="ADAL" clId="{83A706B2-AA95-4CDC-834C-F4D908C80230}" dt="2025-02-09T23:26:13.591" v="226" actId="20577"/>
-          <ac:spMkLst>
-            <pc:docMk/>
-            <pc:sldMk cId="3454032079" sldId="297"/>
-            <ac:spMk id="8" creationId="{B08C2240-8810-4E0A-7DCF-E62A8271EA2E}"/>
-          </ac:spMkLst>
-        </pc:spChg>
-        <pc:spChg chg="mod">
-          <ac:chgData name="Christian Camilo Cano Vasquez" userId="8c73a2a4-758b-4e34-81ed-39462e48bd92" providerId="ADAL" clId="{83A706B2-AA95-4CDC-834C-F4D908C80230}" dt="2025-02-09T23:26:17.294" v="229" actId="20577"/>
-          <ac:spMkLst>
-            <pc:docMk/>
-            <pc:sldMk cId="3454032079" sldId="297"/>
-            <ac:spMk id="9" creationId="{BBDDC809-0F06-CBE2-4D1A-3A2FA36C33A8}"/>
-          </ac:spMkLst>
-        </pc:spChg>
-        <pc:spChg chg="mod">
-          <ac:chgData name="Christian Camilo Cano Vasquez" userId="8c73a2a4-758b-4e34-81ed-39462e48bd92" providerId="ADAL" clId="{83A706B2-AA95-4CDC-834C-F4D908C80230}" dt="2025-02-10T11:46:25.185" v="655" actId="20577"/>
-          <ac:spMkLst>
-            <pc:docMk/>
-            <pc:sldMk cId="3454032079" sldId="297"/>
-            <ac:spMk id="16" creationId="{5AC39480-E3E5-69B1-401F-A50C45531EF2}"/>
-          </ac:spMkLst>
-        </pc:spChg>
-      </pc:sldChg>
-      <pc:sldChg chg="modSp add mod">
-        <pc:chgData name="Christian Camilo Cano Vasquez" userId="8c73a2a4-758b-4e34-81ed-39462e48bd92" providerId="ADAL" clId="{83A706B2-AA95-4CDC-834C-F4D908C80230}" dt="2025-02-09T23:36:30.584" v="342" actId="20577"/>
-        <pc:sldMkLst>
-          <pc:docMk/>
-          <pc:sldMk cId="2103719889" sldId="298"/>
-        </pc:sldMkLst>
-        <pc:spChg chg="mod">
-          <ac:chgData name="Christian Camilo Cano Vasquez" userId="8c73a2a4-758b-4e34-81ed-39462e48bd92" providerId="ADAL" clId="{83A706B2-AA95-4CDC-834C-F4D908C80230}" dt="2025-02-09T23:36:30.584" v="342" actId="20577"/>
-          <ac:spMkLst>
-            <pc:docMk/>
-            <pc:sldMk cId="2103719889" sldId="298"/>
-            <ac:spMk id="2" creationId="{8D88CB07-C5F5-9BB7-9F41-E171F0F0E2B9}"/>
-          </ac:spMkLst>
-        </pc:spChg>
-        <pc:spChg chg="mod">
-          <ac:chgData name="Christian Camilo Cano Vasquez" userId="8c73a2a4-758b-4e34-81ed-39462e48bd92" providerId="ADAL" clId="{83A706B2-AA95-4CDC-834C-F4D908C80230}" dt="2025-02-09T23:35:30.421" v="324" actId="20577"/>
-          <ac:spMkLst>
-            <pc:docMk/>
-            <pc:sldMk cId="2103719889" sldId="298"/>
-            <ac:spMk id="9" creationId="{2BDFECD2-156D-6697-CFBF-8CD783F9B986}"/>
-          </ac:spMkLst>
-        </pc:spChg>
-        <pc:spChg chg="mod">
-          <ac:chgData name="Christian Camilo Cano Vasquez" userId="8c73a2a4-758b-4e34-81ed-39462e48bd92" providerId="ADAL" clId="{83A706B2-AA95-4CDC-834C-F4D908C80230}" dt="2025-02-09T23:35:34.437" v="331" actId="20577"/>
-          <ac:spMkLst>
-            <pc:docMk/>
-            <pc:sldMk cId="2103719889" sldId="298"/>
-            <ac:spMk id="10" creationId="{3BFC64CA-DE35-A528-CF09-36A26DB3DEE4}"/>
-          </ac:spMkLst>
-        </pc:spChg>
-        <pc:spChg chg="mod">
-          <ac:chgData name="Christian Camilo Cano Vasquez" userId="8c73a2a4-758b-4e34-81ed-39462e48bd92" providerId="ADAL" clId="{83A706B2-AA95-4CDC-834C-F4D908C80230}" dt="2025-02-09T23:35:16.010" v="319" actId="20577"/>
-          <ac:spMkLst>
-            <pc:docMk/>
-            <pc:sldMk cId="2103719889" sldId="298"/>
-            <ac:spMk id="16" creationId="{53FFBD12-4EFF-41C1-4765-2AD268B2BD94}"/>
-          </ac:spMkLst>
-        </pc:spChg>
-      </pc:sldChg>
-      <pc:sldChg chg="modSp add mod">
-        <pc:chgData name="Christian Camilo Cano Vasquez" userId="8c73a2a4-758b-4e34-81ed-39462e48bd92" providerId="ADAL" clId="{83A706B2-AA95-4CDC-834C-F4D908C80230}" dt="2025-02-09T23:43:30.035" v="490" actId="20577"/>
-        <pc:sldMkLst>
-          <pc:docMk/>
-          <pc:sldMk cId="2685215753" sldId="299"/>
-        </pc:sldMkLst>
-        <pc:spChg chg="mod">
-          <ac:chgData name="Christian Camilo Cano Vasquez" userId="8c73a2a4-758b-4e34-81ed-39462e48bd92" providerId="ADAL" clId="{83A706B2-AA95-4CDC-834C-F4D908C80230}" dt="2025-02-09T23:43:30.035" v="490" actId="20577"/>
-          <ac:spMkLst>
-            <pc:docMk/>
-            <pc:sldMk cId="2685215753" sldId="299"/>
-            <ac:spMk id="2" creationId="{43D7D9E5-DAC3-2BB8-7377-826863CBAD4E}"/>
-          </ac:spMkLst>
-        </pc:spChg>
-        <pc:spChg chg="mod">
-          <ac:chgData name="Christian Camilo Cano Vasquez" userId="8c73a2a4-758b-4e34-81ed-39462e48bd92" providerId="ADAL" clId="{83A706B2-AA95-4CDC-834C-F4D908C80230}" dt="2025-02-09T23:43:03.787" v="468" actId="1076"/>
-          <ac:spMkLst>
-            <pc:docMk/>
-            <pc:sldMk cId="2685215753" sldId="299"/>
-            <ac:spMk id="8" creationId="{643565A9-7DB6-D6EE-152F-2852C8BA7986}"/>
-          </ac:spMkLst>
-        </pc:spChg>
-        <pc:spChg chg="mod">
-          <ac:chgData name="Christian Camilo Cano Vasquez" userId="8c73a2a4-758b-4e34-81ed-39462e48bd92" providerId="ADAL" clId="{83A706B2-AA95-4CDC-834C-F4D908C80230}" dt="2025-02-09T23:43:18.188" v="482" actId="20577"/>
-          <ac:spMkLst>
-            <pc:docMk/>
-            <pc:sldMk cId="2685215753" sldId="299"/>
-            <ac:spMk id="16" creationId="{C096193E-AB86-E3CD-BDAC-0F9156C1A3F0}"/>
-          </ac:spMkLst>
-        </pc:spChg>
-      </pc:sldChg>
-      <pc:sldChg chg="modSp add mod">
-        <pc:chgData name="Christian Camilo Cano Vasquez" userId="8c73a2a4-758b-4e34-81ed-39462e48bd92" providerId="ADAL" clId="{83A706B2-AA95-4CDC-834C-F4D908C80230}" dt="2025-02-09T23:48:20.230" v="543" actId="20577"/>
-        <pc:sldMkLst>
-          <pc:docMk/>
-          <pc:sldMk cId="1023731220" sldId="300"/>
-        </pc:sldMkLst>
-        <pc:spChg chg="mod">
-          <ac:chgData name="Christian Camilo Cano Vasquez" userId="8c73a2a4-758b-4e34-81ed-39462e48bd92" providerId="ADAL" clId="{83A706B2-AA95-4CDC-834C-F4D908C80230}" dt="2025-02-09T23:45:57.548" v="541" actId="20577"/>
-          <ac:spMkLst>
-            <pc:docMk/>
-            <pc:sldMk cId="1023731220" sldId="300"/>
-            <ac:spMk id="8" creationId="{B0CFB20A-64F3-A296-71E8-F4FA17D35314}"/>
-          </ac:spMkLst>
-        </pc:spChg>
-        <pc:spChg chg="mod">
-          <ac:chgData name="Christian Camilo Cano Vasquez" userId="8c73a2a4-758b-4e34-81ed-39462e48bd92" providerId="ADAL" clId="{83A706B2-AA95-4CDC-834C-F4D908C80230}" dt="2025-02-09T23:48:20.230" v="543" actId="20577"/>
-          <ac:spMkLst>
-            <pc:docMk/>
-            <pc:sldMk cId="1023731220" sldId="300"/>
-            <ac:spMk id="16" creationId="{E1662E38-DE72-ADF3-A38E-08ED40DCC2AD}"/>
-          </ac:spMkLst>
-        </pc:spChg>
-      </pc:sldChg>
-      <pc:sldChg chg="modSp add mod">
-        <pc:chgData name="Christian Camilo Cano Vasquez" userId="8c73a2a4-758b-4e34-81ed-39462e48bd92" providerId="ADAL" clId="{83A706B2-AA95-4CDC-834C-F4D908C80230}" dt="2025-02-10T08:28:14.084" v="652" actId="20577"/>
-        <pc:sldMkLst>
-          <pc:docMk/>
-          <pc:sldMk cId="699864314" sldId="301"/>
-        </pc:sldMkLst>
-        <pc:spChg chg="mod">
-          <ac:chgData name="Christian Camilo Cano Vasquez" userId="8c73a2a4-758b-4e34-81ed-39462e48bd92" providerId="ADAL" clId="{83A706B2-AA95-4CDC-834C-F4D908C80230}" dt="2025-02-09T23:49:32.025" v="650" actId="20577"/>
-          <ac:spMkLst>
-            <pc:docMk/>
-            <pc:sldMk cId="699864314" sldId="301"/>
-            <ac:spMk id="2" creationId="{42D73A2E-0E5A-8A39-6B70-F9E94D6DBB70}"/>
-          </ac:spMkLst>
-        </pc:spChg>
-        <pc:spChg chg="mod">
-          <ac:chgData name="Christian Camilo Cano Vasquez" userId="8c73a2a4-758b-4e34-81ed-39462e48bd92" providerId="ADAL" clId="{83A706B2-AA95-4CDC-834C-F4D908C80230}" dt="2025-02-10T08:28:14.084" v="652" actId="20577"/>
-          <ac:spMkLst>
-            <pc:docMk/>
-            <pc:sldMk cId="699864314" sldId="301"/>
-            <ac:spMk id="16" creationId="{1E256546-3103-104D-A87F-78AEBE5D595E}"/>
-          </ac:spMkLst>
-        </pc:spChg>
-      </pc:sldChg>
-    </pc:docChg>
-  </pc:docChgLst>
-</pc:chgInfo>
-</file>
-
 <file path=ppt/handoutMasters/handoutMaster1.xml><?xml version="1.0" encoding="utf-8"?>
 <p:handoutMaster xmlns:a="http://schemas.openxmlformats.org/drawingml/2006/main" xmlns:r="http://schemas.openxmlformats.org/officeDocument/2006/relationships" xmlns:p="http://schemas.openxmlformats.org/presentationml/2006/main">
   <p:cSld>
@@ -819,7 +234,7 @@
           <a:p>
             <a:fld id="{8438F8DC-35B0-48E6-A86E-42F1F08DD00F}" type="datetimeFigureOut">
               <a:rPr lang="es-ES" smtClean="0"/>
-              <a:t>09/03/2026</a:t>
+              <a:t>14/10/2026</a:t>
             </a:fld>
             <a:endParaRPr lang="es-ES"/>
           </a:p>
@@ -996,7 +411,7 @@
           <a:p>
             <a:fld id="{FACBDC12-F39B-4B97-8F4D-6734F9D366FF}" type="datetimeFigureOut">
               <a:rPr lang="es-ES" smtClean="0"/>
-              <a:t>09/03/2026</a:t>
+              <a:t>14/10/2026</a:t>
             </a:fld>
             <a:endParaRPr lang="es-ES"/>
           </a:p>
@@ -1328,7 +743,7 @@
           <a:p>
             <a:fld id="{676223B9-C868-4436-87D9-1A3152E1157A}" type="slidenum">
               <a:rPr lang="es-ES" smtClean="0"/>
-              <a:t>4</a:t>
+              <a:t>3</a:t>
             </a:fld>
             <a:endParaRPr lang="es-ES"/>
           </a:p>
@@ -1338,414 +753,6 @@
     <p:extLst>
       <p:ext uri="{BB962C8B-B14F-4D97-AF65-F5344CB8AC3E}">
         <p14:creationId xmlns:p14="http://schemas.microsoft.com/office/powerpoint/2010/main" val="2092532372"/>
-      </p:ext>
-    </p:extLst>
-  </p:cSld>
-  <p:clrMapOvr>
-    <a:masterClrMapping/>
-  </p:clrMapOvr>
-</p:notes>
-</file>
-
-<file path=ppt/notesSlides/notesSlide10.xml><?xml version="1.0" encoding="utf-8"?>
-<p:notes xmlns:a="http://schemas.openxmlformats.org/drawingml/2006/main" xmlns:r="http://schemas.openxmlformats.org/officeDocument/2006/relationships" xmlns:p="http://schemas.openxmlformats.org/presentationml/2006/main">
-  <p:cSld>
-    <p:spTree>
-      <p:nvGrpSpPr>
-        <p:cNvPr id="1" name=""/>
-        <p:cNvGrpSpPr/>
-        <p:nvPr/>
-      </p:nvGrpSpPr>
-      <p:grpSpPr>
-        <a:xfrm>
-          <a:off x="0" y="0"/>
-          <a:ext cx="0" cy="0"/>
-          <a:chOff x="0" y="0"/>
-          <a:chExt cx="0" cy="0"/>
-        </a:xfrm>
-      </p:grpSpPr>
-      <p:sp>
-        <p:nvSpPr>
-          <p:cNvPr id="2" name="Marcador de imagen de diapositiva 1"/>
-          <p:cNvSpPr>
-            <a:spLocks noGrp="1" noRot="1" noChangeAspect="1"/>
-          </p:cNvSpPr>
-          <p:nvPr>
-            <p:ph type="sldImg"/>
-          </p:nvPr>
-        </p:nvSpPr>
-        <p:spPr/>
-      </p:sp>
-      <p:sp>
-        <p:nvSpPr>
-          <p:cNvPr id="3" name="Marcador de notas 2"/>
-          <p:cNvSpPr>
-            <a:spLocks noGrp="1"/>
-          </p:cNvSpPr>
-          <p:nvPr>
-            <p:ph type="body" idx="1"/>
-          </p:nvPr>
-        </p:nvSpPr>
-        <p:spPr/>
-        <p:txBody>
-          <a:bodyPr/>
-          <a:lstStyle/>
-          <a:p>
-            <a:endParaRPr lang="es-ES" dirty="0"/>
-          </a:p>
-        </p:txBody>
-      </p:sp>
-      <p:sp>
-        <p:nvSpPr>
-          <p:cNvPr id="4" name="Marcador de número de diapositiva 3"/>
-          <p:cNvSpPr>
-            <a:spLocks noGrp="1"/>
-          </p:cNvSpPr>
-          <p:nvPr>
-            <p:ph type="sldNum" sz="quarter" idx="5"/>
-          </p:nvPr>
-        </p:nvSpPr>
-        <p:spPr/>
-        <p:txBody>
-          <a:bodyPr/>
-          <a:lstStyle/>
-          <a:p>
-            <a:fld id="{676223B9-C868-4436-87D9-1A3152E1157A}" type="slidenum">
-              <a:rPr lang="es-ES" smtClean="0"/>
-              <a:t>14</a:t>
-            </a:fld>
-            <a:endParaRPr lang="es-ES"/>
-          </a:p>
-        </p:txBody>
-      </p:sp>
-    </p:spTree>
-    <p:extLst>
-      <p:ext uri="{BB962C8B-B14F-4D97-AF65-F5344CB8AC3E}">
-        <p14:creationId xmlns:p14="http://schemas.microsoft.com/office/powerpoint/2010/main" val="942232946"/>
-      </p:ext>
-    </p:extLst>
-  </p:cSld>
-  <p:clrMapOvr>
-    <a:masterClrMapping/>
-  </p:clrMapOvr>
-</p:notes>
-</file>
-
-<file path=ppt/notesSlides/notesSlide11.xml><?xml version="1.0" encoding="utf-8"?>
-<p:notes xmlns:a="http://schemas.openxmlformats.org/drawingml/2006/main" xmlns:r="http://schemas.openxmlformats.org/officeDocument/2006/relationships" xmlns:p="http://schemas.openxmlformats.org/presentationml/2006/main">
-  <p:cSld>
-    <p:spTree>
-      <p:nvGrpSpPr>
-        <p:cNvPr id="1" name="">
-          <a:extLst>
-            <a:ext uri="{FF2B5EF4-FFF2-40B4-BE49-F238E27FC236}">
-              <a16:creationId xmlns:a16="http://schemas.microsoft.com/office/drawing/2014/main" id="{1AC9112F-7FB7-4F49-F4F6-C1D0DC6ADBEE}"/>
-            </a:ext>
-          </a:extLst>
-        </p:cNvPr>
-        <p:cNvGrpSpPr/>
-        <p:nvPr/>
-      </p:nvGrpSpPr>
-      <p:grpSpPr>
-        <a:xfrm>
-          <a:off x="0" y="0"/>
-          <a:ext cx="0" cy="0"/>
-          <a:chOff x="0" y="0"/>
-          <a:chExt cx="0" cy="0"/>
-        </a:xfrm>
-      </p:grpSpPr>
-      <p:sp>
-        <p:nvSpPr>
-          <p:cNvPr id="2" name="Marcador de imagen de diapositiva 1">
-            <a:extLst>
-              <a:ext uri="{FF2B5EF4-FFF2-40B4-BE49-F238E27FC236}">
-                <a16:creationId xmlns:a16="http://schemas.microsoft.com/office/drawing/2014/main" id="{5190F532-536D-B583-3561-FD0C56234D42}"/>
-              </a:ext>
-            </a:extLst>
-          </p:cNvPr>
-          <p:cNvSpPr>
-            <a:spLocks noGrp="1" noRot="1" noChangeAspect="1"/>
-          </p:cNvSpPr>
-          <p:nvPr>
-            <p:ph type="sldImg"/>
-          </p:nvPr>
-        </p:nvSpPr>
-        <p:spPr/>
-      </p:sp>
-      <p:sp>
-        <p:nvSpPr>
-          <p:cNvPr id="3" name="Marcador de notas 2">
-            <a:extLst>
-              <a:ext uri="{FF2B5EF4-FFF2-40B4-BE49-F238E27FC236}">
-                <a16:creationId xmlns:a16="http://schemas.microsoft.com/office/drawing/2014/main" id="{CC233B1A-142E-BC7B-FE19-6D22CE4082B2}"/>
-              </a:ext>
-            </a:extLst>
-          </p:cNvPr>
-          <p:cNvSpPr>
-            <a:spLocks noGrp="1"/>
-          </p:cNvSpPr>
-          <p:nvPr>
-            <p:ph type="body" idx="1"/>
-          </p:nvPr>
-        </p:nvSpPr>
-        <p:spPr/>
-        <p:txBody>
-          <a:bodyPr/>
-          <a:lstStyle/>
-          <a:p>
-            <a:endParaRPr lang="es-ES" dirty="0"/>
-          </a:p>
-        </p:txBody>
-      </p:sp>
-      <p:sp>
-        <p:nvSpPr>
-          <p:cNvPr id="4" name="Marcador de número de diapositiva 3">
-            <a:extLst>
-              <a:ext uri="{FF2B5EF4-FFF2-40B4-BE49-F238E27FC236}">
-                <a16:creationId xmlns:a16="http://schemas.microsoft.com/office/drawing/2014/main" id="{685087E6-8FC6-B2E3-2D74-B3C5168F5568}"/>
-              </a:ext>
-            </a:extLst>
-          </p:cNvPr>
-          <p:cNvSpPr>
-            <a:spLocks noGrp="1"/>
-          </p:cNvSpPr>
-          <p:nvPr>
-            <p:ph type="sldNum" sz="quarter" idx="5"/>
-          </p:nvPr>
-        </p:nvSpPr>
-        <p:spPr/>
-        <p:txBody>
-          <a:bodyPr/>
-          <a:lstStyle/>
-          <a:p>
-            <a:fld id="{676223B9-C868-4436-87D9-1A3152E1157A}" type="slidenum">
-              <a:rPr lang="es-ES" smtClean="0"/>
-              <a:t>15</a:t>
-            </a:fld>
-            <a:endParaRPr lang="es-ES"/>
-          </a:p>
-        </p:txBody>
-      </p:sp>
-    </p:spTree>
-    <p:extLst>
-      <p:ext uri="{BB962C8B-B14F-4D97-AF65-F5344CB8AC3E}">
-        <p14:creationId xmlns:p14="http://schemas.microsoft.com/office/powerpoint/2010/main" val="1581859005"/>
-      </p:ext>
-    </p:extLst>
-  </p:cSld>
-  <p:clrMapOvr>
-    <a:masterClrMapping/>
-  </p:clrMapOvr>
-</p:notes>
-</file>
-
-<file path=ppt/notesSlides/notesSlide12.xml><?xml version="1.0" encoding="utf-8"?>
-<p:notes xmlns:a="http://schemas.openxmlformats.org/drawingml/2006/main" xmlns:r="http://schemas.openxmlformats.org/officeDocument/2006/relationships" xmlns:p="http://schemas.openxmlformats.org/presentationml/2006/main">
-  <p:cSld>
-    <p:spTree>
-      <p:nvGrpSpPr>
-        <p:cNvPr id="1" name="">
-          <a:extLst>
-            <a:ext uri="{FF2B5EF4-FFF2-40B4-BE49-F238E27FC236}">
-              <a16:creationId xmlns:a16="http://schemas.microsoft.com/office/drawing/2014/main" id="{95993BBE-3704-D894-1C10-5488EE611F08}"/>
-            </a:ext>
-          </a:extLst>
-        </p:cNvPr>
-        <p:cNvGrpSpPr/>
-        <p:nvPr/>
-      </p:nvGrpSpPr>
-      <p:grpSpPr>
-        <a:xfrm>
-          <a:off x="0" y="0"/>
-          <a:ext cx="0" cy="0"/>
-          <a:chOff x="0" y="0"/>
-          <a:chExt cx="0" cy="0"/>
-        </a:xfrm>
-      </p:grpSpPr>
-      <p:sp>
-        <p:nvSpPr>
-          <p:cNvPr id="2" name="Marcador de imagen de diapositiva 1">
-            <a:extLst>
-              <a:ext uri="{FF2B5EF4-FFF2-40B4-BE49-F238E27FC236}">
-                <a16:creationId xmlns:a16="http://schemas.microsoft.com/office/drawing/2014/main" id="{19BB04E2-F70F-42F7-9964-3D274C49FB9C}"/>
-              </a:ext>
-            </a:extLst>
-          </p:cNvPr>
-          <p:cNvSpPr>
-            <a:spLocks noGrp="1" noRot="1" noChangeAspect="1"/>
-          </p:cNvSpPr>
-          <p:nvPr>
-            <p:ph type="sldImg"/>
-          </p:nvPr>
-        </p:nvSpPr>
-        <p:spPr/>
-      </p:sp>
-      <p:sp>
-        <p:nvSpPr>
-          <p:cNvPr id="3" name="Marcador de notas 2">
-            <a:extLst>
-              <a:ext uri="{FF2B5EF4-FFF2-40B4-BE49-F238E27FC236}">
-                <a16:creationId xmlns:a16="http://schemas.microsoft.com/office/drawing/2014/main" id="{F6664AEC-7D1D-9DDC-3B94-3AE8450C7E5E}"/>
-              </a:ext>
-            </a:extLst>
-          </p:cNvPr>
-          <p:cNvSpPr>
-            <a:spLocks noGrp="1"/>
-          </p:cNvSpPr>
-          <p:nvPr>
-            <p:ph type="body" idx="1"/>
-          </p:nvPr>
-        </p:nvSpPr>
-        <p:spPr/>
-        <p:txBody>
-          <a:bodyPr/>
-          <a:lstStyle/>
-          <a:p>
-            <a:endParaRPr lang="es-ES" dirty="0"/>
-          </a:p>
-        </p:txBody>
-      </p:sp>
-      <p:sp>
-        <p:nvSpPr>
-          <p:cNvPr id="4" name="Marcador de número de diapositiva 3">
-            <a:extLst>
-              <a:ext uri="{FF2B5EF4-FFF2-40B4-BE49-F238E27FC236}">
-                <a16:creationId xmlns:a16="http://schemas.microsoft.com/office/drawing/2014/main" id="{E8F62EEB-2D30-2026-D252-4267AF688251}"/>
-              </a:ext>
-            </a:extLst>
-          </p:cNvPr>
-          <p:cNvSpPr>
-            <a:spLocks noGrp="1"/>
-          </p:cNvSpPr>
-          <p:nvPr>
-            <p:ph type="sldNum" sz="quarter" idx="5"/>
-          </p:nvPr>
-        </p:nvSpPr>
-        <p:spPr/>
-        <p:txBody>
-          <a:bodyPr/>
-          <a:lstStyle/>
-          <a:p>
-            <a:fld id="{676223B9-C868-4436-87D9-1A3152E1157A}" type="slidenum">
-              <a:rPr lang="es-ES" smtClean="0"/>
-              <a:t>16</a:t>
-            </a:fld>
-            <a:endParaRPr lang="es-ES"/>
-          </a:p>
-        </p:txBody>
-      </p:sp>
-    </p:spTree>
-    <p:extLst>
-      <p:ext uri="{BB962C8B-B14F-4D97-AF65-F5344CB8AC3E}">
-        <p14:creationId xmlns:p14="http://schemas.microsoft.com/office/powerpoint/2010/main" val="2905953062"/>
-      </p:ext>
-    </p:extLst>
-  </p:cSld>
-  <p:clrMapOvr>
-    <a:masterClrMapping/>
-  </p:clrMapOvr>
-</p:notes>
-</file>
-
-<file path=ppt/notesSlides/notesSlide13.xml><?xml version="1.0" encoding="utf-8"?>
-<p:notes xmlns:a="http://schemas.openxmlformats.org/drawingml/2006/main" xmlns:r="http://schemas.openxmlformats.org/officeDocument/2006/relationships" xmlns:p="http://schemas.openxmlformats.org/presentationml/2006/main">
-  <p:cSld>
-    <p:spTree>
-      <p:nvGrpSpPr>
-        <p:cNvPr id="1" name="">
-          <a:extLst>
-            <a:ext uri="{FF2B5EF4-FFF2-40B4-BE49-F238E27FC236}">
-              <a16:creationId xmlns:a16="http://schemas.microsoft.com/office/drawing/2014/main" id="{D3E3BE0A-4FED-FF2A-A29F-A3D3BA9386AE}"/>
-            </a:ext>
-          </a:extLst>
-        </p:cNvPr>
-        <p:cNvGrpSpPr/>
-        <p:nvPr/>
-      </p:nvGrpSpPr>
-      <p:grpSpPr>
-        <a:xfrm>
-          <a:off x="0" y="0"/>
-          <a:ext cx="0" cy="0"/>
-          <a:chOff x="0" y="0"/>
-          <a:chExt cx="0" cy="0"/>
-        </a:xfrm>
-      </p:grpSpPr>
-      <p:sp>
-        <p:nvSpPr>
-          <p:cNvPr id="2" name="Marcador de imagen de diapositiva 1">
-            <a:extLst>
-              <a:ext uri="{FF2B5EF4-FFF2-40B4-BE49-F238E27FC236}">
-                <a16:creationId xmlns:a16="http://schemas.microsoft.com/office/drawing/2014/main" id="{F78D4508-C900-33E0-69A9-12D9A5EC8BE2}"/>
-              </a:ext>
-            </a:extLst>
-          </p:cNvPr>
-          <p:cNvSpPr>
-            <a:spLocks noGrp="1" noRot="1" noChangeAspect="1"/>
-          </p:cNvSpPr>
-          <p:nvPr>
-            <p:ph type="sldImg"/>
-          </p:nvPr>
-        </p:nvSpPr>
-        <p:spPr/>
-      </p:sp>
-      <p:sp>
-        <p:nvSpPr>
-          <p:cNvPr id="3" name="Marcador de notas 2">
-            <a:extLst>
-              <a:ext uri="{FF2B5EF4-FFF2-40B4-BE49-F238E27FC236}">
-                <a16:creationId xmlns:a16="http://schemas.microsoft.com/office/drawing/2014/main" id="{23678FD2-F52A-F464-A6DC-9AE4044DCA67}"/>
-              </a:ext>
-            </a:extLst>
-          </p:cNvPr>
-          <p:cNvSpPr>
-            <a:spLocks noGrp="1"/>
-          </p:cNvSpPr>
-          <p:nvPr>
-            <p:ph type="body" idx="1"/>
-          </p:nvPr>
-        </p:nvSpPr>
-        <p:spPr/>
-        <p:txBody>
-          <a:bodyPr/>
-          <a:lstStyle/>
-          <a:p>
-            <a:endParaRPr lang="es-ES" dirty="0"/>
-          </a:p>
-        </p:txBody>
-      </p:sp>
-      <p:sp>
-        <p:nvSpPr>
-          <p:cNvPr id="4" name="Marcador de número de diapositiva 3">
-            <a:extLst>
-              <a:ext uri="{FF2B5EF4-FFF2-40B4-BE49-F238E27FC236}">
-                <a16:creationId xmlns:a16="http://schemas.microsoft.com/office/drawing/2014/main" id="{A6FF2B29-AFFB-903E-D5AD-4E4E99BA5701}"/>
-              </a:ext>
-            </a:extLst>
-          </p:cNvPr>
-          <p:cNvSpPr>
-            <a:spLocks noGrp="1"/>
-          </p:cNvSpPr>
-          <p:nvPr>
-            <p:ph type="sldNum" sz="quarter" idx="5"/>
-          </p:nvPr>
-        </p:nvSpPr>
-        <p:spPr/>
-        <p:txBody>
-          <a:bodyPr/>
-          <a:lstStyle/>
-          <a:p>
-            <a:fld id="{676223B9-C868-4436-87D9-1A3152E1157A}" type="slidenum">
-              <a:rPr lang="es-ES" smtClean="0"/>
-              <a:t>17</a:t>
-            </a:fld>
-            <a:endParaRPr lang="es-ES"/>
-          </a:p>
-        </p:txBody>
-      </p:sp>
-    </p:spTree>
-    <p:extLst>
-      <p:ext uri="{BB962C8B-B14F-4D97-AF65-F5344CB8AC3E}">
-        <p14:creationId xmlns:p14="http://schemas.microsoft.com/office/powerpoint/2010/main" val="1083298638"/>
       </p:ext>
     </p:extLst>
   </p:cSld>
@@ -1844,7 +851,7 @@
           <a:p>
             <a:fld id="{676223B9-C868-4436-87D9-1A3152E1157A}" type="slidenum">
               <a:rPr lang="es-ES" smtClean="0"/>
-              <a:t>5</a:t>
+              <a:t>4</a:t>
             </a:fld>
             <a:endParaRPr lang="es-ES"/>
           </a:p>
@@ -1952,7 +959,7 @@
           <a:p>
             <a:fld id="{676223B9-C868-4436-87D9-1A3152E1157A}" type="slidenum">
               <a:rPr lang="es-ES" smtClean="0"/>
-              <a:t>6</a:t>
+              <a:t>5</a:t>
             </a:fld>
             <a:endParaRPr lang="es-ES"/>
           </a:p>
@@ -1972,114 +979,6 @@
 </file>
 
 <file path=ppt/notesSlides/notesSlide4.xml><?xml version="1.0" encoding="utf-8"?>
-<p:notes xmlns:a="http://schemas.openxmlformats.org/drawingml/2006/main" xmlns:r="http://schemas.openxmlformats.org/officeDocument/2006/relationships" xmlns:p="http://schemas.openxmlformats.org/presentationml/2006/main">
-  <p:cSld>
-    <p:spTree>
-      <p:nvGrpSpPr>
-        <p:cNvPr id="1" name="">
-          <a:extLst>
-            <a:ext uri="{FF2B5EF4-FFF2-40B4-BE49-F238E27FC236}">
-              <a16:creationId xmlns:a16="http://schemas.microsoft.com/office/drawing/2014/main" id="{4E3C5711-C157-AA5E-1EA1-9F4C3F40B90E}"/>
-            </a:ext>
-          </a:extLst>
-        </p:cNvPr>
-        <p:cNvGrpSpPr/>
-        <p:nvPr/>
-      </p:nvGrpSpPr>
-      <p:grpSpPr>
-        <a:xfrm>
-          <a:off x="0" y="0"/>
-          <a:ext cx="0" cy="0"/>
-          <a:chOff x="0" y="0"/>
-          <a:chExt cx="0" cy="0"/>
-        </a:xfrm>
-      </p:grpSpPr>
-      <p:sp>
-        <p:nvSpPr>
-          <p:cNvPr id="2" name="Marcador de imagen de diapositiva 1">
-            <a:extLst>
-              <a:ext uri="{FF2B5EF4-FFF2-40B4-BE49-F238E27FC236}">
-                <a16:creationId xmlns:a16="http://schemas.microsoft.com/office/drawing/2014/main" id="{FFA117F6-F66D-FFD4-422F-EBD94B31F3F1}"/>
-              </a:ext>
-            </a:extLst>
-          </p:cNvPr>
-          <p:cNvSpPr>
-            <a:spLocks noGrp="1" noRot="1" noChangeAspect="1"/>
-          </p:cNvSpPr>
-          <p:nvPr>
-            <p:ph type="sldImg"/>
-          </p:nvPr>
-        </p:nvSpPr>
-        <p:spPr/>
-      </p:sp>
-      <p:sp>
-        <p:nvSpPr>
-          <p:cNvPr id="3" name="Marcador de notas 2">
-            <a:extLst>
-              <a:ext uri="{FF2B5EF4-FFF2-40B4-BE49-F238E27FC236}">
-                <a16:creationId xmlns:a16="http://schemas.microsoft.com/office/drawing/2014/main" id="{02B512FE-9F6C-4ABD-23FA-CA518B458D1F}"/>
-              </a:ext>
-            </a:extLst>
-          </p:cNvPr>
-          <p:cNvSpPr>
-            <a:spLocks noGrp="1"/>
-          </p:cNvSpPr>
-          <p:nvPr>
-            <p:ph type="body" idx="1"/>
-          </p:nvPr>
-        </p:nvSpPr>
-        <p:spPr/>
-        <p:txBody>
-          <a:bodyPr/>
-          <a:lstStyle/>
-          <a:p>
-            <a:endParaRPr lang="es-ES" dirty="0"/>
-          </a:p>
-        </p:txBody>
-      </p:sp>
-      <p:sp>
-        <p:nvSpPr>
-          <p:cNvPr id="4" name="Marcador de número de diapositiva 3">
-            <a:extLst>
-              <a:ext uri="{FF2B5EF4-FFF2-40B4-BE49-F238E27FC236}">
-                <a16:creationId xmlns:a16="http://schemas.microsoft.com/office/drawing/2014/main" id="{9624E7A5-CBFC-658B-8E88-8AF8084D5BC4}"/>
-              </a:ext>
-            </a:extLst>
-          </p:cNvPr>
-          <p:cNvSpPr>
-            <a:spLocks noGrp="1"/>
-          </p:cNvSpPr>
-          <p:nvPr>
-            <p:ph type="sldNum" sz="quarter" idx="5"/>
-          </p:nvPr>
-        </p:nvSpPr>
-        <p:spPr/>
-        <p:txBody>
-          <a:bodyPr/>
-          <a:lstStyle/>
-          <a:p>
-            <a:fld id="{676223B9-C868-4436-87D9-1A3152E1157A}" type="slidenum">
-              <a:rPr lang="es-ES" smtClean="0"/>
-              <a:t>7</a:t>
-            </a:fld>
-            <a:endParaRPr lang="es-ES"/>
-          </a:p>
-        </p:txBody>
-      </p:sp>
-    </p:spTree>
-    <p:extLst>
-      <p:ext uri="{BB962C8B-B14F-4D97-AF65-F5344CB8AC3E}">
-        <p14:creationId xmlns:p14="http://schemas.microsoft.com/office/powerpoint/2010/main" val="1832961436"/>
-      </p:ext>
-    </p:extLst>
-  </p:cSld>
-  <p:clrMapOvr>
-    <a:masterClrMapping/>
-  </p:clrMapOvr>
-</p:notes>
-</file>
-
-<file path=ppt/notesSlides/notesSlide5.xml><?xml version="1.0" encoding="utf-8"?>
 <p:notes xmlns:a="http://schemas.openxmlformats.org/drawingml/2006/main" xmlns:r="http://schemas.openxmlformats.org/officeDocument/2006/relationships" xmlns:p="http://schemas.openxmlformats.org/presentationml/2006/main">
   <p:cSld>
     <p:spTree>
@@ -2168,7 +1067,7 @@
           <a:p>
             <a:fld id="{676223B9-C868-4436-87D9-1A3152E1157A}" type="slidenum">
               <a:rPr lang="es-ES" smtClean="0"/>
-              <a:t>9</a:t>
+              <a:t>6</a:t>
             </a:fld>
             <a:endParaRPr lang="es-ES"/>
           </a:p>
@@ -2177,7 +1076,7 @@
     </p:spTree>
     <p:extLst>
       <p:ext uri="{BB962C8B-B14F-4D97-AF65-F5344CB8AC3E}">
-        <p14:creationId xmlns:p14="http://schemas.microsoft.com/office/powerpoint/2010/main" val="3433115927"/>
+        <p14:creationId xmlns:p14="http://schemas.microsoft.com/office/powerpoint/2010/main" val="2917382716"/>
       </p:ext>
     </p:extLst>
   </p:cSld>
@@ -2187,7 +1086,7 @@
 </p:notes>
 </file>
 
-<file path=ppt/notesSlides/notesSlide6.xml><?xml version="1.0" encoding="utf-8"?>
+<file path=ppt/notesSlides/notesSlide5.xml><?xml version="1.0" encoding="utf-8"?>
 <p:notes xmlns:a="http://schemas.openxmlformats.org/drawingml/2006/main" xmlns:r="http://schemas.openxmlformats.org/officeDocument/2006/relationships" xmlns:p="http://schemas.openxmlformats.org/presentationml/2006/main">
   <p:cSld>
     <p:spTree>
@@ -2276,7 +1175,7 @@
           <a:p>
             <a:fld id="{676223B9-C868-4436-87D9-1A3152E1157A}" type="slidenum">
               <a:rPr lang="es-ES" smtClean="0"/>
-              <a:t>10</a:t>
+              <a:t>7</a:t>
             </a:fld>
             <a:endParaRPr lang="es-ES"/>
           </a:p>
@@ -2295,223 +1194,7 @@
 </p:notes>
 </file>
 
-<file path=ppt/notesSlides/notesSlide7.xml><?xml version="1.0" encoding="utf-8"?>
-<p:notes xmlns:a="http://schemas.openxmlformats.org/drawingml/2006/main" xmlns:r="http://schemas.openxmlformats.org/officeDocument/2006/relationships" xmlns:p="http://schemas.openxmlformats.org/presentationml/2006/main">
-  <p:cSld>
-    <p:spTree>
-      <p:nvGrpSpPr>
-        <p:cNvPr id="1" name="">
-          <a:extLst>
-            <a:ext uri="{FF2B5EF4-FFF2-40B4-BE49-F238E27FC236}">
-              <a16:creationId xmlns:a16="http://schemas.microsoft.com/office/drawing/2014/main" id="{9946B1C6-3682-4180-87C4-06A6C4E8012F}"/>
-            </a:ext>
-          </a:extLst>
-        </p:cNvPr>
-        <p:cNvGrpSpPr/>
-        <p:nvPr/>
-      </p:nvGrpSpPr>
-      <p:grpSpPr>
-        <a:xfrm>
-          <a:off x="0" y="0"/>
-          <a:ext cx="0" cy="0"/>
-          <a:chOff x="0" y="0"/>
-          <a:chExt cx="0" cy="0"/>
-        </a:xfrm>
-      </p:grpSpPr>
-      <p:sp>
-        <p:nvSpPr>
-          <p:cNvPr id="2" name="Marcador de imagen de diapositiva 1">
-            <a:extLst>
-              <a:ext uri="{FF2B5EF4-FFF2-40B4-BE49-F238E27FC236}">
-                <a16:creationId xmlns:a16="http://schemas.microsoft.com/office/drawing/2014/main" id="{7AAE3208-A690-FD1F-E94C-D310F334A7EB}"/>
-              </a:ext>
-            </a:extLst>
-          </p:cNvPr>
-          <p:cNvSpPr>
-            <a:spLocks noGrp="1" noRot="1" noChangeAspect="1"/>
-          </p:cNvSpPr>
-          <p:nvPr>
-            <p:ph type="sldImg"/>
-          </p:nvPr>
-        </p:nvSpPr>
-        <p:spPr/>
-      </p:sp>
-      <p:sp>
-        <p:nvSpPr>
-          <p:cNvPr id="3" name="Marcador de notas 2">
-            <a:extLst>
-              <a:ext uri="{FF2B5EF4-FFF2-40B4-BE49-F238E27FC236}">
-                <a16:creationId xmlns:a16="http://schemas.microsoft.com/office/drawing/2014/main" id="{08F7B85C-6C72-3DDD-289B-E766AA64E93D}"/>
-              </a:ext>
-            </a:extLst>
-          </p:cNvPr>
-          <p:cNvSpPr>
-            <a:spLocks noGrp="1"/>
-          </p:cNvSpPr>
-          <p:nvPr>
-            <p:ph type="body" idx="1"/>
-          </p:nvPr>
-        </p:nvSpPr>
-        <p:spPr/>
-        <p:txBody>
-          <a:bodyPr/>
-          <a:lstStyle/>
-          <a:p>
-            <a:endParaRPr lang="es-ES" dirty="0"/>
-          </a:p>
-        </p:txBody>
-      </p:sp>
-      <p:sp>
-        <p:nvSpPr>
-          <p:cNvPr id="4" name="Marcador de número de diapositiva 3">
-            <a:extLst>
-              <a:ext uri="{FF2B5EF4-FFF2-40B4-BE49-F238E27FC236}">
-                <a16:creationId xmlns:a16="http://schemas.microsoft.com/office/drawing/2014/main" id="{B91AFB1E-8F28-1193-6909-CAB4A27B11F0}"/>
-              </a:ext>
-            </a:extLst>
-          </p:cNvPr>
-          <p:cNvSpPr>
-            <a:spLocks noGrp="1"/>
-          </p:cNvSpPr>
-          <p:nvPr>
-            <p:ph type="sldNum" sz="quarter" idx="5"/>
-          </p:nvPr>
-        </p:nvSpPr>
-        <p:spPr/>
-        <p:txBody>
-          <a:bodyPr/>
-          <a:lstStyle/>
-          <a:p>
-            <a:fld id="{676223B9-C868-4436-87D9-1A3152E1157A}" type="slidenum">
-              <a:rPr lang="es-ES" smtClean="0"/>
-              <a:t>11</a:t>
-            </a:fld>
-            <a:endParaRPr lang="es-ES"/>
-          </a:p>
-        </p:txBody>
-      </p:sp>
-    </p:spTree>
-    <p:extLst>
-      <p:ext uri="{BB962C8B-B14F-4D97-AF65-F5344CB8AC3E}">
-        <p14:creationId xmlns:p14="http://schemas.microsoft.com/office/powerpoint/2010/main" val="2835170996"/>
-      </p:ext>
-    </p:extLst>
-  </p:cSld>
-  <p:clrMapOvr>
-    <a:masterClrMapping/>
-  </p:clrMapOvr>
-</p:notes>
-</file>
-
-<file path=ppt/notesSlides/notesSlide8.xml><?xml version="1.0" encoding="utf-8"?>
-<p:notes xmlns:a="http://schemas.openxmlformats.org/drawingml/2006/main" xmlns:r="http://schemas.openxmlformats.org/officeDocument/2006/relationships" xmlns:p="http://schemas.openxmlformats.org/presentationml/2006/main">
-  <p:cSld>
-    <p:spTree>
-      <p:nvGrpSpPr>
-        <p:cNvPr id="1" name="">
-          <a:extLst>
-            <a:ext uri="{FF2B5EF4-FFF2-40B4-BE49-F238E27FC236}">
-              <a16:creationId xmlns:a16="http://schemas.microsoft.com/office/drawing/2014/main" id="{4490BA22-DBA9-14F1-E21B-ACB4C6B7F323}"/>
-            </a:ext>
-          </a:extLst>
-        </p:cNvPr>
-        <p:cNvGrpSpPr/>
-        <p:nvPr/>
-      </p:nvGrpSpPr>
-      <p:grpSpPr>
-        <a:xfrm>
-          <a:off x="0" y="0"/>
-          <a:ext cx="0" cy="0"/>
-          <a:chOff x="0" y="0"/>
-          <a:chExt cx="0" cy="0"/>
-        </a:xfrm>
-      </p:grpSpPr>
-      <p:sp>
-        <p:nvSpPr>
-          <p:cNvPr id="2" name="Marcador de imagen de diapositiva 1">
-            <a:extLst>
-              <a:ext uri="{FF2B5EF4-FFF2-40B4-BE49-F238E27FC236}">
-                <a16:creationId xmlns:a16="http://schemas.microsoft.com/office/drawing/2014/main" id="{7316E6B2-214F-F40F-258D-FF87081027D2}"/>
-              </a:ext>
-            </a:extLst>
-          </p:cNvPr>
-          <p:cNvSpPr>
-            <a:spLocks noGrp="1" noRot="1" noChangeAspect="1"/>
-          </p:cNvSpPr>
-          <p:nvPr>
-            <p:ph type="sldImg"/>
-          </p:nvPr>
-        </p:nvSpPr>
-        <p:spPr/>
-      </p:sp>
-      <p:sp>
-        <p:nvSpPr>
-          <p:cNvPr id="3" name="Marcador de notas 2">
-            <a:extLst>
-              <a:ext uri="{FF2B5EF4-FFF2-40B4-BE49-F238E27FC236}">
-                <a16:creationId xmlns:a16="http://schemas.microsoft.com/office/drawing/2014/main" id="{1DB75D3B-42C9-35E9-99BA-0268BA71467A}"/>
-              </a:ext>
-            </a:extLst>
-          </p:cNvPr>
-          <p:cNvSpPr>
-            <a:spLocks noGrp="1"/>
-          </p:cNvSpPr>
-          <p:nvPr>
-            <p:ph type="body" idx="1"/>
-          </p:nvPr>
-        </p:nvSpPr>
-        <p:spPr/>
-        <p:txBody>
-          <a:bodyPr/>
-          <a:lstStyle/>
-          <a:p>
-            <a:endParaRPr lang="es-ES" dirty="0"/>
-          </a:p>
-        </p:txBody>
-      </p:sp>
-      <p:sp>
-        <p:nvSpPr>
-          <p:cNvPr id="4" name="Marcador de número de diapositiva 3">
-            <a:extLst>
-              <a:ext uri="{FF2B5EF4-FFF2-40B4-BE49-F238E27FC236}">
-                <a16:creationId xmlns:a16="http://schemas.microsoft.com/office/drawing/2014/main" id="{1A531B01-1E40-9F79-3CC8-FA6E8156BAFE}"/>
-              </a:ext>
-            </a:extLst>
-          </p:cNvPr>
-          <p:cNvSpPr>
-            <a:spLocks noGrp="1"/>
-          </p:cNvSpPr>
-          <p:nvPr>
-            <p:ph type="sldNum" sz="quarter" idx="5"/>
-          </p:nvPr>
-        </p:nvSpPr>
-        <p:spPr/>
-        <p:txBody>
-          <a:bodyPr/>
-          <a:lstStyle/>
-          <a:p>
-            <a:fld id="{676223B9-C868-4436-87D9-1A3152E1157A}" type="slidenum">
-              <a:rPr lang="es-ES" smtClean="0"/>
-              <a:t>12</a:t>
-            </a:fld>
-            <a:endParaRPr lang="es-ES"/>
-          </a:p>
-        </p:txBody>
-      </p:sp>
-    </p:spTree>
-    <p:extLst>
-      <p:ext uri="{BB962C8B-B14F-4D97-AF65-F5344CB8AC3E}">
-        <p14:creationId xmlns:p14="http://schemas.microsoft.com/office/powerpoint/2010/main" val="714953061"/>
-      </p:ext>
-    </p:extLst>
-  </p:cSld>
-  <p:clrMapOvr>
-    <a:masterClrMapping/>
-  </p:clrMapOvr>
-</p:notes>
-</file>
-
-<file path=ppt/notesSlides/notesSlide9.xml><?xml version="1.0" encoding="utf-8"?>
+<file path=ppt/notesSlides/notesSlide6.xml><?xml version="1.0" encoding="utf-8"?>
 <p:notes xmlns:a="http://schemas.openxmlformats.org/drawingml/2006/main" xmlns:r="http://schemas.openxmlformats.org/officeDocument/2006/relationships" xmlns:p="http://schemas.openxmlformats.org/presentationml/2006/main">
   <p:cSld>
     <p:spTree>
@@ -2600,7 +1283,7 @@
           <a:p>
             <a:fld id="{676223B9-C868-4436-87D9-1A3152E1157A}" type="slidenum">
               <a:rPr lang="es-ES" smtClean="0"/>
-              <a:t>13</a:t>
+              <a:t>8</a:t>
             </a:fld>
             <a:endParaRPr lang="es-ES"/>
           </a:p>
@@ -2737,7 +1420,7 @@
             </a:pPr>
             <a:r>
               <a:rPr lang="es-ES" spc="-5"/>
-              <a:t>LAB 2.0. COUPLERS</a:t>
+              <a:t>LAB 0.2. COUPLERS</a:t>
             </a:r>
             <a:endParaRPr spc="-5" dirty="0"/>
           </a:p>
@@ -2928,7 +1611,7 @@
             </a:pPr>
             <a:r>
               <a:rPr lang="es-ES" spc="-5"/>
-              <a:t>LAB 2.0. COUPLERS</a:t>
+              <a:t>LAB 0.2. COUPLERS</a:t>
             </a:r>
             <a:endParaRPr lang="es-ES" spc="-5" dirty="0"/>
           </a:p>
@@ -3126,7 +1809,7 @@
             </a:pPr>
             <a:r>
               <a:rPr lang="es-ES" spc="-5"/>
-              <a:t>LAB 2.0. COUPLERS</a:t>
+              <a:t>LAB 0.2. COUPLERS</a:t>
             </a:r>
             <a:endParaRPr spc="-5" dirty="0"/>
           </a:p>
@@ -3415,10 +2098,10 @@
           <p:nvPr userDrawn="1"/>
         </p:nvPicPr>
         <p:blipFill>
-          <a:blip r:embed="rId3">
+          <a:blip>
             <a:extLst>
               <a:ext uri="{96DAC541-7B7A-43D3-8B79-37D633B846F1}">
-                <asvg:svgBlip xmlns:asvg="http://schemas.microsoft.com/office/drawing/2016/SVG/main" r:embed="rId4"/>
+                <asvg:svgBlip xmlns:asvg="http://schemas.microsoft.com/office/drawing/2016/SVG/main" r:embed="rId3"/>
               </a:ext>
             </a:extLst>
           </a:blip>
@@ -3579,10 +2262,10 @@
           <p:nvPr userDrawn="1"/>
         </p:nvPicPr>
         <p:blipFill>
-          <a:blip r:embed="rId3">
+          <a:blip>
             <a:extLst>
               <a:ext uri="{96DAC541-7B7A-43D3-8B79-37D633B846F1}">
-                <asvg:svgBlip xmlns:asvg="http://schemas.microsoft.com/office/drawing/2016/SVG/main" r:embed="rId4"/>
+                <asvg:svgBlip xmlns:asvg="http://schemas.microsoft.com/office/drawing/2016/SVG/main" r:embed="rId3"/>
               </a:ext>
             </a:extLst>
           </a:blip>
@@ -3779,7 +2462,7 @@
             </a:pPr>
             <a:r>
               <a:rPr lang="es-ES" spc="-5"/>
-              <a:t>LAB 2.0. COUPLERS</a:t>
+              <a:t>LAB 0.2. COUPLERS</a:t>
             </a:r>
             <a:endParaRPr spc="-5" dirty="0"/>
           </a:p>
@@ -4079,7 +2762,7 @@
                 <a:latin typeface="Lucida Sans"/>
                 <a:cs typeface="Lucida Sans"/>
               </a:rPr>
-              <a:t> Book 2.0. </a:t>
+              <a:t> Book 2.0 </a:t>
             </a:r>
             <a:r>
               <a:rPr lang="es-ES" sz="3200" b="1" dirty="0" err="1">
@@ -4198,4662 +2881,6 @@
             <a:fld id="{B6F15528-21DE-4FAA-801E-634DDDAF4B2B}" type="slidenum">
               <a:rPr lang="es-ES" smtClean="0"/>
               <a:t>1</a:t>
-            </a:fld>
-            <a:endParaRPr lang="es-ES"/>
-          </a:p>
-        </p:txBody>
-      </p:sp>
-    </p:spTree>
-  </p:cSld>
-  <p:clrMapOvr>
-    <a:masterClrMapping/>
-  </p:clrMapOvr>
-</p:sld>
-</file>
-
-<file path=ppt/slides/slide10.xml><?xml version="1.0" encoding="utf-8"?>
-<p:sld xmlns:a="http://schemas.openxmlformats.org/drawingml/2006/main" xmlns:r="http://schemas.openxmlformats.org/officeDocument/2006/relationships" xmlns:p="http://schemas.openxmlformats.org/presentationml/2006/main">
-  <p:cSld>
-    <p:spTree>
-      <p:nvGrpSpPr>
-        <p:cNvPr id="1" name="">
-          <a:extLst>
-            <a:ext uri="{FF2B5EF4-FFF2-40B4-BE49-F238E27FC236}">
-              <a16:creationId xmlns:a16="http://schemas.microsoft.com/office/drawing/2014/main" id="{91BF7C0E-2677-BADF-D636-6F9B71E665FA}"/>
-            </a:ext>
-          </a:extLst>
-        </p:cNvPr>
-        <p:cNvGrpSpPr/>
-        <p:nvPr/>
-      </p:nvGrpSpPr>
-      <p:grpSpPr>
-        <a:xfrm>
-          <a:off x="0" y="0"/>
-          <a:ext cx="0" cy="0"/>
-          <a:chOff x="0" y="0"/>
-          <a:chExt cx="0" cy="0"/>
-        </a:xfrm>
-      </p:grpSpPr>
-      <p:sp>
-        <p:nvSpPr>
-          <p:cNvPr id="16" name="object 16">
-            <a:extLst>
-              <a:ext uri="{FF2B5EF4-FFF2-40B4-BE49-F238E27FC236}">
-                <a16:creationId xmlns:a16="http://schemas.microsoft.com/office/drawing/2014/main" id="{2B8D44BF-A3B5-6BED-C39C-FA8260E83536}"/>
-              </a:ext>
-            </a:extLst>
-          </p:cNvPr>
-          <p:cNvSpPr txBox="1">
-            <a:spLocks noGrp="1"/>
-          </p:cNvSpPr>
-          <p:nvPr>
-            <p:ph type="title"/>
-          </p:nvPr>
-        </p:nvSpPr>
-        <p:spPr>
-          <a:xfrm>
-            <a:off x="685800" y="408883"/>
-            <a:ext cx="10994410" cy="705321"/>
-          </a:xfrm>
-          <a:prstGeom prst="rect">
-            <a:avLst/>
-          </a:prstGeom>
-        </p:spPr>
-        <p:txBody>
-          <a:bodyPr vert="horz" wrap="square" lIns="0" tIns="12700" rIns="0" bIns="0" rtlCol="0">
-            <a:spAutoFit/>
-          </a:bodyPr>
-          <a:lstStyle/>
-          <a:p>
-            <a:pPr marL="12700">
-              <a:lnSpc>
-                <a:spcPct val="100000"/>
-              </a:lnSpc>
-              <a:spcBef>
-                <a:spcPts val="100"/>
-              </a:spcBef>
-            </a:pPr>
-            <a:r>
-              <a:rPr lang="en-US" sz="2500" dirty="0"/>
-              <a:t>Learning outcome #6 – 6.1 2x2 Multimode Interference Coupler </a:t>
-            </a:r>
-            <a:br>
-              <a:rPr lang="en-US" sz="2500" dirty="0"/>
-            </a:br>
-            <a:r>
-              <a:rPr lang="en-US" b="0" dirty="0"/>
-              <a:t>Wavelength 1.55 µm, </a:t>
-            </a:r>
-            <a:r>
-              <a:rPr lang="en-US" b="0" dirty="0" err="1"/>
-              <a:t>wMMI</a:t>
-            </a:r>
-            <a:r>
-              <a:rPr lang="en-US" b="0" dirty="0"/>
-              <a:t> = 6.6 µm</a:t>
-            </a:r>
-            <a:endParaRPr lang="en-US" sz="2500" b="0" dirty="0">
-              <a:latin typeface="+mj-lt"/>
-              <a:cs typeface="Lucida Sans"/>
-            </a:endParaRPr>
-          </a:p>
-        </p:txBody>
-      </p:sp>
-      <p:pic>
-        <p:nvPicPr>
-          <p:cNvPr id="83" name="Gráfico 82">
-            <a:extLst>
-              <a:ext uri="{FF2B5EF4-FFF2-40B4-BE49-F238E27FC236}">
-                <a16:creationId xmlns:a16="http://schemas.microsoft.com/office/drawing/2014/main" id="{5DFCF1AD-6B06-F914-AC0B-80F0ED838EF9}"/>
-              </a:ext>
-            </a:extLst>
-          </p:cNvPr>
-          <p:cNvPicPr>
-            <a:picLocks noChangeAspect="1"/>
-          </p:cNvPicPr>
-          <p:nvPr/>
-        </p:nvPicPr>
-        <p:blipFill>
-          <a:blip r:embed="rId3">
-            <a:extLst>
-              <a:ext uri="{96DAC541-7B7A-43D3-8B79-37D633B846F1}">
-                <asvg:svgBlip xmlns:asvg="http://schemas.microsoft.com/office/drawing/2016/SVG/main" r:embed="rId4"/>
-              </a:ext>
-            </a:extLst>
-          </a:blip>
-          <a:stretch>
-            <a:fillRect/>
-          </a:stretch>
-        </p:blipFill>
-        <p:spPr>
-          <a:xfrm>
-            <a:off x="5045006" y="6356057"/>
-            <a:ext cx="6409575" cy="363174"/>
-          </a:xfrm>
-          <a:prstGeom prst="rect">
-            <a:avLst/>
-          </a:prstGeom>
-        </p:spPr>
-      </p:pic>
-      <p:sp>
-        <p:nvSpPr>
-          <p:cNvPr id="84" name="Marcador de número de diapositiva 83">
-            <a:extLst>
-              <a:ext uri="{FF2B5EF4-FFF2-40B4-BE49-F238E27FC236}">
-                <a16:creationId xmlns:a16="http://schemas.microsoft.com/office/drawing/2014/main" id="{4A656CCE-66E0-EAE0-5C63-DF1315DF6299}"/>
-              </a:ext>
-            </a:extLst>
-          </p:cNvPr>
-          <p:cNvSpPr>
-            <a:spLocks noGrp="1"/>
-          </p:cNvSpPr>
-          <p:nvPr>
-            <p:ph type="sldNum" sz="quarter" idx="7"/>
-          </p:nvPr>
-        </p:nvSpPr>
-        <p:spPr/>
-        <p:txBody>
-          <a:bodyPr/>
-          <a:lstStyle/>
-          <a:p>
-            <a:fld id="{B6F15528-21DE-4FAA-801E-634DDDAF4B2B}" type="slidenum">
-              <a:rPr lang="es-ES" smtClean="0"/>
-              <a:t>10</a:t>
-            </a:fld>
-            <a:endParaRPr lang="es-ES"/>
-          </a:p>
-        </p:txBody>
-      </p:sp>
-      <p:sp>
-        <p:nvSpPr>
-          <p:cNvPr id="3" name="Marcador de pie de página 2">
-            <a:extLst>
-              <a:ext uri="{FF2B5EF4-FFF2-40B4-BE49-F238E27FC236}">
-                <a16:creationId xmlns:a16="http://schemas.microsoft.com/office/drawing/2014/main" id="{D3AB6581-C493-80EB-A67F-5289454DAA28}"/>
-              </a:ext>
-            </a:extLst>
-          </p:cNvPr>
-          <p:cNvSpPr>
-            <a:spLocks noGrp="1"/>
-          </p:cNvSpPr>
-          <p:nvPr>
-            <p:ph type="ftr" sz="quarter" idx="5"/>
-          </p:nvPr>
-        </p:nvSpPr>
-        <p:spPr/>
-        <p:txBody>
-          <a:bodyPr/>
-          <a:lstStyle/>
-          <a:p>
-            <a:pPr marL="12700">
-              <a:spcBef>
-                <a:spcPts val="15"/>
-              </a:spcBef>
-            </a:pPr>
-            <a:r>
-              <a:rPr lang="es-ES" spc="-5"/>
-              <a:t>LAB 2.0. COUPLERS</a:t>
-            </a:r>
-            <a:endParaRPr lang="es-ES" spc="-5" dirty="0"/>
-          </a:p>
-        </p:txBody>
-      </p:sp>
-      <p:sp>
-        <p:nvSpPr>
-          <p:cNvPr id="2" name="CuadroTexto 1">
-            <a:extLst>
-              <a:ext uri="{FF2B5EF4-FFF2-40B4-BE49-F238E27FC236}">
-                <a16:creationId xmlns:a16="http://schemas.microsoft.com/office/drawing/2014/main" id="{B5029729-ADF3-3B30-4FF9-83BE1DB82BD7}"/>
-              </a:ext>
-            </a:extLst>
-          </p:cNvPr>
-          <p:cNvSpPr txBox="1"/>
-          <p:nvPr/>
-        </p:nvSpPr>
-        <p:spPr>
-          <a:xfrm>
-            <a:off x="609441" y="4819471"/>
-            <a:ext cx="11199971" cy="1200329"/>
-          </a:xfrm>
-          <a:prstGeom prst="rect">
-            <a:avLst/>
-          </a:prstGeom>
-          <a:solidFill>
-            <a:schemeClr val="bg1">
-              <a:lumMod val="95000"/>
-            </a:schemeClr>
-          </a:solidFill>
-          <a:ln w="28575">
-            <a:solidFill>
-              <a:srgbClr val="E0700D"/>
-            </a:solidFill>
-          </a:ln>
-        </p:spPr>
-        <p:txBody>
-          <a:bodyPr wrap="square" rtlCol="0">
-            <a:spAutoFit/>
-          </a:bodyPr>
-          <a:lstStyle/>
-          <a:p>
-            <a:pPr algn="just"/>
-            <a:r>
-              <a:rPr lang="en-US" sz="1200" dirty="0">
-                <a:latin typeface="Arial" panose="020B0604020202020204" pitchFamily="34" charset="0"/>
-                <a:cs typeface="Arial" panose="020B0604020202020204" pitchFamily="34" charset="0"/>
-              </a:rPr>
-              <a:t>Comment results (Coupling relationship, </a:t>
-            </a:r>
-            <a:r>
-              <a:rPr lang="en-US" sz="1200" dirty="0" err="1">
-                <a:latin typeface="Arial" panose="020B0604020202020204" pitchFamily="34" charset="0"/>
-                <a:cs typeface="Arial" panose="020B0604020202020204" pitchFamily="34" charset="0"/>
-              </a:rPr>
-              <a:t>Lpi</a:t>
-            </a:r>
-            <a:r>
-              <a:rPr lang="en-US" sz="1200" dirty="0">
-                <a:latin typeface="Arial" panose="020B0604020202020204" pitchFamily="34" charset="0"/>
-                <a:cs typeface="Arial" panose="020B0604020202020204" pitchFamily="34" charset="0"/>
-              </a:rPr>
-              <a:t>,  losses, comparison with Directional Coupler… )</a:t>
-            </a:r>
-          </a:p>
-          <a:p>
-            <a:pPr algn="just"/>
-            <a:endParaRPr lang="en-US" sz="1200" dirty="0">
-              <a:latin typeface="Arial" panose="020B0604020202020204" pitchFamily="34" charset="0"/>
-              <a:cs typeface="Arial" panose="020B0604020202020204" pitchFamily="34" charset="0"/>
-            </a:endParaRPr>
-          </a:p>
-          <a:p>
-            <a:pPr algn="just"/>
-            <a:endParaRPr lang="en-US" sz="1200" dirty="0">
-              <a:latin typeface="Arial" panose="020B0604020202020204" pitchFamily="34" charset="0"/>
-              <a:cs typeface="Arial" panose="020B0604020202020204" pitchFamily="34" charset="0"/>
-            </a:endParaRPr>
-          </a:p>
-          <a:p>
-            <a:pPr algn="just"/>
-            <a:endParaRPr lang="en-US" sz="1200" dirty="0">
-              <a:latin typeface="Arial" panose="020B0604020202020204" pitchFamily="34" charset="0"/>
-              <a:cs typeface="Arial" panose="020B0604020202020204" pitchFamily="34" charset="0"/>
-            </a:endParaRPr>
-          </a:p>
-          <a:p>
-            <a:pPr algn="just"/>
-            <a:endParaRPr lang="en-US" sz="1200" dirty="0">
-              <a:latin typeface="Arial" panose="020B0604020202020204" pitchFamily="34" charset="0"/>
-              <a:cs typeface="Arial" panose="020B0604020202020204" pitchFamily="34" charset="0"/>
-            </a:endParaRPr>
-          </a:p>
-          <a:p>
-            <a:pPr algn="just"/>
-            <a:endParaRPr lang="en-US" sz="1200" dirty="0">
-              <a:latin typeface="Arial" panose="020B0604020202020204" pitchFamily="34" charset="0"/>
-              <a:cs typeface="Arial" panose="020B0604020202020204" pitchFamily="34" charset="0"/>
-            </a:endParaRPr>
-          </a:p>
-        </p:txBody>
-      </p:sp>
-      <p:sp>
-        <p:nvSpPr>
-          <p:cNvPr id="7" name="Rectángulo 6">
-            <a:extLst>
-              <a:ext uri="{FF2B5EF4-FFF2-40B4-BE49-F238E27FC236}">
-                <a16:creationId xmlns:a16="http://schemas.microsoft.com/office/drawing/2014/main" id="{98DE5FDA-4E91-E843-E84A-1467BFAA9986}"/>
-              </a:ext>
-            </a:extLst>
-          </p:cNvPr>
-          <p:cNvSpPr/>
-          <p:nvPr/>
-        </p:nvSpPr>
-        <p:spPr>
-          <a:xfrm>
-            <a:off x="609441" y="1377510"/>
-            <a:ext cx="11199971" cy="3306028"/>
-          </a:xfrm>
-          <a:prstGeom prst="rect">
-            <a:avLst/>
-          </a:prstGeom>
-          <a:noFill/>
-          <a:ln w="28575">
-            <a:solidFill>
-              <a:srgbClr val="E0700D"/>
-            </a:solidFill>
-          </a:ln>
-        </p:spPr>
-        <p:style>
-          <a:lnRef idx="2">
-            <a:schemeClr val="accent1">
-              <a:shade val="15000"/>
-            </a:schemeClr>
-          </a:lnRef>
-          <a:fillRef idx="1">
-            <a:schemeClr val="accent1"/>
-          </a:fillRef>
-          <a:effectRef idx="0">
-            <a:schemeClr val="accent1"/>
-          </a:effectRef>
-          <a:fontRef idx="minor">
-            <a:schemeClr val="lt1"/>
-          </a:fontRef>
-        </p:style>
-        <p:txBody>
-          <a:bodyPr rtlCol="0" anchor="ctr"/>
-          <a:lstStyle/>
-          <a:p>
-            <a:pPr algn="ctr"/>
-            <a:endParaRPr lang="en-US"/>
-          </a:p>
-        </p:txBody>
-      </p:sp>
-      <p:sp>
-        <p:nvSpPr>
-          <p:cNvPr id="8" name="CuadroTexto 7">
-            <a:extLst>
-              <a:ext uri="{FF2B5EF4-FFF2-40B4-BE49-F238E27FC236}">
-                <a16:creationId xmlns:a16="http://schemas.microsoft.com/office/drawing/2014/main" id="{0DA14DBA-172E-DA2C-0573-6A00BF18F4A5}"/>
-              </a:ext>
-            </a:extLst>
-          </p:cNvPr>
-          <p:cNvSpPr txBox="1"/>
-          <p:nvPr/>
-        </p:nvSpPr>
-        <p:spPr>
-          <a:xfrm>
-            <a:off x="2286000" y="2630415"/>
-            <a:ext cx="7718580" cy="923330"/>
-          </a:xfrm>
-          <a:prstGeom prst="rect">
-            <a:avLst/>
-          </a:prstGeom>
-          <a:noFill/>
-        </p:spPr>
-        <p:txBody>
-          <a:bodyPr wrap="square" rtlCol="0">
-            <a:spAutoFit/>
-          </a:bodyPr>
-          <a:lstStyle/>
-          <a:p>
-            <a:pPr algn="ctr"/>
-            <a:r>
-              <a:rPr lang="en-US" b="1" dirty="0"/>
-              <a:t>deep</a:t>
-            </a:r>
-            <a:r>
-              <a:rPr lang="en-US" dirty="0"/>
-              <a:t> waveguide</a:t>
-            </a:r>
-          </a:p>
-          <a:p>
-            <a:pPr algn="ctr"/>
-            <a:endParaRPr lang="en-US" dirty="0"/>
-          </a:p>
-          <a:p>
-            <a:pPr algn="ctr"/>
-            <a:r>
-              <a:rPr lang="en-US" dirty="0"/>
-              <a:t>Paste propagation plots and console results</a:t>
-            </a:r>
-          </a:p>
-        </p:txBody>
-      </p:sp>
-    </p:spTree>
-    <p:extLst>
-      <p:ext uri="{BB962C8B-B14F-4D97-AF65-F5344CB8AC3E}">
-        <p14:creationId xmlns:p14="http://schemas.microsoft.com/office/powerpoint/2010/main" val="2815679427"/>
-      </p:ext>
-    </p:extLst>
-  </p:cSld>
-  <p:clrMapOvr>
-    <a:masterClrMapping/>
-  </p:clrMapOvr>
-</p:sld>
-</file>
-
-<file path=ppt/slides/slide11.xml><?xml version="1.0" encoding="utf-8"?>
-<p:sld xmlns:a="http://schemas.openxmlformats.org/drawingml/2006/main" xmlns:r="http://schemas.openxmlformats.org/officeDocument/2006/relationships" xmlns:p="http://schemas.openxmlformats.org/presentationml/2006/main">
-  <p:cSld>
-    <p:spTree>
-      <p:nvGrpSpPr>
-        <p:cNvPr id="1" name="">
-          <a:extLst>
-            <a:ext uri="{FF2B5EF4-FFF2-40B4-BE49-F238E27FC236}">
-              <a16:creationId xmlns:a16="http://schemas.microsoft.com/office/drawing/2014/main" id="{D1F11DBE-A482-7036-60B2-70B7E2318F46}"/>
-            </a:ext>
-          </a:extLst>
-        </p:cNvPr>
-        <p:cNvGrpSpPr/>
-        <p:nvPr/>
-      </p:nvGrpSpPr>
-      <p:grpSpPr>
-        <a:xfrm>
-          <a:off x="0" y="0"/>
-          <a:ext cx="0" cy="0"/>
-          <a:chOff x="0" y="0"/>
-          <a:chExt cx="0" cy="0"/>
-        </a:xfrm>
-      </p:grpSpPr>
-      <p:sp>
-        <p:nvSpPr>
-          <p:cNvPr id="16" name="object 16">
-            <a:extLst>
-              <a:ext uri="{FF2B5EF4-FFF2-40B4-BE49-F238E27FC236}">
-                <a16:creationId xmlns:a16="http://schemas.microsoft.com/office/drawing/2014/main" id="{C096193E-AB86-E3CD-BDAC-0F9156C1A3F0}"/>
-              </a:ext>
-            </a:extLst>
-          </p:cNvPr>
-          <p:cNvSpPr txBox="1">
-            <a:spLocks noGrp="1"/>
-          </p:cNvSpPr>
-          <p:nvPr>
-            <p:ph type="title"/>
-          </p:nvPr>
-        </p:nvSpPr>
-        <p:spPr>
-          <a:xfrm>
-            <a:off x="685800" y="408883"/>
-            <a:ext cx="10994410" cy="705321"/>
-          </a:xfrm>
-          <a:prstGeom prst="rect">
-            <a:avLst/>
-          </a:prstGeom>
-        </p:spPr>
-        <p:txBody>
-          <a:bodyPr vert="horz" wrap="square" lIns="0" tIns="12700" rIns="0" bIns="0" rtlCol="0">
-            <a:spAutoFit/>
-          </a:bodyPr>
-          <a:lstStyle/>
-          <a:p>
-            <a:pPr marL="12700">
-              <a:lnSpc>
-                <a:spcPct val="100000"/>
-              </a:lnSpc>
-              <a:spcBef>
-                <a:spcPts val="100"/>
-              </a:spcBef>
-            </a:pPr>
-            <a:r>
-              <a:rPr lang="en-US" sz="2500" dirty="0"/>
-              <a:t>Learning outcome #6.2 – 2x2 Multimode Interference Coupler - Optimization</a:t>
-            </a:r>
-            <a:br>
-              <a:rPr lang="en-US" sz="2500" dirty="0"/>
-            </a:br>
-            <a:r>
-              <a:rPr lang="en-US" b="0" dirty="0"/>
-              <a:t>Wavelength 1.55 µm, </a:t>
-            </a:r>
-            <a:r>
-              <a:rPr lang="en-US" b="0" dirty="0" err="1"/>
-              <a:t>wMMI</a:t>
-            </a:r>
-            <a:r>
-              <a:rPr lang="en-US" b="0" dirty="0"/>
-              <a:t> = 6.6 µm</a:t>
-            </a:r>
-            <a:endParaRPr lang="en-US" sz="2500" b="0" dirty="0">
-              <a:latin typeface="+mj-lt"/>
-              <a:cs typeface="Lucida Sans"/>
-            </a:endParaRPr>
-          </a:p>
-        </p:txBody>
-      </p:sp>
-      <p:pic>
-        <p:nvPicPr>
-          <p:cNvPr id="83" name="Gráfico 82">
-            <a:extLst>
-              <a:ext uri="{FF2B5EF4-FFF2-40B4-BE49-F238E27FC236}">
-                <a16:creationId xmlns:a16="http://schemas.microsoft.com/office/drawing/2014/main" id="{2D17DCD6-D851-E62D-D95C-A9F9954602DE}"/>
-              </a:ext>
-            </a:extLst>
-          </p:cNvPr>
-          <p:cNvPicPr>
-            <a:picLocks noChangeAspect="1"/>
-          </p:cNvPicPr>
-          <p:nvPr/>
-        </p:nvPicPr>
-        <p:blipFill>
-          <a:blip r:embed="rId3">
-            <a:extLst>
-              <a:ext uri="{96DAC541-7B7A-43D3-8B79-37D633B846F1}">
-                <asvg:svgBlip xmlns:asvg="http://schemas.microsoft.com/office/drawing/2016/SVG/main" r:embed="rId4"/>
-              </a:ext>
-            </a:extLst>
-          </a:blip>
-          <a:stretch>
-            <a:fillRect/>
-          </a:stretch>
-        </p:blipFill>
-        <p:spPr>
-          <a:xfrm>
-            <a:off x="5045006" y="6356057"/>
-            <a:ext cx="6409575" cy="363174"/>
-          </a:xfrm>
-          <a:prstGeom prst="rect">
-            <a:avLst/>
-          </a:prstGeom>
-        </p:spPr>
-      </p:pic>
-      <p:sp>
-        <p:nvSpPr>
-          <p:cNvPr id="84" name="Marcador de número de diapositiva 83">
-            <a:extLst>
-              <a:ext uri="{FF2B5EF4-FFF2-40B4-BE49-F238E27FC236}">
-                <a16:creationId xmlns:a16="http://schemas.microsoft.com/office/drawing/2014/main" id="{4891046F-11DC-B7FC-54F7-9583E688DC0E}"/>
-              </a:ext>
-            </a:extLst>
-          </p:cNvPr>
-          <p:cNvSpPr>
-            <a:spLocks noGrp="1"/>
-          </p:cNvSpPr>
-          <p:nvPr>
-            <p:ph type="sldNum" sz="quarter" idx="7"/>
-          </p:nvPr>
-        </p:nvSpPr>
-        <p:spPr/>
-        <p:txBody>
-          <a:bodyPr/>
-          <a:lstStyle/>
-          <a:p>
-            <a:fld id="{B6F15528-21DE-4FAA-801E-634DDDAF4B2B}" type="slidenum">
-              <a:rPr lang="es-ES" smtClean="0"/>
-              <a:t>11</a:t>
-            </a:fld>
-            <a:endParaRPr lang="es-ES"/>
-          </a:p>
-        </p:txBody>
-      </p:sp>
-      <p:sp>
-        <p:nvSpPr>
-          <p:cNvPr id="3" name="Marcador de pie de página 2">
-            <a:extLst>
-              <a:ext uri="{FF2B5EF4-FFF2-40B4-BE49-F238E27FC236}">
-                <a16:creationId xmlns:a16="http://schemas.microsoft.com/office/drawing/2014/main" id="{4C9BAA39-017F-D602-6705-A6CF44830139}"/>
-              </a:ext>
-            </a:extLst>
-          </p:cNvPr>
-          <p:cNvSpPr>
-            <a:spLocks noGrp="1"/>
-          </p:cNvSpPr>
-          <p:nvPr>
-            <p:ph type="ftr" sz="quarter" idx="5"/>
-          </p:nvPr>
-        </p:nvSpPr>
-        <p:spPr/>
-        <p:txBody>
-          <a:bodyPr/>
-          <a:lstStyle/>
-          <a:p>
-            <a:pPr marL="12700">
-              <a:spcBef>
-                <a:spcPts val="15"/>
-              </a:spcBef>
-            </a:pPr>
-            <a:r>
-              <a:rPr lang="es-ES" spc="-5"/>
-              <a:t>LAB 2.0. COUPLERS</a:t>
-            </a:r>
-            <a:endParaRPr lang="es-ES" spc="-5" dirty="0"/>
-          </a:p>
-        </p:txBody>
-      </p:sp>
-      <p:sp>
-        <p:nvSpPr>
-          <p:cNvPr id="2" name="CuadroTexto 1">
-            <a:extLst>
-              <a:ext uri="{FF2B5EF4-FFF2-40B4-BE49-F238E27FC236}">
-                <a16:creationId xmlns:a16="http://schemas.microsoft.com/office/drawing/2014/main" id="{43D7D9E5-DAC3-2BB8-7377-826863CBAD4E}"/>
-              </a:ext>
-            </a:extLst>
-          </p:cNvPr>
-          <p:cNvSpPr txBox="1"/>
-          <p:nvPr/>
-        </p:nvSpPr>
-        <p:spPr>
-          <a:xfrm>
-            <a:off x="609441" y="4819471"/>
-            <a:ext cx="11199971" cy="1384995"/>
-          </a:xfrm>
-          <a:prstGeom prst="rect">
-            <a:avLst/>
-          </a:prstGeom>
-          <a:solidFill>
-            <a:schemeClr val="bg1">
-              <a:lumMod val="95000"/>
-            </a:schemeClr>
-          </a:solidFill>
-          <a:ln w="28575">
-            <a:solidFill>
-              <a:srgbClr val="E0700D"/>
-            </a:solidFill>
-          </a:ln>
-        </p:spPr>
-        <p:txBody>
-          <a:bodyPr wrap="square" rtlCol="0">
-            <a:spAutoFit/>
-          </a:bodyPr>
-          <a:lstStyle/>
-          <a:p>
-            <a:pPr algn="just"/>
-            <a:r>
-              <a:rPr lang="en-US" sz="1200" dirty="0">
-                <a:latin typeface="Arial" panose="020B0604020202020204" pitchFamily="34" charset="0"/>
-                <a:cs typeface="Arial" panose="020B0604020202020204" pitchFamily="34" charset="0"/>
-              </a:rPr>
-              <a:t>Comment results</a:t>
-            </a:r>
-          </a:p>
-          <a:p>
-            <a:pPr algn="just"/>
-            <a:endParaRPr lang="en-US" sz="1200" dirty="0">
-              <a:latin typeface="Arial" panose="020B0604020202020204" pitchFamily="34" charset="0"/>
-              <a:cs typeface="Arial" panose="020B0604020202020204" pitchFamily="34" charset="0"/>
-            </a:endParaRPr>
-          </a:p>
-          <a:p>
-            <a:pPr algn="just"/>
-            <a:endParaRPr lang="en-US" sz="1200" dirty="0">
-              <a:latin typeface="Arial" panose="020B0604020202020204" pitchFamily="34" charset="0"/>
-              <a:cs typeface="Arial" panose="020B0604020202020204" pitchFamily="34" charset="0"/>
-            </a:endParaRPr>
-          </a:p>
-          <a:p>
-            <a:pPr algn="just"/>
-            <a:endParaRPr lang="en-US" sz="1200" dirty="0">
-              <a:latin typeface="Arial" panose="020B0604020202020204" pitchFamily="34" charset="0"/>
-              <a:cs typeface="Arial" panose="020B0604020202020204" pitchFamily="34" charset="0"/>
-            </a:endParaRPr>
-          </a:p>
-          <a:p>
-            <a:pPr algn="just"/>
-            <a:endParaRPr lang="en-US" sz="1200" dirty="0">
-              <a:latin typeface="Arial" panose="020B0604020202020204" pitchFamily="34" charset="0"/>
-              <a:cs typeface="Arial" panose="020B0604020202020204" pitchFamily="34" charset="0"/>
-            </a:endParaRPr>
-          </a:p>
-          <a:p>
-            <a:pPr algn="just"/>
-            <a:endParaRPr lang="en-US" sz="1200" dirty="0">
-              <a:latin typeface="Arial" panose="020B0604020202020204" pitchFamily="34" charset="0"/>
-              <a:cs typeface="Arial" panose="020B0604020202020204" pitchFamily="34" charset="0"/>
-            </a:endParaRPr>
-          </a:p>
-          <a:p>
-            <a:pPr algn="just"/>
-            <a:endParaRPr lang="en-US" sz="1200" dirty="0">
-              <a:latin typeface="Arial" panose="020B0604020202020204" pitchFamily="34" charset="0"/>
-              <a:cs typeface="Arial" panose="020B0604020202020204" pitchFamily="34" charset="0"/>
-            </a:endParaRPr>
-          </a:p>
-        </p:txBody>
-      </p:sp>
-      <p:sp>
-        <p:nvSpPr>
-          <p:cNvPr id="7" name="Rectángulo 6">
-            <a:extLst>
-              <a:ext uri="{FF2B5EF4-FFF2-40B4-BE49-F238E27FC236}">
-                <a16:creationId xmlns:a16="http://schemas.microsoft.com/office/drawing/2014/main" id="{9772491E-4FFB-FFC3-C855-72A4B15F3E73}"/>
-              </a:ext>
-            </a:extLst>
-          </p:cNvPr>
-          <p:cNvSpPr/>
-          <p:nvPr/>
-        </p:nvSpPr>
-        <p:spPr>
-          <a:xfrm>
-            <a:off x="609441" y="1377510"/>
-            <a:ext cx="11199971" cy="3306028"/>
-          </a:xfrm>
-          <a:prstGeom prst="rect">
-            <a:avLst/>
-          </a:prstGeom>
-          <a:noFill/>
-          <a:ln w="28575">
-            <a:solidFill>
-              <a:srgbClr val="E0700D"/>
-            </a:solidFill>
-          </a:ln>
-        </p:spPr>
-        <p:style>
-          <a:lnRef idx="2">
-            <a:schemeClr val="accent1">
-              <a:shade val="15000"/>
-            </a:schemeClr>
-          </a:lnRef>
-          <a:fillRef idx="1">
-            <a:schemeClr val="accent1"/>
-          </a:fillRef>
-          <a:effectRef idx="0">
-            <a:schemeClr val="accent1"/>
-          </a:effectRef>
-          <a:fontRef idx="minor">
-            <a:schemeClr val="lt1"/>
-          </a:fontRef>
-        </p:style>
-        <p:txBody>
-          <a:bodyPr rtlCol="0" anchor="ctr"/>
-          <a:lstStyle/>
-          <a:p>
-            <a:pPr algn="ctr"/>
-            <a:endParaRPr lang="en-US"/>
-          </a:p>
-        </p:txBody>
-      </p:sp>
-      <p:sp>
-        <p:nvSpPr>
-          <p:cNvPr id="8" name="CuadroTexto 7">
-            <a:extLst>
-              <a:ext uri="{FF2B5EF4-FFF2-40B4-BE49-F238E27FC236}">
-                <a16:creationId xmlns:a16="http://schemas.microsoft.com/office/drawing/2014/main" id="{643565A9-7DB6-D6EE-152F-2852C8BA7986}"/>
-              </a:ext>
-            </a:extLst>
-          </p:cNvPr>
-          <p:cNvSpPr txBox="1"/>
-          <p:nvPr/>
-        </p:nvSpPr>
-        <p:spPr>
-          <a:xfrm>
-            <a:off x="640245" y="1942909"/>
-            <a:ext cx="11199972" cy="2708434"/>
-          </a:xfrm>
-          <a:prstGeom prst="rect">
-            <a:avLst/>
-          </a:prstGeom>
-          <a:noFill/>
-        </p:spPr>
-        <p:txBody>
-          <a:bodyPr wrap="square" rtlCol="0">
-            <a:spAutoFit/>
-          </a:bodyPr>
-          <a:lstStyle/>
-          <a:p>
-            <a:pPr algn="ctr"/>
-            <a:r>
-              <a:rPr lang="en-US" b="1" dirty="0"/>
-              <a:t>deep</a:t>
-            </a:r>
-            <a:r>
-              <a:rPr lang="en-US" dirty="0"/>
-              <a:t> waveguide</a:t>
-            </a:r>
-          </a:p>
-          <a:p>
-            <a:pPr algn="ctr"/>
-            <a:endParaRPr lang="en-US" dirty="0"/>
-          </a:p>
-          <a:p>
-            <a:pPr algn="ctr"/>
-            <a:r>
-              <a:rPr lang="en-US" dirty="0"/>
-              <a:t>Paste propagation plot and console results</a:t>
-            </a:r>
-          </a:p>
-          <a:p>
-            <a:pPr algn="ctr"/>
-            <a:endParaRPr lang="en-US" dirty="0"/>
-          </a:p>
-          <a:p>
-            <a:pPr algn="ctr"/>
-            <a:endParaRPr lang="en-US" dirty="0"/>
-          </a:p>
-          <a:p>
-            <a:pPr algn="r"/>
-            <a:r>
-              <a:rPr lang="en-US" sz="1600" b="1" dirty="0"/>
-              <a:t>Target</a:t>
-            </a:r>
-            <a:r>
-              <a:rPr lang="en-US" sz="1600" dirty="0"/>
-              <a:t>: make equal ratio over outputs (even if not 0.5) and minimize excess loss (even if not 0.0 dB)</a:t>
-            </a:r>
-          </a:p>
-          <a:p>
-            <a:pPr algn="r"/>
-            <a:r>
-              <a:rPr lang="en-US" sz="1600" dirty="0"/>
-              <a:t>With same settings of previous LO, now adjust try to manually optimize the MMI by changing iteratively:</a:t>
-            </a:r>
-          </a:p>
-          <a:p>
-            <a:pPr algn="r"/>
-            <a:r>
-              <a:rPr lang="en-US" sz="1600" dirty="0"/>
-              <a:t>- Change </a:t>
-            </a:r>
-            <a:r>
-              <a:rPr lang="en-US" sz="1600" dirty="0" err="1"/>
-              <a:t>dL_MMI</a:t>
-            </a:r>
-            <a:endParaRPr lang="en-US" sz="1600" dirty="0"/>
-          </a:p>
-          <a:p>
-            <a:pPr algn="r"/>
-            <a:r>
-              <a:rPr lang="en-US" sz="1600" dirty="0"/>
-              <a:t>- Change I/O waveguide position +/- </a:t>
-            </a:r>
-            <a:r>
-              <a:rPr lang="en-US" sz="1600" dirty="0" err="1"/>
-              <a:t>dy</a:t>
-            </a:r>
-            <a:endParaRPr lang="en-US" sz="1600" dirty="0"/>
-          </a:p>
-          <a:p>
-            <a:pPr algn="r"/>
-            <a:r>
-              <a:rPr lang="en-US" sz="1600" b="1" dirty="0"/>
-              <a:t>Hints</a:t>
-            </a:r>
-            <a:r>
-              <a:rPr lang="en-US" sz="1600" dirty="0"/>
-              <a:t>: observe the 2D EME propagation results to guide you to the best settings of a) and b).</a:t>
-            </a:r>
-          </a:p>
-        </p:txBody>
-      </p:sp>
-    </p:spTree>
-    <p:extLst>
-      <p:ext uri="{BB962C8B-B14F-4D97-AF65-F5344CB8AC3E}">
-        <p14:creationId xmlns:p14="http://schemas.microsoft.com/office/powerpoint/2010/main" val="2685215753"/>
-      </p:ext>
-    </p:extLst>
-  </p:cSld>
-  <p:clrMapOvr>
-    <a:masterClrMapping/>
-  </p:clrMapOvr>
-</p:sld>
-</file>
-
-<file path=ppt/slides/slide12.xml><?xml version="1.0" encoding="utf-8"?>
-<p:sld xmlns:a="http://schemas.openxmlformats.org/drawingml/2006/main" xmlns:r="http://schemas.openxmlformats.org/officeDocument/2006/relationships" xmlns:p="http://schemas.openxmlformats.org/presentationml/2006/main">
-  <p:cSld>
-    <p:spTree>
-      <p:nvGrpSpPr>
-        <p:cNvPr id="1" name="">
-          <a:extLst>
-            <a:ext uri="{FF2B5EF4-FFF2-40B4-BE49-F238E27FC236}">
-              <a16:creationId xmlns:a16="http://schemas.microsoft.com/office/drawing/2014/main" id="{F32A9819-E058-DC4F-FB99-88F20442D9F4}"/>
-            </a:ext>
-          </a:extLst>
-        </p:cNvPr>
-        <p:cNvGrpSpPr/>
-        <p:nvPr/>
-      </p:nvGrpSpPr>
-      <p:grpSpPr>
-        <a:xfrm>
-          <a:off x="0" y="0"/>
-          <a:ext cx="0" cy="0"/>
-          <a:chOff x="0" y="0"/>
-          <a:chExt cx="0" cy="0"/>
-        </a:xfrm>
-      </p:grpSpPr>
-      <p:sp>
-        <p:nvSpPr>
-          <p:cNvPr id="16" name="object 16">
-            <a:extLst>
-              <a:ext uri="{FF2B5EF4-FFF2-40B4-BE49-F238E27FC236}">
-                <a16:creationId xmlns:a16="http://schemas.microsoft.com/office/drawing/2014/main" id="{E1662E38-DE72-ADF3-A38E-08ED40DCC2AD}"/>
-              </a:ext>
-            </a:extLst>
-          </p:cNvPr>
-          <p:cNvSpPr txBox="1">
-            <a:spLocks noGrp="1"/>
-          </p:cNvSpPr>
-          <p:nvPr>
-            <p:ph type="title"/>
-          </p:nvPr>
-        </p:nvSpPr>
-        <p:spPr>
-          <a:xfrm>
-            <a:off x="685800" y="408883"/>
-            <a:ext cx="10994410" cy="705321"/>
-          </a:xfrm>
-          <a:prstGeom prst="rect">
-            <a:avLst/>
-          </a:prstGeom>
-        </p:spPr>
-        <p:txBody>
-          <a:bodyPr vert="horz" wrap="square" lIns="0" tIns="12700" rIns="0" bIns="0" rtlCol="0">
-            <a:spAutoFit/>
-          </a:bodyPr>
-          <a:lstStyle/>
-          <a:p>
-            <a:pPr marL="12700">
-              <a:lnSpc>
-                <a:spcPct val="100000"/>
-              </a:lnSpc>
-              <a:spcBef>
-                <a:spcPts val="100"/>
-              </a:spcBef>
-            </a:pPr>
-            <a:r>
-              <a:rPr lang="en-US" sz="2500" dirty="0"/>
-              <a:t>Learning outcome #6.3 – 2x2 Multimode Interference Coupler – Optimization (II)</a:t>
-            </a:r>
-            <a:br>
-              <a:rPr lang="en-US" sz="2500" dirty="0"/>
-            </a:br>
-            <a:r>
-              <a:rPr lang="en-US" b="0" dirty="0"/>
-              <a:t>Wavelength 1.55 µm, </a:t>
-            </a:r>
-            <a:r>
-              <a:rPr lang="en-US" b="0" dirty="0" err="1"/>
-              <a:t>wMMI</a:t>
-            </a:r>
-            <a:r>
-              <a:rPr lang="en-US" b="0" dirty="0"/>
-              <a:t> = 6.6 µm</a:t>
-            </a:r>
-            <a:endParaRPr lang="en-US" sz="2500" b="0" dirty="0">
-              <a:latin typeface="+mj-lt"/>
-              <a:cs typeface="Lucida Sans"/>
-            </a:endParaRPr>
-          </a:p>
-        </p:txBody>
-      </p:sp>
-      <p:pic>
-        <p:nvPicPr>
-          <p:cNvPr id="83" name="Gráfico 82">
-            <a:extLst>
-              <a:ext uri="{FF2B5EF4-FFF2-40B4-BE49-F238E27FC236}">
-                <a16:creationId xmlns:a16="http://schemas.microsoft.com/office/drawing/2014/main" id="{1CD4B005-DA76-DF7C-8A51-CA16DFD2CA3A}"/>
-              </a:ext>
-            </a:extLst>
-          </p:cNvPr>
-          <p:cNvPicPr>
-            <a:picLocks noChangeAspect="1"/>
-          </p:cNvPicPr>
-          <p:nvPr/>
-        </p:nvPicPr>
-        <p:blipFill>
-          <a:blip r:embed="rId3">
-            <a:extLst>
-              <a:ext uri="{96DAC541-7B7A-43D3-8B79-37D633B846F1}">
-                <asvg:svgBlip xmlns:asvg="http://schemas.microsoft.com/office/drawing/2016/SVG/main" r:embed="rId4"/>
-              </a:ext>
-            </a:extLst>
-          </a:blip>
-          <a:stretch>
-            <a:fillRect/>
-          </a:stretch>
-        </p:blipFill>
-        <p:spPr>
-          <a:xfrm>
-            <a:off x="5045006" y="6356057"/>
-            <a:ext cx="6409575" cy="363174"/>
-          </a:xfrm>
-          <a:prstGeom prst="rect">
-            <a:avLst/>
-          </a:prstGeom>
-        </p:spPr>
-      </p:pic>
-      <p:sp>
-        <p:nvSpPr>
-          <p:cNvPr id="84" name="Marcador de número de diapositiva 83">
-            <a:extLst>
-              <a:ext uri="{FF2B5EF4-FFF2-40B4-BE49-F238E27FC236}">
-                <a16:creationId xmlns:a16="http://schemas.microsoft.com/office/drawing/2014/main" id="{0B06F952-20FD-3223-6AB8-83339507AFE8}"/>
-              </a:ext>
-            </a:extLst>
-          </p:cNvPr>
-          <p:cNvSpPr>
-            <a:spLocks noGrp="1"/>
-          </p:cNvSpPr>
-          <p:nvPr>
-            <p:ph type="sldNum" sz="quarter" idx="7"/>
-          </p:nvPr>
-        </p:nvSpPr>
-        <p:spPr/>
-        <p:txBody>
-          <a:bodyPr/>
-          <a:lstStyle/>
-          <a:p>
-            <a:fld id="{B6F15528-21DE-4FAA-801E-634DDDAF4B2B}" type="slidenum">
-              <a:rPr lang="es-ES" smtClean="0"/>
-              <a:t>12</a:t>
-            </a:fld>
-            <a:endParaRPr lang="es-ES"/>
-          </a:p>
-        </p:txBody>
-      </p:sp>
-      <p:sp>
-        <p:nvSpPr>
-          <p:cNvPr id="3" name="Marcador de pie de página 2">
-            <a:extLst>
-              <a:ext uri="{FF2B5EF4-FFF2-40B4-BE49-F238E27FC236}">
-                <a16:creationId xmlns:a16="http://schemas.microsoft.com/office/drawing/2014/main" id="{8B06152F-2A2C-A19B-581F-494FDFF33752}"/>
-              </a:ext>
-            </a:extLst>
-          </p:cNvPr>
-          <p:cNvSpPr>
-            <a:spLocks noGrp="1"/>
-          </p:cNvSpPr>
-          <p:nvPr>
-            <p:ph type="ftr" sz="quarter" idx="5"/>
-          </p:nvPr>
-        </p:nvSpPr>
-        <p:spPr/>
-        <p:txBody>
-          <a:bodyPr/>
-          <a:lstStyle/>
-          <a:p>
-            <a:pPr marL="12700">
-              <a:spcBef>
-                <a:spcPts val="15"/>
-              </a:spcBef>
-            </a:pPr>
-            <a:r>
-              <a:rPr lang="es-ES" spc="-5"/>
-              <a:t>LAB 2.0. COUPLERS</a:t>
-            </a:r>
-            <a:endParaRPr lang="es-ES" spc="-5" dirty="0"/>
-          </a:p>
-        </p:txBody>
-      </p:sp>
-      <p:sp>
-        <p:nvSpPr>
-          <p:cNvPr id="2" name="CuadroTexto 1">
-            <a:extLst>
-              <a:ext uri="{FF2B5EF4-FFF2-40B4-BE49-F238E27FC236}">
-                <a16:creationId xmlns:a16="http://schemas.microsoft.com/office/drawing/2014/main" id="{EF5B7948-A25A-9043-7061-DD15A9023924}"/>
-              </a:ext>
-            </a:extLst>
-          </p:cNvPr>
-          <p:cNvSpPr txBox="1"/>
-          <p:nvPr/>
-        </p:nvSpPr>
-        <p:spPr>
-          <a:xfrm>
-            <a:off x="609441" y="4819471"/>
-            <a:ext cx="11199971" cy="1384995"/>
-          </a:xfrm>
-          <a:prstGeom prst="rect">
-            <a:avLst/>
-          </a:prstGeom>
-          <a:solidFill>
-            <a:schemeClr val="bg1">
-              <a:lumMod val="95000"/>
-            </a:schemeClr>
-          </a:solidFill>
-          <a:ln w="28575">
-            <a:solidFill>
-              <a:srgbClr val="E0700D"/>
-            </a:solidFill>
-          </a:ln>
-        </p:spPr>
-        <p:txBody>
-          <a:bodyPr wrap="square" rtlCol="0">
-            <a:spAutoFit/>
-          </a:bodyPr>
-          <a:lstStyle/>
-          <a:p>
-            <a:pPr algn="just"/>
-            <a:r>
-              <a:rPr lang="en-US" sz="1200" dirty="0">
-                <a:latin typeface="Arial" panose="020B0604020202020204" pitchFamily="34" charset="0"/>
-                <a:cs typeface="Arial" panose="020B0604020202020204" pitchFamily="34" charset="0"/>
-              </a:rPr>
-              <a:t>Comment results</a:t>
-            </a:r>
-          </a:p>
-          <a:p>
-            <a:pPr algn="just"/>
-            <a:endParaRPr lang="en-US" sz="1200" dirty="0">
-              <a:latin typeface="Arial" panose="020B0604020202020204" pitchFamily="34" charset="0"/>
-              <a:cs typeface="Arial" panose="020B0604020202020204" pitchFamily="34" charset="0"/>
-            </a:endParaRPr>
-          </a:p>
-          <a:p>
-            <a:pPr algn="just"/>
-            <a:endParaRPr lang="en-US" sz="1200" dirty="0">
-              <a:latin typeface="Arial" panose="020B0604020202020204" pitchFamily="34" charset="0"/>
-              <a:cs typeface="Arial" panose="020B0604020202020204" pitchFamily="34" charset="0"/>
-            </a:endParaRPr>
-          </a:p>
-          <a:p>
-            <a:pPr algn="just"/>
-            <a:endParaRPr lang="en-US" sz="1200" dirty="0">
-              <a:latin typeface="Arial" panose="020B0604020202020204" pitchFamily="34" charset="0"/>
-              <a:cs typeface="Arial" panose="020B0604020202020204" pitchFamily="34" charset="0"/>
-            </a:endParaRPr>
-          </a:p>
-          <a:p>
-            <a:pPr algn="just"/>
-            <a:endParaRPr lang="en-US" sz="1200" dirty="0">
-              <a:latin typeface="Arial" panose="020B0604020202020204" pitchFamily="34" charset="0"/>
-              <a:cs typeface="Arial" panose="020B0604020202020204" pitchFamily="34" charset="0"/>
-            </a:endParaRPr>
-          </a:p>
-          <a:p>
-            <a:pPr algn="just"/>
-            <a:endParaRPr lang="en-US" sz="1200" dirty="0">
-              <a:latin typeface="Arial" panose="020B0604020202020204" pitchFamily="34" charset="0"/>
-              <a:cs typeface="Arial" panose="020B0604020202020204" pitchFamily="34" charset="0"/>
-            </a:endParaRPr>
-          </a:p>
-          <a:p>
-            <a:pPr algn="just"/>
-            <a:endParaRPr lang="en-US" sz="1200" dirty="0">
-              <a:latin typeface="Arial" panose="020B0604020202020204" pitchFamily="34" charset="0"/>
-              <a:cs typeface="Arial" panose="020B0604020202020204" pitchFamily="34" charset="0"/>
-            </a:endParaRPr>
-          </a:p>
-        </p:txBody>
-      </p:sp>
-      <p:sp>
-        <p:nvSpPr>
-          <p:cNvPr id="7" name="Rectángulo 6">
-            <a:extLst>
-              <a:ext uri="{FF2B5EF4-FFF2-40B4-BE49-F238E27FC236}">
-                <a16:creationId xmlns:a16="http://schemas.microsoft.com/office/drawing/2014/main" id="{C8036B97-F577-1F3C-3CE2-BD45F7D1FFC2}"/>
-              </a:ext>
-            </a:extLst>
-          </p:cNvPr>
-          <p:cNvSpPr/>
-          <p:nvPr/>
-        </p:nvSpPr>
-        <p:spPr>
-          <a:xfrm>
-            <a:off x="609441" y="1377510"/>
-            <a:ext cx="11199971" cy="3306028"/>
-          </a:xfrm>
-          <a:prstGeom prst="rect">
-            <a:avLst/>
-          </a:prstGeom>
-          <a:noFill/>
-          <a:ln w="28575">
-            <a:solidFill>
-              <a:srgbClr val="E0700D"/>
-            </a:solidFill>
-          </a:ln>
-        </p:spPr>
-        <p:style>
-          <a:lnRef idx="2">
-            <a:schemeClr val="accent1">
-              <a:shade val="15000"/>
-            </a:schemeClr>
-          </a:lnRef>
-          <a:fillRef idx="1">
-            <a:schemeClr val="accent1"/>
-          </a:fillRef>
-          <a:effectRef idx="0">
-            <a:schemeClr val="accent1"/>
-          </a:effectRef>
-          <a:fontRef idx="minor">
-            <a:schemeClr val="lt1"/>
-          </a:fontRef>
-        </p:style>
-        <p:txBody>
-          <a:bodyPr rtlCol="0" anchor="ctr"/>
-          <a:lstStyle/>
-          <a:p>
-            <a:pPr algn="ctr"/>
-            <a:endParaRPr lang="en-US"/>
-          </a:p>
-        </p:txBody>
-      </p:sp>
-      <p:sp>
-        <p:nvSpPr>
-          <p:cNvPr id="8" name="CuadroTexto 7">
-            <a:extLst>
-              <a:ext uri="{FF2B5EF4-FFF2-40B4-BE49-F238E27FC236}">
-                <a16:creationId xmlns:a16="http://schemas.microsoft.com/office/drawing/2014/main" id="{B0CFB20A-64F3-A296-71E8-F4FA17D35314}"/>
-              </a:ext>
-            </a:extLst>
-          </p:cNvPr>
-          <p:cNvSpPr txBox="1"/>
-          <p:nvPr/>
-        </p:nvSpPr>
-        <p:spPr>
-          <a:xfrm>
-            <a:off x="640245" y="1942909"/>
-            <a:ext cx="11199972" cy="2708434"/>
-          </a:xfrm>
-          <a:prstGeom prst="rect">
-            <a:avLst/>
-          </a:prstGeom>
-          <a:noFill/>
-        </p:spPr>
-        <p:txBody>
-          <a:bodyPr wrap="square" rtlCol="0">
-            <a:spAutoFit/>
-          </a:bodyPr>
-          <a:lstStyle/>
-          <a:p>
-            <a:pPr algn="ctr"/>
-            <a:r>
-              <a:rPr lang="en-US" b="1" dirty="0"/>
-              <a:t>deep</a:t>
-            </a:r>
-            <a:r>
-              <a:rPr lang="en-US" dirty="0"/>
-              <a:t> waveguide</a:t>
-            </a:r>
-          </a:p>
-          <a:p>
-            <a:pPr algn="ctr"/>
-            <a:endParaRPr lang="en-US" dirty="0"/>
-          </a:p>
-          <a:p>
-            <a:pPr algn="ctr"/>
-            <a:r>
-              <a:rPr lang="en-US" dirty="0"/>
-              <a:t>Paste propagation plot and console results</a:t>
-            </a:r>
-          </a:p>
-          <a:p>
-            <a:pPr algn="ctr"/>
-            <a:endParaRPr lang="en-US" dirty="0"/>
-          </a:p>
-          <a:p>
-            <a:pPr algn="ctr"/>
-            <a:endParaRPr lang="en-US" dirty="0"/>
-          </a:p>
-          <a:p>
-            <a:pPr algn="r"/>
-            <a:r>
-              <a:rPr lang="en-US" sz="1600" b="1" dirty="0"/>
-              <a:t>Target</a:t>
-            </a:r>
-            <a:r>
-              <a:rPr lang="en-US" sz="1600" dirty="0"/>
-              <a:t>: make ratio over outputs 0.5 + excess loss &lt; 0.1 dB</a:t>
-            </a:r>
-          </a:p>
-          <a:p>
-            <a:pPr algn="r"/>
-            <a:r>
-              <a:rPr lang="en-US" sz="1600" dirty="0"/>
-              <a:t>With same settings of previous LO, now modify the notebook so I/O waveguides have a different width. </a:t>
-            </a:r>
-          </a:p>
-          <a:p>
-            <a:pPr algn="r"/>
-            <a:r>
-              <a:rPr lang="en-US" sz="1600" u="sng" dirty="0"/>
-              <a:t>- The nominal I/O waveguide width you have been using is 1.0 µm, increase it.</a:t>
-            </a:r>
-          </a:p>
-          <a:p>
-            <a:pPr algn="r"/>
-            <a:r>
-              <a:rPr lang="en-US" sz="1600" b="1" dirty="0"/>
-              <a:t>(Warning</a:t>
-            </a:r>
-            <a:r>
-              <a:rPr lang="en-US" sz="1600" dirty="0"/>
-              <a:t>! Every time you change the I/O waveguide width you have to re-run modes calculation)</a:t>
-            </a:r>
-          </a:p>
-          <a:p>
-            <a:pPr algn="r"/>
-            <a:r>
-              <a:rPr lang="en-US" sz="1600" b="1" dirty="0"/>
-              <a:t>Hints</a:t>
-            </a:r>
-            <a:r>
-              <a:rPr lang="en-US" sz="1600" dirty="0"/>
-              <a:t>: observe the 2D EME propagation results to guide you to the best settings of a) and b).</a:t>
-            </a:r>
-          </a:p>
-        </p:txBody>
-      </p:sp>
-    </p:spTree>
-    <p:extLst>
-      <p:ext uri="{BB962C8B-B14F-4D97-AF65-F5344CB8AC3E}">
-        <p14:creationId xmlns:p14="http://schemas.microsoft.com/office/powerpoint/2010/main" val="1023731220"/>
-      </p:ext>
-    </p:extLst>
-  </p:cSld>
-  <p:clrMapOvr>
-    <a:masterClrMapping/>
-  </p:clrMapOvr>
-</p:sld>
-</file>
-
-<file path=ppt/slides/slide13.xml><?xml version="1.0" encoding="utf-8"?>
-<p:sld xmlns:a="http://schemas.openxmlformats.org/drawingml/2006/main" xmlns:r="http://schemas.openxmlformats.org/officeDocument/2006/relationships" xmlns:p="http://schemas.openxmlformats.org/presentationml/2006/main">
-  <p:cSld>
-    <p:spTree>
-      <p:nvGrpSpPr>
-        <p:cNvPr id="1" name="">
-          <a:extLst>
-            <a:ext uri="{FF2B5EF4-FFF2-40B4-BE49-F238E27FC236}">
-              <a16:creationId xmlns:a16="http://schemas.microsoft.com/office/drawing/2014/main" id="{200A1363-C83E-82B6-7BDE-AD2801F8B66D}"/>
-            </a:ext>
-          </a:extLst>
-        </p:cNvPr>
-        <p:cNvGrpSpPr/>
-        <p:nvPr/>
-      </p:nvGrpSpPr>
-      <p:grpSpPr>
-        <a:xfrm>
-          <a:off x="0" y="0"/>
-          <a:ext cx="0" cy="0"/>
-          <a:chOff x="0" y="0"/>
-          <a:chExt cx="0" cy="0"/>
-        </a:xfrm>
-      </p:grpSpPr>
-      <p:sp>
-        <p:nvSpPr>
-          <p:cNvPr id="16" name="object 16">
-            <a:extLst>
-              <a:ext uri="{FF2B5EF4-FFF2-40B4-BE49-F238E27FC236}">
-                <a16:creationId xmlns:a16="http://schemas.microsoft.com/office/drawing/2014/main" id="{1E256546-3103-104D-A87F-78AEBE5D595E}"/>
-              </a:ext>
-            </a:extLst>
-          </p:cNvPr>
-          <p:cNvSpPr txBox="1">
-            <a:spLocks noGrp="1"/>
-          </p:cNvSpPr>
-          <p:nvPr>
-            <p:ph type="title"/>
-          </p:nvPr>
-        </p:nvSpPr>
-        <p:spPr>
-          <a:xfrm>
-            <a:off x="685800" y="408883"/>
-            <a:ext cx="10994410" cy="705321"/>
-          </a:xfrm>
-          <a:prstGeom prst="rect">
-            <a:avLst/>
-          </a:prstGeom>
-        </p:spPr>
-        <p:txBody>
-          <a:bodyPr vert="horz" wrap="square" lIns="0" tIns="12700" rIns="0" bIns="0" rtlCol="0">
-            <a:spAutoFit/>
-          </a:bodyPr>
-          <a:lstStyle/>
-          <a:p>
-            <a:pPr marL="12700">
-              <a:lnSpc>
-                <a:spcPct val="100000"/>
-              </a:lnSpc>
-              <a:spcBef>
-                <a:spcPts val="100"/>
-              </a:spcBef>
-            </a:pPr>
-            <a:r>
-              <a:rPr lang="en-US" sz="2500" dirty="0"/>
-              <a:t>Learning outcome #7 – 1x4 Multimode Interference Coupler </a:t>
-            </a:r>
-            <a:br>
-              <a:rPr lang="en-US" sz="2500" dirty="0"/>
-            </a:br>
-            <a:r>
-              <a:rPr lang="en-US" b="0" dirty="0"/>
-              <a:t>Wavelength 1.55 µm, </a:t>
-            </a:r>
-            <a:r>
-              <a:rPr lang="en-US" b="0" dirty="0" err="1"/>
-              <a:t>wMMI</a:t>
-            </a:r>
-            <a:r>
-              <a:rPr lang="en-US" b="0" dirty="0"/>
-              <a:t> = ? µm</a:t>
-            </a:r>
-            <a:endParaRPr lang="en-US" sz="2500" b="0" dirty="0">
-              <a:latin typeface="+mj-lt"/>
-              <a:cs typeface="Lucida Sans"/>
-            </a:endParaRPr>
-          </a:p>
-        </p:txBody>
-      </p:sp>
-      <p:pic>
-        <p:nvPicPr>
-          <p:cNvPr id="83" name="Gráfico 82">
-            <a:extLst>
-              <a:ext uri="{FF2B5EF4-FFF2-40B4-BE49-F238E27FC236}">
-                <a16:creationId xmlns:a16="http://schemas.microsoft.com/office/drawing/2014/main" id="{4BFCA3D8-29F6-7091-7099-77888A9F863B}"/>
-              </a:ext>
-            </a:extLst>
-          </p:cNvPr>
-          <p:cNvPicPr>
-            <a:picLocks noChangeAspect="1"/>
-          </p:cNvPicPr>
-          <p:nvPr/>
-        </p:nvPicPr>
-        <p:blipFill>
-          <a:blip r:embed="rId3">
-            <a:extLst>
-              <a:ext uri="{96DAC541-7B7A-43D3-8B79-37D633B846F1}">
-                <asvg:svgBlip xmlns:asvg="http://schemas.microsoft.com/office/drawing/2016/SVG/main" r:embed="rId4"/>
-              </a:ext>
-            </a:extLst>
-          </a:blip>
-          <a:stretch>
-            <a:fillRect/>
-          </a:stretch>
-        </p:blipFill>
-        <p:spPr>
-          <a:xfrm>
-            <a:off x="5045006" y="6356057"/>
-            <a:ext cx="6409575" cy="363174"/>
-          </a:xfrm>
-          <a:prstGeom prst="rect">
-            <a:avLst/>
-          </a:prstGeom>
-        </p:spPr>
-      </p:pic>
-      <p:sp>
-        <p:nvSpPr>
-          <p:cNvPr id="84" name="Marcador de número de diapositiva 83">
-            <a:extLst>
-              <a:ext uri="{FF2B5EF4-FFF2-40B4-BE49-F238E27FC236}">
-                <a16:creationId xmlns:a16="http://schemas.microsoft.com/office/drawing/2014/main" id="{42E75535-0FBC-4C5F-9AC5-7008914FCF56}"/>
-              </a:ext>
-            </a:extLst>
-          </p:cNvPr>
-          <p:cNvSpPr>
-            <a:spLocks noGrp="1"/>
-          </p:cNvSpPr>
-          <p:nvPr>
-            <p:ph type="sldNum" sz="quarter" idx="7"/>
-          </p:nvPr>
-        </p:nvSpPr>
-        <p:spPr/>
-        <p:txBody>
-          <a:bodyPr/>
-          <a:lstStyle/>
-          <a:p>
-            <a:fld id="{B6F15528-21DE-4FAA-801E-634DDDAF4B2B}" type="slidenum">
-              <a:rPr lang="es-ES" smtClean="0"/>
-              <a:t>13</a:t>
-            </a:fld>
-            <a:endParaRPr lang="es-ES"/>
-          </a:p>
-        </p:txBody>
-      </p:sp>
-      <p:sp>
-        <p:nvSpPr>
-          <p:cNvPr id="3" name="Marcador de pie de página 2">
-            <a:extLst>
-              <a:ext uri="{FF2B5EF4-FFF2-40B4-BE49-F238E27FC236}">
-                <a16:creationId xmlns:a16="http://schemas.microsoft.com/office/drawing/2014/main" id="{07AC2AFF-A7D9-EBCD-7C5A-6CDF61B69366}"/>
-              </a:ext>
-            </a:extLst>
-          </p:cNvPr>
-          <p:cNvSpPr>
-            <a:spLocks noGrp="1"/>
-          </p:cNvSpPr>
-          <p:nvPr>
-            <p:ph type="ftr" sz="quarter" idx="5"/>
-          </p:nvPr>
-        </p:nvSpPr>
-        <p:spPr/>
-        <p:txBody>
-          <a:bodyPr/>
-          <a:lstStyle/>
-          <a:p>
-            <a:pPr marL="12700">
-              <a:spcBef>
-                <a:spcPts val="15"/>
-              </a:spcBef>
-            </a:pPr>
-            <a:r>
-              <a:rPr lang="es-ES" spc="-5"/>
-              <a:t>LAB 2.0. COUPLERS</a:t>
-            </a:r>
-            <a:endParaRPr lang="es-ES" spc="-5" dirty="0"/>
-          </a:p>
-        </p:txBody>
-      </p:sp>
-      <p:sp>
-        <p:nvSpPr>
-          <p:cNvPr id="2" name="CuadroTexto 1">
-            <a:extLst>
-              <a:ext uri="{FF2B5EF4-FFF2-40B4-BE49-F238E27FC236}">
-                <a16:creationId xmlns:a16="http://schemas.microsoft.com/office/drawing/2014/main" id="{42D73A2E-0E5A-8A39-6B70-F9E94D6DBB70}"/>
-              </a:ext>
-            </a:extLst>
-          </p:cNvPr>
-          <p:cNvSpPr txBox="1"/>
-          <p:nvPr/>
-        </p:nvSpPr>
-        <p:spPr>
-          <a:xfrm>
-            <a:off x="609441" y="4819471"/>
-            <a:ext cx="11199971" cy="1200329"/>
-          </a:xfrm>
-          <a:prstGeom prst="rect">
-            <a:avLst/>
-          </a:prstGeom>
-          <a:solidFill>
-            <a:schemeClr val="bg1">
-              <a:lumMod val="95000"/>
-            </a:schemeClr>
-          </a:solidFill>
-          <a:ln w="28575">
-            <a:solidFill>
-              <a:srgbClr val="E0700D"/>
-            </a:solidFill>
-          </a:ln>
-        </p:spPr>
-        <p:txBody>
-          <a:bodyPr wrap="square" rtlCol="0">
-            <a:spAutoFit/>
-          </a:bodyPr>
-          <a:lstStyle/>
-          <a:p>
-            <a:pPr algn="just"/>
-            <a:r>
-              <a:rPr lang="en-US" sz="1200" dirty="0">
-                <a:latin typeface="Arial" panose="020B0604020202020204" pitchFamily="34" charset="0"/>
-                <a:cs typeface="Arial" panose="020B0604020202020204" pitchFamily="34" charset="0"/>
-              </a:rPr>
-              <a:t>Repeat all the design </a:t>
-            </a:r>
-            <a:r>
-              <a:rPr lang="en-US" sz="1200">
-                <a:latin typeface="Arial" panose="020B0604020202020204" pitchFamily="34" charset="0"/>
-                <a:cs typeface="Arial" panose="020B0604020202020204" pitchFamily="34" charset="0"/>
-              </a:rPr>
-              <a:t>process for a </a:t>
-            </a:r>
-            <a:r>
-              <a:rPr lang="en-US" sz="1200" dirty="0">
-                <a:latin typeface="Arial" panose="020B0604020202020204" pitchFamily="34" charset="0"/>
-                <a:cs typeface="Arial" panose="020B0604020202020204" pitchFamily="34" charset="0"/>
-              </a:rPr>
-              <a:t>1x4 MMI Coupler.  </a:t>
-            </a:r>
-          </a:p>
-          <a:p>
-            <a:pPr algn="just"/>
-            <a:endParaRPr lang="en-US" sz="1200" dirty="0">
-              <a:latin typeface="Arial" panose="020B0604020202020204" pitchFamily="34" charset="0"/>
-              <a:cs typeface="Arial" panose="020B0604020202020204" pitchFamily="34" charset="0"/>
-            </a:endParaRPr>
-          </a:p>
-          <a:p>
-            <a:pPr algn="just"/>
-            <a:endParaRPr lang="en-US" sz="1200" dirty="0">
-              <a:latin typeface="Arial" panose="020B0604020202020204" pitchFamily="34" charset="0"/>
-              <a:cs typeface="Arial" panose="020B0604020202020204" pitchFamily="34" charset="0"/>
-            </a:endParaRPr>
-          </a:p>
-          <a:p>
-            <a:pPr algn="just"/>
-            <a:endParaRPr lang="en-US" sz="1200" dirty="0">
-              <a:latin typeface="Arial" panose="020B0604020202020204" pitchFamily="34" charset="0"/>
-              <a:cs typeface="Arial" panose="020B0604020202020204" pitchFamily="34" charset="0"/>
-            </a:endParaRPr>
-          </a:p>
-          <a:p>
-            <a:pPr algn="just"/>
-            <a:endParaRPr lang="en-US" sz="1200" dirty="0">
-              <a:latin typeface="Arial" panose="020B0604020202020204" pitchFamily="34" charset="0"/>
-              <a:cs typeface="Arial" panose="020B0604020202020204" pitchFamily="34" charset="0"/>
-            </a:endParaRPr>
-          </a:p>
-          <a:p>
-            <a:pPr algn="just"/>
-            <a:endParaRPr lang="en-US" sz="1200" dirty="0">
-              <a:latin typeface="Arial" panose="020B0604020202020204" pitchFamily="34" charset="0"/>
-              <a:cs typeface="Arial" panose="020B0604020202020204" pitchFamily="34" charset="0"/>
-            </a:endParaRPr>
-          </a:p>
-        </p:txBody>
-      </p:sp>
-      <p:sp>
-        <p:nvSpPr>
-          <p:cNvPr id="7" name="Rectángulo 6">
-            <a:extLst>
-              <a:ext uri="{FF2B5EF4-FFF2-40B4-BE49-F238E27FC236}">
-                <a16:creationId xmlns:a16="http://schemas.microsoft.com/office/drawing/2014/main" id="{AFB86587-21D4-5A33-7D00-DDF170C919BA}"/>
-              </a:ext>
-            </a:extLst>
-          </p:cNvPr>
-          <p:cNvSpPr/>
-          <p:nvPr/>
-        </p:nvSpPr>
-        <p:spPr>
-          <a:xfrm>
-            <a:off x="609441" y="1377510"/>
-            <a:ext cx="11199971" cy="3306028"/>
-          </a:xfrm>
-          <a:prstGeom prst="rect">
-            <a:avLst/>
-          </a:prstGeom>
-          <a:noFill/>
-          <a:ln w="28575">
-            <a:solidFill>
-              <a:srgbClr val="E0700D"/>
-            </a:solidFill>
-          </a:ln>
-        </p:spPr>
-        <p:style>
-          <a:lnRef idx="2">
-            <a:schemeClr val="accent1">
-              <a:shade val="15000"/>
-            </a:schemeClr>
-          </a:lnRef>
-          <a:fillRef idx="1">
-            <a:schemeClr val="accent1"/>
-          </a:fillRef>
-          <a:effectRef idx="0">
-            <a:schemeClr val="accent1"/>
-          </a:effectRef>
-          <a:fontRef idx="minor">
-            <a:schemeClr val="lt1"/>
-          </a:fontRef>
-        </p:style>
-        <p:txBody>
-          <a:bodyPr rtlCol="0" anchor="ctr"/>
-          <a:lstStyle/>
-          <a:p>
-            <a:pPr algn="ctr"/>
-            <a:endParaRPr lang="en-US"/>
-          </a:p>
-        </p:txBody>
-      </p:sp>
-      <p:sp>
-        <p:nvSpPr>
-          <p:cNvPr id="8" name="CuadroTexto 7">
-            <a:extLst>
-              <a:ext uri="{FF2B5EF4-FFF2-40B4-BE49-F238E27FC236}">
-                <a16:creationId xmlns:a16="http://schemas.microsoft.com/office/drawing/2014/main" id="{C3506757-32B7-9151-DA89-AADDB7F7D093}"/>
-              </a:ext>
-            </a:extLst>
-          </p:cNvPr>
-          <p:cNvSpPr txBox="1"/>
-          <p:nvPr/>
-        </p:nvSpPr>
-        <p:spPr>
-          <a:xfrm>
-            <a:off x="2286000" y="2630415"/>
-            <a:ext cx="7718580" cy="923330"/>
-          </a:xfrm>
-          <a:prstGeom prst="rect">
-            <a:avLst/>
-          </a:prstGeom>
-          <a:noFill/>
-        </p:spPr>
-        <p:txBody>
-          <a:bodyPr wrap="square" rtlCol="0">
-            <a:spAutoFit/>
-          </a:bodyPr>
-          <a:lstStyle/>
-          <a:p>
-            <a:pPr algn="ctr"/>
-            <a:r>
-              <a:rPr lang="en-US" b="1" dirty="0"/>
-              <a:t>deep</a:t>
-            </a:r>
-            <a:r>
-              <a:rPr lang="en-US" dirty="0"/>
-              <a:t> waveguide</a:t>
-            </a:r>
-          </a:p>
-          <a:p>
-            <a:pPr algn="ctr"/>
-            <a:endParaRPr lang="en-US" dirty="0"/>
-          </a:p>
-          <a:p>
-            <a:pPr algn="ctr"/>
-            <a:r>
-              <a:rPr lang="en-US" dirty="0"/>
-              <a:t>Paste propagation plots and console results</a:t>
-            </a:r>
-          </a:p>
-        </p:txBody>
-      </p:sp>
-    </p:spTree>
-    <p:extLst>
-      <p:ext uri="{BB962C8B-B14F-4D97-AF65-F5344CB8AC3E}">
-        <p14:creationId xmlns:p14="http://schemas.microsoft.com/office/powerpoint/2010/main" val="699864314"/>
-      </p:ext>
-    </p:extLst>
-  </p:cSld>
-  <p:clrMapOvr>
-    <a:masterClrMapping/>
-  </p:clrMapOvr>
-</p:sld>
-</file>
-
-<file path=ppt/slides/slide14.xml><?xml version="1.0" encoding="utf-8"?>
-<p:sld xmlns:a="http://schemas.openxmlformats.org/drawingml/2006/main" xmlns:r="http://schemas.openxmlformats.org/officeDocument/2006/relationships" xmlns:p="http://schemas.openxmlformats.org/presentationml/2006/main">
-  <p:cSld>
-    <p:spTree>
-      <p:nvGrpSpPr>
-        <p:cNvPr id="1" name="">
-          <a:extLst>
-            <a:ext uri="{FF2B5EF4-FFF2-40B4-BE49-F238E27FC236}">
-              <a16:creationId xmlns:a16="http://schemas.microsoft.com/office/drawing/2014/main" id="{AE80DA9C-35AF-A1D7-01E5-BFD9DEF1550F}"/>
-            </a:ext>
-          </a:extLst>
-        </p:cNvPr>
-        <p:cNvGrpSpPr/>
-        <p:nvPr/>
-      </p:nvGrpSpPr>
-      <p:grpSpPr>
-        <a:xfrm>
-          <a:off x="0" y="0"/>
-          <a:ext cx="0" cy="0"/>
-          <a:chOff x="0" y="0"/>
-          <a:chExt cx="0" cy="0"/>
-        </a:xfrm>
-      </p:grpSpPr>
-      <p:sp>
-        <p:nvSpPr>
-          <p:cNvPr id="16" name="object 16">
-            <a:extLst>
-              <a:ext uri="{FF2B5EF4-FFF2-40B4-BE49-F238E27FC236}">
-                <a16:creationId xmlns:a16="http://schemas.microsoft.com/office/drawing/2014/main" id="{471E1424-6C4B-2D9A-1352-30AFB987AD41}"/>
-              </a:ext>
-            </a:extLst>
-          </p:cNvPr>
-          <p:cNvSpPr txBox="1">
-            <a:spLocks noGrp="1"/>
-          </p:cNvSpPr>
-          <p:nvPr>
-            <p:ph type="title"/>
-          </p:nvPr>
-        </p:nvSpPr>
-        <p:spPr>
-          <a:xfrm>
-            <a:off x="685800" y="408883"/>
-            <a:ext cx="10994410" cy="1090042"/>
-          </a:xfrm>
-          <a:prstGeom prst="rect">
-            <a:avLst/>
-          </a:prstGeom>
-        </p:spPr>
-        <p:txBody>
-          <a:bodyPr vert="horz" wrap="square" lIns="0" tIns="12700" rIns="0" bIns="0" rtlCol="0">
-            <a:spAutoFit/>
-          </a:bodyPr>
-          <a:lstStyle/>
-          <a:p>
-            <a:pPr marL="12700">
-              <a:lnSpc>
-                <a:spcPct val="100000"/>
-              </a:lnSpc>
-              <a:spcBef>
-                <a:spcPts val="100"/>
-              </a:spcBef>
-            </a:pPr>
-            <a:r>
-              <a:rPr lang="en-US" sz="2500" dirty="0"/>
-              <a:t>Extra #1 – Directional coupler gap dependence</a:t>
-            </a:r>
-            <a:br>
-              <a:rPr lang="en-US" sz="2500" dirty="0"/>
-            </a:br>
-            <a:r>
-              <a:rPr lang="en-US" b="0" dirty="0"/>
-              <a:t>Wavelength 1.55 µm, width 1.0 µm, </a:t>
-            </a:r>
-            <a:r>
-              <a:rPr lang="en-US" dirty="0"/>
-              <a:t>gap 0.2-2.4 µm </a:t>
-            </a:r>
-            <a:r>
-              <a:rPr lang="en-US" b="0" dirty="0"/>
-              <a:t>(step 0.2 µm)</a:t>
-            </a:r>
-            <a:br>
-              <a:rPr lang="es-ES" sz="2500" spc="-5" dirty="0">
-                <a:latin typeface="+mj-lt"/>
-                <a:cs typeface="Lucida Sans"/>
-              </a:rPr>
-            </a:br>
-            <a:endParaRPr sz="2500" b="0" dirty="0">
-              <a:latin typeface="+mj-lt"/>
-              <a:cs typeface="Lucida Sans"/>
-            </a:endParaRPr>
-          </a:p>
-        </p:txBody>
-      </p:sp>
-      <p:pic>
-        <p:nvPicPr>
-          <p:cNvPr id="83" name="Gráfico 82">
-            <a:extLst>
-              <a:ext uri="{FF2B5EF4-FFF2-40B4-BE49-F238E27FC236}">
-                <a16:creationId xmlns:a16="http://schemas.microsoft.com/office/drawing/2014/main" id="{9DCFD462-4416-65F8-5696-B0135B632765}"/>
-              </a:ext>
-            </a:extLst>
-          </p:cNvPr>
-          <p:cNvPicPr>
-            <a:picLocks noChangeAspect="1"/>
-          </p:cNvPicPr>
-          <p:nvPr/>
-        </p:nvPicPr>
-        <p:blipFill>
-          <a:blip r:embed="rId3">
-            <a:extLst>
-              <a:ext uri="{96DAC541-7B7A-43D3-8B79-37D633B846F1}">
-                <asvg:svgBlip xmlns:asvg="http://schemas.microsoft.com/office/drawing/2016/SVG/main" r:embed="rId4"/>
-              </a:ext>
-            </a:extLst>
-          </a:blip>
-          <a:stretch>
-            <a:fillRect/>
-          </a:stretch>
-        </p:blipFill>
-        <p:spPr>
-          <a:xfrm>
-            <a:off x="5045006" y="6356057"/>
-            <a:ext cx="6409575" cy="363174"/>
-          </a:xfrm>
-          <a:prstGeom prst="rect">
-            <a:avLst/>
-          </a:prstGeom>
-        </p:spPr>
-      </p:pic>
-      <p:sp>
-        <p:nvSpPr>
-          <p:cNvPr id="84" name="Marcador de número de diapositiva 83">
-            <a:extLst>
-              <a:ext uri="{FF2B5EF4-FFF2-40B4-BE49-F238E27FC236}">
-                <a16:creationId xmlns:a16="http://schemas.microsoft.com/office/drawing/2014/main" id="{293F5C1D-AFFF-4EA6-CA59-6503F34EBF5F}"/>
-              </a:ext>
-            </a:extLst>
-          </p:cNvPr>
-          <p:cNvSpPr>
-            <a:spLocks noGrp="1"/>
-          </p:cNvSpPr>
-          <p:nvPr>
-            <p:ph type="sldNum" sz="quarter" idx="7"/>
-          </p:nvPr>
-        </p:nvSpPr>
-        <p:spPr/>
-        <p:txBody>
-          <a:bodyPr/>
-          <a:lstStyle/>
-          <a:p>
-            <a:fld id="{B6F15528-21DE-4FAA-801E-634DDDAF4B2B}" type="slidenum">
-              <a:rPr lang="es-ES" smtClean="0"/>
-              <a:t>14</a:t>
-            </a:fld>
-            <a:endParaRPr lang="es-ES"/>
-          </a:p>
-        </p:txBody>
-      </p:sp>
-      <p:sp>
-        <p:nvSpPr>
-          <p:cNvPr id="3" name="Marcador de pie de página 2">
-            <a:extLst>
-              <a:ext uri="{FF2B5EF4-FFF2-40B4-BE49-F238E27FC236}">
-                <a16:creationId xmlns:a16="http://schemas.microsoft.com/office/drawing/2014/main" id="{34F13AC1-9668-7266-DF5B-D7CE084AB044}"/>
-              </a:ext>
-            </a:extLst>
-          </p:cNvPr>
-          <p:cNvSpPr>
-            <a:spLocks noGrp="1"/>
-          </p:cNvSpPr>
-          <p:nvPr>
-            <p:ph type="ftr" sz="quarter" idx="5"/>
-          </p:nvPr>
-        </p:nvSpPr>
-        <p:spPr/>
-        <p:txBody>
-          <a:bodyPr/>
-          <a:lstStyle/>
-          <a:p>
-            <a:pPr marL="12700">
-              <a:spcBef>
-                <a:spcPts val="15"/>
-              </a:spcBef>
-            </a:pPr>
-            <a:r>
-              <a:rPr lang="es-ES" spc="-5"/>
-              <a:t>LAB 2.0. COUPLERS</a:t>
-            </a:r>
-            <a:endParaRPr lang="es-ES" spc="-5" dirty="0"/>
-          </a:p>
-        </p:txBody>
-      </p:sp>
-      <p:sp>
-        <p:nvSpPr>
-          <p:cNvPr id="2" name="CuadroTexto 1">
-            <a:extLst>
-              <a:ext uri="{FF2B5EF4-FFF2-40B4-BE49-F238E27FC236}">
-                <a16:creationId xmlns:a16="http://schemas.microsoft.com/office/drawing/2014/main" id="{D0F8CF3B-B920-DBFC-F825-0C87B51EADA7}"/>
-              </a:ext>
-            </a:extLst>
-          </p:cNvPr>
-          <p:cNvSpPr txBox="1"/>
-          <p:nvPr/>
-        </p:nvSpPr>
-        <p:spPr>
-          <a:xfrm>
-            <a:off x="609441" y="4860334"/>
-            <a:ext cx="11199971" cy="1015663"/>
-          </a:xfrm>
-          <a:prstGeom prst="rect">
-            <a:avLst/>
-          </a:prstGeom>
-          <a:solidFill>
-            <a:schemeClr val="bg1">
-              <a:lumMod val="95000"/>
-            </a:schemeClr>
-          </a:solidFill>
-          <a:ln w="28575">
-            <a:solidFill>
-              <a:srgbClr val="E0700D"/>
-            </a:solidFill>
-          </a:ln>
-        </p:spPr>
-        <p:txBody>
-          <a:bodyPr wrap="square" rtlCol="0">
-            <a:spAutoFit/>
-          </a:bodyPr>
-          <a:lstStyle/>
-          <a:p>
-            <a:pPr algn="just"/>
-            <a:r>
-              <a:rPr lang="en-US" sz="1200" dirty="0">
-                <a:latin typeface="Arial" panose="020B0604020202020204" pitchFamily="34" charset="0"/>
-                <a:cs typeface="Arial" panose="020B0604020202020204" pitchFamily="34" charset="0"/>
-              </a:rPr>
-              <a:t>Make conclusions and observations from your results</a:t>
-            </a:r>
-          </a:p>
-          <a:p>
-            <a:pPr algn="just"/>
-            <a:endParaRPr lang="en-US" sz="1200" dirty="0">
-              <a:latin typeface="Arial" panose="020B0604020202020204" pitchFamily="34" charset="0"/>
-              <a:cs typeface="Arial" panose="020B0604020202020204" pitchFamily="34" charset="0"/>
-            </a:endParaRPr>
-          </a:p>
-          <a:p>
-            <a:pPr algn="just"/>
-            <a:endParaRPr lang="en-US" sz="1200" dirty="0">
-              <a:latin typeface="Arial" panose="020B0604020202020204" pitchFamily="34" charset="0"/>
-              <a:cs typeface="Arial" panose="020B0604020202020204" pitchFamily="34" charset="0"/>
-            </a:endParaRPr>
-          </a:p>
-          <a:p>
-            <a:pPr algn="just"/>
-            <a:endParaRPr lang="en-US" sz="1200" dirty="0">
-              <a:latin typeface="Arial" panose="020B0604020202020204" pitchFamily="34" charset="0"/>
-              <a:cs typeface="Arial" panose="020B0604020202020204" pitchFamily="34" charset="0"/>
-            </a:endParaRPr>
-          </a:p>
-          <a:p>
-            <a:pPr algn="just"/>
-            <a:endParaRPr lang="en-US" sz="1200" dirty="0">
-              <a:latin typeface="Arial" panose="020B0604020202020204" pitchFamily="34" charset="0"/>
-              <a:cs typeface="Arial" panose="020B0604020202020204" pitchFamily="34" charset="0"/>
-            </a:endParaRPr>
-          </a:p>
-        </p:txBody>
-      </p:sp>
-      <p:sp>
-        <p:nvSpPr>
-          <p:cNvPr id="5" name="Rectángulo 4">
-            <a:extLst>
-              <a:ext uri="{FF2B5EF4-FFF2-40B4-BE49-F238E27FC236}">
-                <a16:creationId xmlns:a16="http://schemas.microsoft.com/office/drawing/2014/main" id="{E7488849-10A1-FB48-F511-E57B062CD7E2}"/>
-              </a:ext>
-            </a:extLst>
-          </p:cNvPr>
-          <p:cNvSpPr/>
-          <p:nvPr/>
-        </p:nvSpPr>
-        <p:spPr>
-          <a:xfrm>
-            <a:off x="609441" y="1447800"/>
-            <a:ext cx="5486559" cy="3306028"/>
-          </a:xfrm>
-          <a:prstGeom prst="rect">
-            <a:avLst/>
-          </a:prstGeom>
-          <a:noFill/>
-          <a:ln w="28575">
-            <a:solidFill>
-              <a:srgbClr val="E0700D"/>
-            </a:solidFill>
-          </a:ln>
-        </p:spPr>
-        <p:style>
-          <a:lnRef idx="2">
-            <a:schemeClr val="accent1">
-              <a:shade val="15000"/>
-            </a:schemeClr>
-          </a:lnRef>
-          <a:fillRef idx="1">
-            <a:schemeClr val="accent1"/>
-          </a:fillRef>
-          <a:effectRef idx="0">
-            <a:schemeClr val="accent1"/>
-          </a:effectRef>
-          <a:fontRef idx="minor">
-            <a:schemeClr val="lt1"/>
-          </a:fontRef>
-        </p:style>
-        <p:txBody>
-          <a:bodyPr rtlCol="0" anchor="ctr"/>
-          <a:lstStyle/>
-          <a:p>
-            <a:pPr algn="ctr"/>
-            <a:endParaRPr lang="en-US"/>
-          </a:p>
-        </p:txBody>
-      </p:sp>
-      <p:sp>
-        <p:nvSpPr>
-          <p:cNvPr id="6" name="Rectángulo 5">
-            <a:extLst>
-              <a:ext uri="{FF2B5EF4-FFF2-40B4-BE49-F238E27FC236}">
-                <a16:creationId xmlns:a16="http://schemas.microsoft.com/office/drawing/2014/main" id="{68726DAB-1B5F-39D1-63A0-BB708EA6E17F}"/>
-              </a:ext>
-            </a:extLst>
-          </p:cNvPr>
-          <p:cNvSpPr/>
-          <p:nvPr/>
-        </p:nvSpPr>
-        <p:spPr>
-          <a:xfrm>
-            <a:off x="6321424" y="1447800"/>
-            <a:ext cx="5486559" cy="3306028"/>
-          </a:xfrm>
-          <a:prstGeom prst="rect">
-            <a:avLst/>
-          </a:prstGeom>
-          <a:noFill/>
-          <a:ln w="28575">
-            <a:solidFill>
-              <a:srgbClr val="E0700D"/>
-            </a:solidFill>
-          </a:ln>
-        </p:spPr>
-        <p:style>
-          <a:lnRef idx="2">
-            <a:schemeClr val="accent1">
-              <a:shade val="15000"/>
-            </a:schemeClr>
-          </a:lnRef>
-          <a:fillRef idx="1">
-            <a:schemeClr val="accent1"/>
-          </a:fillRef>
-          <a:effectRef idx="0">
-            <a:schemeClr val="accent1"/>
-          </a:effectRef>
-          <a:fontRef idx="minor">
-            <a:schemeClr val="lt1"/>
-          </a:fontRef>
-        </p:style>
-        <p:txBody>
-          <a:bodyPr rtlCol="0" anchor="ctr"/>
-          <a:lstStyle/>
-          <a:p>
-            <a:pPr algn="ctr"/>
-            <a:endParaRPr lang="en-US"/>
-          </a:p>
-        </p:txBody>
-      </p:sp>
-      <p:sp>
-        <p:nvSpPr>
-          <p:cNvPr id="7" name="CuadroTexto 6">
-            <a:extLst>
-              <a:ext uri="{FF2B5EF4-FFF2-40B4-BE49-F238E27FC236}">
-                <a16:creationId xmlns:a16="http://schemas.microsoft.com/office/drawing/2014/main" id="{6D309BFB-98FD-0CBA-3C6A-346D8859893B}"/>
-              </a:ext>
-            </a:extLst>
-          </p:cNvPr>
-          <p:cNvSpPr txBox="1"/>
-          <p:nvPr/>
-        </p:nvSpPr>
-        <p:spPr>
-          <a:xfrm>
-            <a:off x="6331152" y="4342178"/>
-            <a:ext cx="2269787" cy="369332"/>
-          </a:xfrm>
-          <a:prstGeom prst="rect">
-            <a:avLst/>
-          </a:prstGeom>
-          <a:noFill/>
-        </p:spPr>
-        <p:txBody>
-          <a:bodyPr wrap="square">
-            <a:spAutoFit/>
-          </a:bodyPr>
-          <a:lstStyle/>
-          <a:p>
-            <a:r>
-              <a:rPr lang="en-US" dirty="0"/>
-              <a:t>slab = 150nm</a:t>
-            </a:r>
-            <a:endParaRPr lang="es-ES" dirty="0"/>
-          </a:p>
-        </p:txBody>
-      </p:sp>
-      <mc:AlternateContent xmlns:mc="http://schemas.openxmlformats.org/markup-compatibility/2006" xmlns:a14="http://schemas.microsoft.com/office/drawing/2010/main">
-        <mc:Choice Requires="a14">
-          <p:sp>
-            <p:nvSpPr>
-              <p:cNvPr id="8" name="CuadroTexto 7">
-                <a:extLst>
-                  <a:ext uri="{FF2B5EF4-FFF2-40B4-BE49-F238E27FC236}">
-                    <a16:creationId xmlns:a16="http://schemas.microsoft.com/office/drawing/2014/main" id="{E9BD6C85-02F1-7B54-41E3-E3D9883786D8}"/>
-                  </a:ext>
-                </a:extLst>
-              </p:cNvPr>
-              <p:cNvSpPr txBox="1"/>
-              <p:nvPr/>
-            </p:nvSpPr>
-            <p:spPr>
-              <a:xfrm>
-                <a:off x="1079403" y="2709096"/>
-                <a:ext cx="4546634" cy="923330"/>
-              </a:xfrm>
-              <a:prstGeom prst="rect">
-                <a:avLst/>
-              </a:prstGeom>
-              <a:noFill/>
-            </p:spPr>
-            <p:txBody>
-              <a:bodyPr wrap="square" rtlCol="0">
-                <a:spAutoFit/>
-              </a:bodyPr>
-              <a:lstStyle/>
-              <a:p>
-                <a:pPr algn="ctr"/>
-                <a:r>
-                  <a:rPr lang="en-US" b="1" dirty="0"/>
-                  <a:t>deep</a:t>
-                </a:r>
-                <a:r>
-                  <a:rPr lang="en-US" dirty="0"/>
-                  <a:t> waveguide</a:t>
-                </a:r>
-              </a:p>
-              <a:p>
-                <a:pPr algn="ctr"/>
-                <a:endParaRPr lang="en-US" dirty="0"/>
-              </a:p>
-              <a:p>
-                <a:pPr algn="ctr"/>
-                <a:r>
-                  <a:rPr lang="en-US" dirty="0"/>
-                  <a:t>Paste </a:t>
-                </a:r>
-                <a14:m>
-                  <m:oMath xmlns:m="http://schemas.openxmlformats.org/officeDocument/2006/math">
-                    <m:sSub>
-                      <m:sSubPr>
-                        <m:ctrlPr>
-                          <a:rPr lang="es-ES" sz="1800" b="0" i="1" smtClean="0">
-                            <a:latin typeface="Cambria Math" panose="02040503050406030204" pitchFamily="18" charset="0"/>
-                          </a:rPr>
-                        </m:ctrlPr>
-                      </m:sSubPr>
-                      <m:e>
-                        <m:r>
-                          <a:rPr lang="es-ES" sz="1800" b="0" i="1" smtClean="0">
-                            <a:latin typeface="Cambria Math" panose="02040503050406030204" pitchFamily="18" charset="0"/>
-                          </a:rPr>
-                          <m:t>𝐿</m:t>
-                        </m:r>
-                      </m:e>
-                      <m:sub>
-                        <m:r>
-                          <a:rPr lang="es-ES" sz="1800" b="0" i="1" smtClean="0">
-                            <a:latin typeface="Cambria Math" panose="02040503050406030204" pitchFamily="18" charset="0"/>
-                          </a:rPr>
-                          <m:t>𝜋</m:t>
-                        </m:r>
-                      </m:sub>
-                    </m:sSub>
-                  </m:oMath>
-                </a14:m>
-                <a:r>
-                  <a:rPr lang="en-US" dirty="0"/>
-                  <a:t> vs gap for TE and TM plot here</a:t>
-                </a:r>
-              </a:p>
-            </p:txBody>
-          </p:sp>
-        </mc:Choice>
-        <mc:Fallback xmlns="">
-          <p:sp>
-            <p:nvSpPr>
-              <p:cNvPr id="8" name="CuadroTexto 7">
-                <a:extLst>
-                  <a:ext uri="{FF2B5EF4-FFF2-40B4-BE49-F238E27FC236}">
-                    <a16:creationId xmlns:a16="http://schemas.microsoft.com/office/drawing/2014/main" id="{E9BD6C85-02F1-7B54-41E3-E3D9883786D8}"/>
-                  </a:ext>
-                </a:extLst>
-              </p:cNvPr>
-              <p:cNvSpPr txBox="1">
-                <a:spLocks noRot="1" noChangeAspect="1" noMove="1" noResize="1" noEditPoints="1" noAdjustHandles="1" noChangeArrowheads="1" noChangeShapeType="1" noTextEdit="1"/>
-              </p:cNvSpPr>
-              <p:nvPr/>
-            </p:nvSpPr>
-            <p:spPr>
-              <a:xfrm>
-                <a:off x="1079403" y="2709096"/>
-                <a:ext cx="4546634" cy="923330"/>
-              </a:xfrm>
-              <a:prstGeom prst="rect">
-                <a:avLst/>
-              </a:prstGeom>
-              <a:blipFill>
-                <a:blip r:embed="rId5"/>
-                <a:stretch>
-                  <a:fillRect t="-3289" b="-9211"/>
-                </a:stretch>
-              </a:blipFill>
-            </p:spPr>
-            <p:txBody>
-              <a:bodyPr/>
-              <a:lstStyle/>
-              <a:p>
-                <a:r>
-                  <a:rPr lang="es-ES">
-                    <a:noFill/>
-                  </a:rPr>
-                  <a:t> </a:t>
-                </a:r>
-              </a:p>
-            </p:txBody>
-          </p:sp>
-        </mc:Fallback>
-      </mc:AlternateContent>
-      <mc:AlternateContent xmlns:mc="http://schemas.openxmlformats.org/markup-compatibility/2006" xmlns:a14="http://schemas.microsoft.com/office/drawing/2010/main">
-        <mc:Choice Requires="a14">
-          <p:sp>
-            <p:nvSpPr>
-              <p:cNvPr id="9" name="CuadroTexto 8">
-                <a:extLst>
-                  <a:ext uri="{FF2B5EF4-FFF2-40B4-BE49-F238E27FC236}">
-                    <a16:creationId xmlns:a16="http://schemas.microsoft.com/office/drawing/2014/main" id="{7431A41C-EEB3-44D0-4622-A915E258C8F0}"/>
-                  </a:ext>
-                </a:extLst>
-              </p:cNvPr>
-              <p:cNvSpPr txBox="1"/>
-              <p:nvPr/>
-            </p:nvSpPr>
-            <p:spPr>
-              <a:xfrm>
-                <a:off x="6883366" y="2709096"/>
-                <a:ext cx="4546634" cy="923330"/>
-              </a:xfrm>
-              <a:prstGeom prst="rect">
-                <a:avLst/>
-              </a:prstGeom>
-              <a:noFill/>
-            </p:spPr>
-            <p:txBody>
-              <a:bodyPr wrap="square" rtlCol="0">
-                <a:spAutoFit/>
-              </a:bodyPr>
-              <a:lstStyle/>
-              <a:p>
-                <a:pPr algn="ctr"/>
-                <a:r>
-                  <a:rPr lang="en-US" b="1" dirty="0"/>
-                  <a:t>shallow</a:t>
-                </a:r>
-                <a:r>
-                  <a:rPr lang="en-US" dirty="0"/>
-                  <a:t> waveguide</a:t>
-                </a:r>
-              </a:p>
-              <a:p>
-                <a:pPr algn="ctr"/>
-                <a:endParaRPr lang="en-US" dirty="0"/>
-              </a:p>
-              <a:p>
-                <a:pPr algn="ctr"/>
-                <a:r>
-                  <a:rPr lang="en-US" dirty="0"/>
-                  <a:t>Paste </a:t>
-                </a:r>
-                <a14:m>
-                  <m:oMath xmlns:m="http://schemas.openxmlformats.org/officeDocument/2006/math">
-                    <m:sSub>
-                      <m:sSubPr>
-                        <m:ctrlPr>
-                          <a:rPr lang="es-ES" sz="1800" b="0" i="1" smtClean="0">
-                            <a:latin typeface="Cambria Math" panose="02040503050406030204" pitchFamily="18" charset="0"/>
-                          </a:rPr>
-                        </m:ctrlPr>
-                      </m:sSubPr>
-                      <m:e>
-                        <m:r>
-                          <a:rPr lang="es-ES" sz="1800" b="0" i="1" smtClean="0">
-                            <a:latin typeface="Cambria Math" panose="02040503050406030204" pitchFamily="18" charset="0"/>
-                          </a:rPr>
-                          <m:t>𝐿</m:t>
-                        </m:r>
-                      </m:e>
-                      <m:sub>
-                        <m:r>
-                          <a:rPr lang="es-ES" sz="1800" b="0" i="1" smtClean="0">
-                            <a:latin typeface="Cambria Math" panose="02040503050406030204" pitchFamily="18" charset="0"/>
-                          </a:rPr>
-                          <m:t>𝜋</m:t>
-                        </m:r>
-                      </m:sub>
-                    </m:sSub>
-                  </m:oMath>
-                </a14:m>
-                <a:r>
-                  <a:rPr lang="en-US" dirty="0"/>
-                  <a:t> vs gap for TE and TM plot here</a:t>
-                </a:r>
-              </a:p>
-            </p:txBody>
-          </p:sp>
-        </mc:Choice>
-        <mc:Fallback xmlns="">
-          <p:sp>
-            <p:nvSpPr>
-              <p:cNvPr id="9" name="CuadroTexto 8">
-                <a:extLst>
-                  <a:ext uri="{FF2B5EF4-FFF2-40B4-BE49-F238E27FC236}">
-                    <a16:creationId xmlns:a16="http://schemas.microsoft.com/office/drawing/2014/main" id="{7431A41C-EEB3-44D0-4622-A915E258C8F0}"/>
-                  </a:ext>
-                </a:extLst>
-              </p:cNvPr>
-              <p:cNvSpPr txBox="1">
-                <a:spLocks noRot="1" noChangeAspect="1" noMove="1" noResize="1" noEditPoints="1" noAdjustHandles="1" noChangeArrowheads="1" noChangeShapeType="1" noTextEdit="1"/>
-              </p:cNvSpPr>
-              <p:nvPr/>
-            </p:nvSpPr>
-            <p:spPr>
-              <a:xfrm>
-                <a:off x="6883366" y="2709096"/>
-                <a:ext cx="4546634" cy="923330"/>
-              </a:xfrm>
-              <a:prstGeom prst="rect">
-                <a:avLst/>
-              </a:prstGeom>
-              <a:blipFill>
-                <a:blip r:embed="rId6"/>
-                <a:stretch>
-                  <a:fillRect t="-3289" b="-9211"/>
-                </a:stretch>
-              </a:blipFill>
-            </p:spPr>
-            <p:txBody>
-              <a:bodyPr/>
-              <a:lstStyle/>
-              <a:p>
-                <a:r>
-                  <a:rPr lang="es-ES">
-                    <a:noFill/>
-                  </a:rPr>
-                  <a:t> </a:t>
-                </a:r>
-              </a:p>
-            </p:txBody>
-          </p:sp>
-        </mc:Fallback>
-      </mc:AlternateContent>
-    </p:spTree>
-    <p:extLst>
-      <p:ext uri="{BB962C8B-B14F-4D97-AF65-F5344CB8AC3E}">
-        <p14:creationId xmlns:p14="http://schemas.microsoft.com/office/powerpoint/2010/main" val="179796361"/>
-      </p:ext>
-    </p:extLst>
-  </p:cSld>
-  <p:clrMapOvr>
-    <a:masterClrMapping/>
-  </p:clrMapOvr>
-</p:sld>
-</file>
-
-<file path=ppt/slides/slide15.xml><?xml version="1.0" encoding="utf-8"?>
-<p:sld xmlns:a="http://schemas.openxmlformats.org/drawingml/2006/main" xmlns:r="http://schemas.openxmlformats.org/officeDocument/2006/relationships" xmlns:p="http://schemas.openxmlformats.org/presentationml/2006/main">
-  <p:cSld>
-    <p:spTree>
-      <p:nvGrpSpPr>
-        <p:cNvPr id="1" name="">
-          <a:extLst>
-            <a:ext uri="{FF2B5EF4-FFF2-40B4-BE49-F238E27FC236}">
-              <a16:creationId xmlns:a16="http://schemas.microsoft.com/office/drawing/2014/main" id="{44C60F79-E2ED-1B1B-6289-A1259E808584}"/>
-            </a:ext>
-          </a:extLst>
-        </p:cNvPr>
-        <p:cNvGrpSpPr/>
-        <p:nvPr/>
-      </p:nvGrpSpPr>
-      <p:grpSpPr>
-        <a:xfrm>
-          <a:off x="0" y="0"/>
-          <a:ext cx="0" cy="0"/>
-          <a:chOff x="0" y="0"/>
-          <a:chExt cx="0" cy="0"/>
-        </a:xfrm>
-      </p:grpSpPr>
-      <p:sp>
-        <p:nvSpPr>
-          <p:cNvPr id="16" name="object 16">
-            <a:extLst>
-              <a:ext uri="{FF2B5EF4-FFF2-40B4-BE49-F238E27FC236}">
-                <a16:creationId xmlns:a16="http://schemas.microsoft.com/office/drawing/2014/main" id="{5AC39480-E3E5-69B1-401F-A50C45531EF2}"/>
-              </a:ext>
-            </a:extLst>
-          </p:cNvPr>
-          <p:cNvSpPr txBox="1">
-            <a:spLocks noGrp="1"/>
-          </p:cNvSpPr>
-          <p:nvPr>
-            <p:ph type="title"/>
-          </p:nvPr>
-        </p:nvSpPr>
-        <p:spPr>
-          <a:xfrm>
-            <a:off x="685800" y="408883"/>
-            <a:ext cx="10994410" cy="1474763"/>
-          </a:xfrm>
-          <a:prstGeom prst="rect">
-            <a:avLst/>
-          </a:prstGeom>
-        </p:spPr>
-        <p:txBody>
-          <a:bodyPr vert="horz" wrap="square" lIns="0" tIns="12700" rIns="0" bIns="0" rtlCol="0">
-            <a:spAutoFit/>
-          </a:bodyPr>
-          <a:lstStyle/>
-          <a:p>
-            <a:pPr marL="12700">
-              <a:lnSpc>
-                <a:spcPct val="100000"/>
-              </a:lnSpc>
-              <a:spcBef>
-                <a:spcPts val="100"/>
-              </a:spcBef>
-            </a:pPr>
-            <a:r>
-              <a:rPr lang="en-US" sz="2500" dirty="0"/>
-              <a:t>Extra #2 – Directional wavelength dependence</a:t>
-            </a:r>
-            <a:br>
-              <a:rPr lang="en-US" sz="2500" dirty="0"/>
-            </a:br>
-            <a:r>
-              <a:rPr lang="en-US" b="0" dirty="0"/>
-              <a:t>Wavelengths </a:t>
-            </a:r>
-            <a:r>
-              <a:rPr lang="en-US" dirty="0"/>
-              <a:t>from 1.5 to 1.7 µm</a:t>
-            </a:r>
-            <a:r>
-              <a:rPr lang="en-US" b="0" dirty="0"/>
-              <a:t>, gap = 0.6 µm, width 1.0 µm</a:t>
-            </a:r>
-            <a:br>
-              <a:rPr lang="en-US" b="0" dirty="0"/>
-            </a:br>
-            <a:br>
-              <a:rPr lang="es-ES" sz="2500" spc="-5" dirty="0">
-                <a:latin typeface="+mj-lt"/>
-                <a:cs typeface="Lucida Sans"/>
-              </a:rPr>
-            </a:br>
-            <a:endParaRPr sz="2500" b="0" dirty="0">
-              <a:latin typeface="+mj-lt"/>
-              <a:cs typeface="Lucida Sans"/>
-            </a:endParaRPr>
-          </a:p>
-        </p:txBody>
-      </p:sp>
-      <p:pic>
-        <p:nvPicPr>
-          <p:cNvPr id="83" name="Gráfico 82">
-            <a:extLst>
-              <a:ext uri="{FF2B5EF4-FFF2-40B4-BE49-F238E27FC236}">
-                <a16:creationId xmlns:a16="http://schemas.microsoft.com/office/drawing/2014/main" id="{4BEE8680-2E49-EF52-0E73-7736679A4D72}"/>
-              </a:ext>
-            </a:extLst>
-          </p:cNvPr>
-          <p:cNvPicPr>
-            <a:picLocks noChangeAspect="1"/>
-          </p:cNvPicPr>
-          <p:nvPr/>
-        </p:nvPicPr>
-        <p:blipFill>
-          <a:blip r:embed="rId3">
-            <a:extLst>
-              <a:ext uri="{96DAC541-7B7A-43D3-8B79-37D633B846F1}">
-                <asvg:svgBlip xmlns:asvg="http://schemas.microsoft.com/office/drawing/2016/SVG/main" r:embed="rId4"/>
-              </a:ext>
-            </a:extLst>
-          </a:blip>
-          <a:stretch>
-            <a:fillRect/>
-          </a:stretch>
-        </p:blipFill>
-        <p:spPr>
-          <a:xfrm>
-            <a:off x="5045006" y="6356057"/>
-            <a:ext cx="6409575" cy="363174"/>
-          </a:xfrm>
-          <a:prstGeom prst="rect">
-            <a:avLst/>
-          </a:prstGeom>
-        </p:spPr>
-      </p:pic>
-      <p:sp>
-        <p:nvSpPr>
-          <p:cNvPr id="84" name="Marcador de número de diapositiva 83">
-            <a:extLst>
-              <a:ext uri="{FF2B5EF4-FFF2-40B4-BE49-F238E27FC236}">
-                <a16:creationId xmlns:a16="http://schemas.microsoft.com/office/drawing/2014/main" id="{73F99BBB-5F10-0BE4-E2DE-E78EAA82F552}"/>
-              </a:ext>
-            </a:extLst>
-          </p:cNvPr>
-          <p:cNvSpPr>
-            <a:spLocks noGrp="1"/>
-          </p:cNvSpPr>
-          <p:nvPr>
-            <p:ph type="sldNum" sz="quarter" idx="7"/>
-          </p:nvPr>
-        </p:nvSpPr>
-        <p:spPr/>
-        <p:txBody>
-          <a:bodyPr/>
-          <a:lstStyle/>
-          <a:p>
-            <a:fld id="{B6F15528-21DE-4FAA-801E-634DDDAF4B2B}" type="slidenum">
-              <a:rPr lang="es-ES" smtClean="0"/>
-              <a:t>15</a:t>
-            </a:fld>
-            <a:endParaRPr lang="es-ES"/>
-          </a:p>
-        </p:txBody>
-      </p:sp>
-      <p:sp>
-        <p:nvSpPr>
-          <p:cNvPr id="3" name="Marcador de pie de página 2">
-            <a:extLst>
-              <a:ext uri="{FF2B5EF4-FFF2-40B4-BE49-F238E27FC236}">
-                <a16:creationId xmlns:a16="http://schemas.microsoft.com/office/drawing/2014/main" id="{52B2FA4B-8D15-84DC-29D1-94F9F8504763}"/>
-              </a:ext>
-            </a:extLst>
-          </p:cNvPr>
-          <p:cNvSpPr>
-            <a:spLocks noGrp="1"/>
-          </p:cNvSpPr>
-          <p:nvPr>
-            <p:ph type="ftr" sz="quarter" idx="5"/>
-          </p:nvPr>
-        </p:nvSpPr>
-        <p:spPr/>
-        <p:txBody>
-          <a:bodyPr/>
-          <a:lstStyle/>
-          <a:p>
-            <a:pPr marL="12700">
-              <a:spcBef>
-                <a:spcPts val="15"/>
-              </a:spcBef>
-            </a:pPr>
-            <a:r>
-              <a:rPr lang="es-ES" spc="-5"/>
-              <a:t>LAB 2.0. COUPLERS</a:t>
-            </a:r>
-            <a:endParaRPr lang="es-ES" spc="-5" dirty="0"/>
-          </a:p>
-        </p:txBody>
-      </p:sp>
-      <p:sp>
-        <p:nvSpPr>
-          <p:cNvPr id="2" name="CuadroTexto 1">
-            <a:extLst>
-              <a:ext uri="{FF2B5EF4-FFF2-40B4-BE49-F238E27FC236}">
-                <a16:creationId xmlns:a16="http://schemas.microsoft.com/office/drawing/2014/main" id="{181326FD-308E-2C47-D5D2-57B3357241AA}"/>
-              </a:ext>
-            </a:extLst>
-          </p:cNvPr>
-          <p:cNvSpPr txBox="1"/>
-          <p:nvPr/>
-        </p:nvSpPr>
-        <p:spPr>
-          <a:xfrm>
-            <a:off x="609441" y="4860334"/>
-            <a:ext cx="11199971" cy="1200329"/>
-          </a:xfrm>
-          <a:prstGeom prst="rect">
-            <a:avLst/>
-          </a:prstGeom>
-          <a:solidFill>
-            <a:schemeClr val="bg1">
-              <a:lumMod val="95000"/>
-            </a:schemeClr>
-          </a:solidFill>
-          <a:ln w="28575">
-            <a:solidFill>
-              <a:srgbClr val="E0700D"/>
-            </a:solidFill>
-          </a:ln>
-        </p:spPr>
-        <p:txBody>
-          <a:bodyPr wrap="square" rtlCol="0">
-            <a:spAutoFit/>
-          </a:bodyPr>
-          <a:lstStyle/>
-          <a:p>
-            <a:pPr algn="just"/>
-            <a:r>
-              <a:rPr lang="en-US" sz="1200" dirty="0">
-                <a:latin typeface="Arial" panose="020B0604020202020204" pitchFamily="34" charset="0"/>
-                <a:cs typeface="Arial" panose="020B0604020202020204" pitchFamily="34" charset="0"/>
-              </a:rPr>
-              <a:t>Comment results</a:t>
-            </a:r>
-          </a:p>
-          <a:p>
-            <a:pPr algn="just"/>
-            <a:endParaRPr lang="en-US" sz="1200" dirty="0">
-              <a:latin typeface="Arial" panose="020B0604020202020204" pitchFamily="34" charset="0"/>
-              <a:cs typeface="Arial" panose="020B0604020202020204" pitchFamily="34" charset="0"/>
-            </a:endParaRPr>
-          </a:p>
-          <a:p>
-            <a:pPr algn="just"/>
-            <a:endParaRPr lang="en-US" sz="1200" dirty="0">
-              <a:latin typeface="Arial" panose="020B0604020202020204" pitchFamily="34" charset="0"/>
-              <a:cs typeface="Arial" panose="020B0604020202020204" pitchFamily="34" charset="0"/>
-            </a:endParaRPr>
-          </a:p>
-          <a:p>
-            <a:pPr algn="just"/>
-            <a:endParaRPr lang="en-US" sz="1200" dirty="0">
-              <a:latin typeface="Arial" panose="020B0604020202020204" pitchFamily="34" charset="0"/>
-              <a:cs typeface="Arial" panose="020B0604020202020204" pitchFamily="34" charset="0"/>
-            </a:endParaRPr>
-          </a:p>
-          <a:p>
-            <a:pPr algn="just"/>
-            <a:endParaRPr lang="en-US" sz="1200" dirty="0">
-              <a:latin typeface="Arial" panose="020B0604020202020204" pitchFamily="34" charset="0"/>
-              <a:cs typeface="Arial" panose="020B0604020202020204" pitchFamily="34" charset="0"/>
-            </a:endParaRPr>
-          </a:p>
-          <a:p>
-            <a:pPr algn="just"/>
-            <a:endParaRPr lang="en-US" sz="1200" dirty="0">
-              <a:latin typeface="Arial" panose="020B0604020202020204" pitchFamily="34" charset="0"/>
-              <a:cs typeface="Arial" panose="020B0604020202020204" pitchFamily="34" charset="0"/>
-            </a:endParaRPr>
-          </a:p>
-        </p:txBody>
-      </p:sp>
-      <p:sp>
-        <p:nvSpPr>
-          <p:cNvPr id="5" name="Rectángulo 4">
-            <a:extLst>
-              <a:ext uri="{FF2B5EF4-FFF2-40B4-BE49-F238E27FC236}">
-                <a16:creationId xmlns:a16="http://schemas.microsoft.com/office/drawing/2014/main" id="{B42E1AD9-10D4-8ACB-526F-2DA1DD2B9881}"/>
-              </a:ext>
-            </a:extLst>
-          </p:cNvPr>
-          <p:cNvSpPr/>
-          <p:nvPr/>
-        </p:nvSpPr>
-        <p:spPr>
-          <a:xfrm>
-            <a:off x="609441" y="1447800"/>
-            <a:ext cx="5486559" cy="3306028"/>
-          </a:xfrm>
-          <a:prstGeom prst="rect">
-            <a:avLst/>
-          </a:prstGeom>
-          <a:noFill/>
-          <a:ln w="28575">
-            <a:solidFill>
-              <a:srgbClr val="E0700D"/>
-            </a:solidFill>
-          </a:ln>
-        </p:spPr>
-        <p:style>
-          <a:lnRef idx="2">
-            <a:schemeClr val="accent1">
-              <a:shade val="15000"/>
-            </a:schemeClr>
-          </a:lnRef>
-          <a:fillRef idx="1">
-            <a:schemeClr val="accent1"/>
-          </a:fillRef>
-          <a:effectRef idx="0">
-            <a:schemeClr val="accent1"/>
-          </a:effectRef>
-          <a:fontRef idx="minor">
-            <a:schemeClr val="lt1"/>
-          </a:fontRef>
-        </p:style>
-        <p:txBody>
-          <a:bodyPr rtlCol="0" anchor="ctr"/>
-          <a:lstStyle/>
-          <a:p>
-            <a:pPr algn="ctr"/>
-            <a:endParaRPr lang="en-US"/>
-          </a:p>
-        </p:txBody>
-      </p:sp>
-      <p:sp>
-        <p:nvSpPr>
-          <p:cNvPr id="6" name="Rectángulo 5">
-            <a:extLst>
-              <a:ext uri="{FF2B5EF4-FFF2-40B4-BE49-F238E27FC236}">
-                <a16:creationId xmlns:a16="http://schemas.microsoft.com/office/drawing/2014/main" id="{15ED9C7E-0684-E2B9-7FD6-9BCF17CC000A}"/>
-              </a:ext>
-            </a:extLst>
-          </p:cNvPr>
-          <p:cNvSpPr/>
-          <p:nvPr/>
-        </p:nvSpPr>
-        <p:spPr>
-          <a:xfrm>
-            <a:off x="6321424" y="1447800"/>
-            <a:ext cx="5486559" cy="3306028"/>
-          </a:xfrm>
-          <a:prstGeom prst="rect">
-            <a:avLst/>
-          </a:prstGeom>
-          <a:noFill/>
-          <a:ln w="28575">
-            <a:solidFill>
-              <a:srgbClr val="E0700D"/>
-            </a:solidFill>
-          </a:ln>
-        </p:spPr>
-        <p:style>
-          <a:lnRef idx="2">
-            <a:schemeClr val="accent1">
-              <a:shade val="15000"/>
-            </a:schemeClr>
-          </a:lnRef>
-          <a:fillRef idx="1">
-            <a:schemeClr val="accent1"/>
-          </a:fillRef>
-          <a:effectRef idx="0">
-            <a:schemeClr val="accent1"/>
-          </a:effectRef>
-          <a:fontRef idx="minor">
-            <a:schemeClr val="lt1"/>
-          </a:fontRef>
-        </p:style>
-        <p:txBody>
-          <a:bodyPr rtlCol="0" anchor="ctr"/>
-          <a:lstStyle/>
-          <a:p>
-            <a:pPr algn="ctr"/>
-            <a:endParaRPr lang="en-US"/>
-          </a:p>
-        </p:txBody>
-      </p:sp>
-      <p:sp>
-        <p:nvSpPr>
-          <p:cNvPr id="7" name="CuadroTexto 6">
-            <a:extLst>
-              <a:ext uri="{FF2B5EF4-FFF2-40B4-BE49-F238E27FC236}">
-                <a16:creationId xmlns:a16="http://schemas.microsoft.com/office/drawing/2014/main" id="{5F16E403-DF61-C9A0-D57F-2E61BEFA8887}"/>
-              </a:ext>
-            </a:extLst>
-          </p:cNvPr>
-          <p:cNvSpPr txBox="1"/>
-          <p:nvPr/>
-        </p:nvSpPr>
-        <p:spPr>
-          <a:xfrm>
-            <a:off x="6331152" y="4342178"/>
-            <a:ext cx="2269787" cy="369332"/>
-          </a:xfrm>
-          <a:prstGeom prst="rect">
-            <a:avLst/>
-          </a:prstGeom>
-          <a:noFill/>
-        </p:spPr>
-        <p:txBody>
-          <a:bodyPr wrap="square">
-            <a:spAutoFit/>
-          </a:bodyPr>
-          <a:lstStyle/>
-          <a:p>
-            <a:r>
-              <a:rPr lang="en-US" dirty="0"/>
-              <a:t>slab = 150nm</a:t>
-            </a:r>
-            <a:endParaRPr lang="es-ES" dirty="0"/>
-          </a:p>
-        </p:txBody>
-      </p:sp>
-      <mc:AlternateContent xmlns:mc="http://schemas.openxmlformats.org/markup-compatibility/2006" xmlns:a14="http://schemas.microsoft.com/office/drawing/2010/main">
-        <mc:Choice Requires="a14">
-          <p:sp>
-            <p:nvSpPr>
-              <p:cNvPr id="8" name="CuadroTexto 7">
-                <a:extLst>
-                  <a:ext uri="{FF2B5EF4-FFF2-40B4-BE49-F238E27FC236}">
-                    <a16:creationId xmlns:a16="http://schemas.microsoft.com/office/drawing/2014/main" id="{B08C2240-8810-4E0A-7DCF-E62A8271EA2E}"/>
-                  </a:ext>
-                </a:extLst>
-              </p:cNvPr>
-              <p:cNvSpPr txBox="1"/>
-              <p:nvPr/>
-            </p:nvSpPr>
-            <p:spPr>
-              <a:xfrm>
-                <a:off x="1079403" y="2709096"/>
-                <a:ext cx="4546634" cy="923330"/>
-              </a:xfrm>
-              <a:prstGeom prst="rect">
-                <a:avLst/>
-              </a:prstGeom>
-              <a:noFill/>
-            </p:spPr>
-            <p:txBody>
-              <a:bodyPr wrap="square" rtlCol="0">
-                <a:spAutoFit/>
-              </a:bodyPr>
-              <a:lstStyle/>
-              <a:p>
-                <a:pPr algn="ctr"/>
-                <a:r>
-                  <a:rPr lang="en-US" b="1" dirty="0"/>
-                  <a:t>deep</a:t>
-                </a:r>
-                <a:r>
-                  <a:rPr lang="en-US" dirty="0"/>
-                  <a:t> waveguide</a:t>
-                </a:r>
-              </a:p>
-              <a:p>
-                <a:pPr algn="ctr"/>
-                <a:endParaRPr lang="en-US" dirty="0"/>
-              </a:p>
-              <a:p>
-                <a:pPr algn="ctr"/>
-                <a:r>
-                  <a:rPr lang="en-US" dirty="0"/>
-                  <a:t>Paste </a:t>
-                </a:r>
-                <a14:m>
-                  <m:oMath xmlns:m="http://schemas.openxmlformats.org/officeDocument/2006/math">
-                    <m:sSub>
-                      <m:sSubPr>
-                        <m:ctrlPr>
-                          <a:rPr lang="es-ES" sz="1800" b="0" i="1" smtClean="0">
-                            <a:latin typeface="Cambria Math" panose="02040503050406030204" pitchFamily="18" charset="0"/>
-                          </a:rPr>
-                        </m:ctrlPr>
-                      </m:sSubPr>
-                      <m:e>
-                        <m:r>
-                          <a:rPr lang="es-ES" sz="1800" b="0" i="1" smtClean="0">
-                            <a:latin typeface="Cambria Math" panose="02040503050406030204" pitchFamily="18" charset="0"/>
-                          </a:rPr>
-                          <m:t>𝐿</m:t>
-                        </m:r>
-                      </m:e>
-                      <m:sub>
-                        <m:r>
-                          <a:rPr lang="es-ES" sz="1800" b="0" i="1" smtClean="0">
-                            <a:latin typeface="Cambria Math" panose="02040503050406030204" pitchFamily="18" charset="0"/>
-                          </a:rPr>
-                          <m:t>𝜋</m:t>
-                        </m:r>
-                      </m:sub>
-                    </m:sSub>
-                  </m:oMath>
-                </a14:m>
-                <a:r>
-                  <a:rPr lang="en-US" dirty="0"/>
-                  <a:t> vs </a:t>
-                </a:r>
-                <a:r>
-                  <a:rPr lang="en-US" dirty="0" err="1"/>
-                  <a:t>wvl</a:t>
-                </a:r>
-                <a:r>
-                  <a:rPr lang="en-US" dirty="0"/>
-                  <a:t> for TE and TM plot here</a:t>
-                </a:r>
-              </a:p>
-            </p:txBody>
-          </p:sp>
-        </mc:Choice>
-        <mc:Fallback xmlns="">
-          <p:sp>
-            <p:nvSpPr>
-              <p:cNvPr id="8" name="CuadroTexto 7">
-                <a:extLst>
-                  <a:ext uri="{FF2B5EF4-FFF2-40B4-BE49-F238E27FC236}">
-                    <a16:creationId xmlns:a16="http://schemas.microsoft.com/office/drawing/2014/main" id="{B08C2240-8810-4E0A-7DCF-E62A8271EA2E}"/>
-                  </a:ext>
-                </a:extLst>
-              </p:cNvPr>
-              <p:cNvSpPr txBox="1">
-                <a:spLocks noRot="1" noChangeAspect="1" noMove="1" noResize="1" noEditPoints="1" noAdjustHandles="1" noChangeArrowheads="1" noChangeShapeType="1" noTextEdit="1"/>
-              </p:cNvSpPr>
-              <p:nvPr/>
-            </p:nvSpPr>
-            <p:spPr>
-              <a:xfrm>
-                <a:off x="1079403" y="2709096"/>
-                <a:ext cx="4546634" cy="923330"/>
-              </a:xfrm>
-              <a:prstGeom prst="rect">
-                <a:avLst/>
-              </a:prstGeom>
-              <a:blipFill>
-                <a:blip r:embed="rId5"/>
-                <a:stretch>
-                  <a:fillRect t="-3289" b="-9211"/>
-                </a:stretch>
-              </a:blipFill>
-            </p:spPr>
-            <p:txBody>
-              <a:bodyPr/>
-              <a:lstStyle/>
-              <a:p>
-                <a:r>
-                  <a:rPr lang="es-ES">
-                    <a:noFill/>
-                  </a:rPr>
-                  <a:t> </a:t>
-                </a:r>
-              </a:p>
-            </p:txBody>
-          </p:sp>
-        </mc:Fallback>
-      </mc:AlternateContent>
-      <mc:AlternateContent xmlns:mc="http://schemas.openxmlformats.org/markup-compatibility/2006" xmlns:a14="http://schemas.microsoft.com/office/drawing/2010/main">
-        <mc:Choice Requires="a14">
-          <p:sp>
-            <p:nvSpPr>
-              <p:cNvPr id="9" name="CuadroTexto 8">
-                <a:extLst>
-                  <a:ext uri="{FF2B5EF4-FFF2-40B4-BE49-F238E27FC236}">
-                    <a16:creationId xmlns:a16="http://schemas.microsoft.com/office/drawing/2014/main" id="{BBDDC809-0F06-CBE2-4D1A-3A2FA36C33A8}"/>
-                  </a:ext>
-                </a:extLst>
-              </p:cNvPr>
-              <p:cNvSpPr txBox="1"/>
-              <p:nvPr/>
-            </p:nvSpPr>
-            <p:spPr>
-              <a:xfrm>
-                <a:off x="6883366" y="2709096"/>
-                <a:ext cx="4546634" cy="923330"/>
-              </a:xfrm>
-              <a:prstGeom prst="rect">
-                <a:avLst/>
-              </a:prstGeom>
-              <a:noFill/>
-            </p:spPr>
-            <p:txBody>
-              <a:bodyPr wrap="square" rtlCol="0">
-                <a:spAutoFit/>
-              </a:bodyPr>
-              <a:lstStyle/>
-              <a:p>
-                <a:pPr algn="ctr"/>
-                <a:r>
-                  <a:rPr lang="en-US" b="1" dirty="0"/>
-                  <a:t>shallow</a:t>
-                </a:r>
-                <a:r>
-                  <a:rPr lang="en-US" dirty="0"/>
-                  <a:t> waveguide</a:t>
-                </a:r>
-              </a:p>
-              <a:p>
-                <a:pPr algn="ctr"/>
-                <a:endParaRPr lang="en-US" dirty="0"/>
-              </a:p>
-              <a:p>
-                <a:pPr algn="ctr"/>
-                <a:r>
-                  <a:rPr lang="en-US" dirty="0"/>
-                  <a:t>Paste </a:t>
-                </a:r>
-                <a14:m>
-                  <m:oMath xmlns:m="http://schemas.openxmlformats.org/officeDocument/2006/math">
-                    <m:sSub>
-                      <m:sSubPr>
-                        <m:ctrlPr>
-                          <a:rPr lang="es-ES" sz="1800" b="0" i="1" smtClean="0">
-                            <a:latin typeface="Cambria Math" panose="02040503050406030204" pitchFamily="18" charset="0"/>
-                          </a:rPr>
-                        </m:ctrlPr>
-                      </m:sSubPr>
-                      <m:e>
-                        <m:r>
-                          <a:rPr lang="es-ES" sz="1800" b="0" i="1" smtClean="0">
-                            <a:latin typeface="Cambria Math" panose="02040503050406030204" pitchFamily="18" charset="0"/>
-                          </a:rPr>
-                          <m:t>𝐿</m:t>
-                        </m:r>
-                      </m:e>
-                      <m:sub>
-                        <m:r>
-                          <a:rPr lang="es-ES" sz="1800" b="0" i="1" smtClean="0">
-                            <a:latin typeface="Cambria Math" panose="02040503050406030204" pitchFamily="18" charset="0"/>
-                          </a:rPr>
-                          <m:t>𝜋</m:t>
-                        </m:r>
-                      </m:sub>
-                    </m:sSub>
-                  </m:oMath>
-                </a14:m>
-                <a:r>
-                  <a:rPr lang="en-US" dirty="0"/>
-                  <a:t> vs </a:t>
-                </a:r>
-                <a:r>
-                  <a:rPr lang="en-US" dirty="0" err="1"/>
-                  <a:t>wvl</a:t>
-                </a:r>
-                <a:r>
-                  <a:rPr lang="en-US" dirty="0"/>
-                  <a:t> for TE and TM plot here</a:t>
-                </a:r>
-              </a:p>
-            </p:txBody>
-          </p:sp>
-        </mc:Choice>
-        <mc:Fallback xmlns="">
-          <p:sp>
-            <p:nvSpPr>
-              <p:cNvPr id="9" name="CuadroTexto 8">
-                <a:extLst>
-                  <a:ext uri="{FF2B5EF4-FFF2-40B4-BE49-F238E27FC236}">
-                    <a16:creationId xmlns:a16="http://schemas.microsoft.com/office/drawing/2014/main" id="{BBDDC809-0F06-CBE2-4D1A-3A2FA36C33A8}"/>
-                  </a:ext>
-                </a:extLst>
-              </p:cNvPr>
-              <p:cNvSpPr txBox="1">
-                <a:spLocks noRot="1" noChangeAspect="1" noMove="1" noResize="1" noEditPoints="1" noAdjustHandles="1" noChangeArrowheads="1" noChangeShapeType="1" noTextEdit="1"/>
-              </p:cNvSpPr>
-              <p:nvPr/>
-            </p:nvSpPr>
-            <p:spPr>
-              <a:xfrm>
-                <a:off x="6883366" y="2709096"/>
-                <a:ext cx="4546634" cy="923330"/>
-              </a:xfrm>
-              <a:prstGeom prst="rect">
-                <a:avLst/>
-              </a:prstGeom>
-              <a:blipFill>
-                <a:blip r:embed="rId6"/>
-                <a:stretch>
-                  <a:fillRect t="-3289" b="-9211"/>
-                </a:stretch>
-              </a:blipFill>
-            </p:spPr>
-            <p:txBody>
-              <a:bodyPr/>
-              <a:lstStyle/>
-              <a:p>
-                <a:r>
-                  <a:rPr lang="es-ES">
-                    <a:noFill/>
-                  </a:rPr>
-                  <a:t> </a:t>
-                </a:r>
-              </a:p>
-            </p:txBody>
-          </p:sp>
-        </mc:Fallback>
-      </mc:AlternateContent>
-    </p:spTree>
-    <p:extLst>
-      <p:ext uri="{BB962C8B-B14F-4D97-AF65-F5344CB8AC3E}">
-        <p14:creationId xmlns:p14="http://schemas.microsoft.com/office/powerpoint/2010/main" val="813558068"/>
-      </p:ext>
-    </p:extLst>
-  </p:cSld>
-  <p:clrMapOvr>
-    <a:masterClrMapping/>
-  </p:clrMapOvr>
-</p:sld>
-</file>
-
-<file path=ppt/slides/slide16.xml><?xml version="1.0" encoding="utf-8"?>
-<p:sld xmlns:a="http://schemas.openxmlformats.org/drawingml/2006/main" xmlns:r="http://schemas.openxmlformats.org/officeDocument/2006/relationships" xmlns:p="http://schemas.openxmlformats.org/presentationml/2006/main">
-  <p:cSld>
-    <p:spTree>
-      <p:nvGrpSpPr>
-        <p:cNvPr id="1" name="">
-          <a:extLst>
-            <a:ext uri="{FF2B5EF4-FFF2-40B4-BE49-F238E27FC236}">
-              <a16:creationId xmlns:a16="http://schemas.microsoft.com/office/drawing/2014/main" id="{0D90AC3D-36B7-D786-3825-B4DD6EADD689}"/>
-            </a:ext>
-          </a:extLst>
-        </p:cNvPr>
-        <p:cNvGrpSpPr/>
-        <p:nvPr/>
-      </p:nvGrpSpPr>
-      <p:grpSpPr>
-        <a:xfrm>
-          <a:off x="0" y="0"/>
-          <a:ext cx="0" cy="0"/>
-          <a:chOff x="0" y="0"/>
-          <a:chExt cx="0" cy="0"/>
-        </a:xfrm>
-      </p:grpSpPr>
-      <p:sp>
-        <p:nvSpPr>
-          <p:cNvPr id="16" name="object 16">
-            <a:extLst>
-              <a:ext uri="{FF2B5EF4-FFF2-40B4-BE49-F238E27FC236}">
-                <a16:creationId xmlns:a16="http://schemas.microsoft.com/office/drawing/2014/main" id="{6AA2E789-F7AE-F068-274C-E0F13A22DBCA}"/>
-              </a:ext>
-            </a:extLst>
-          </p:cNvPr>
-          <p:cNvSpPr txBox="1">
-            <a:spLocks noGrp="1"/>
-          </p:cNvSpPr>
-          <p:nvPr>
-            <p:ph type="title"/>
-          </p:nvPr>
-        </p:nvSpPr>
-        <p:spPr>
-          <a:xfrm>
-            <a:off x="685800" y="408883"/>
-            <a:ext cx="10994410" cy="705321"/>
-          </a:xfrm>
-          <a:prstGeom prst="rect">
-            <a:avLst/>
-          </a:prstGeom>
-        </p:spPr>
-        <p:txBody>
-          <a:bodyPr vert="horz" wrap="square" lIns="0" tIns="12700" rIns="0" bIns="0" rtlCol="0">
-            <a:spAutoFit/>
-          </a:bodyPr>
-          <a:lstStyle/>
-          <a:p>
-            <a:pPr marL="12700">
-              <a:lnSpc>
-                <a:spcPct val="100000"/>
-              </a:lnSpc>
-              <a:spcBef>
-                <a:spcPts val="100"/>
-              </a:spcBef>
-            </a:pPr>
-            <a:r>
-              <a:rPr lang="en-US" sz="2500" dirty="0"/>
-              <a:t>Extra #3 – MMI coupler wavelength dependence</a:t>
-            </a:r>
-            <a:br>
-              <a:rPr lang="en-US" sz="2500" spc="-5" dirty="0">
-                <a:latin typeface="+mj-lt"/>
-                <a:cs typeface="Lucida Sans"/>
-              </a:rPr>
-            </a:br>
-            <a:r>
-              <a:rPr lang="en-US" b="0" dirty="0"/>
-              <a:t>Wavelengths from 1.5 to 1.7 µm, </a:t>
-            </a:r>
-            <a:r>
-              <a:rPr lang="en-US" b="0" dirty="0" err="1"/>
-              <a:t>wMMI</a:t>
-            </a:r>
-            <a:r>
-              <a:rPr lang="en-US" b="0" dirty="0"/>
-              <a:t> = 6.6 µm</a:t>
-            </a:r>
-            <a:endParaRPr lang="en-US" sz="2500" b="0" dirty="0">
-              <a:latin typeface="+mj-lt"/>
-              <a:cs typeface="Lucida Sans"/>
-            </a:endParaRPr>
-          </a:p>
-        </p:txBody>
-      </p:sp>
-      <p:pic>
-        <p:nvPicPr>
-          <p:cNvPr id="83" name="Gráfico 82">
-            <a:extLst>
-              <a:ext uri="{FF2B5EF4-FFF2-40B4-BE49-F238E27FC236}">
-                <a16:creationId xmlns:a16="http://schemas.microsoft.com/office/drawing/2014/main" id="{3AEAD01B-7604-8009-5694-A556497AEF25}"/>
-              </a:ext>
-            </a:extLst>
-          </p:cNvPr>
-          <p:cNvPicPr>
-            <a:picLocks noChangeAspect="1"/>
-          </p:cNvPicPr>
-          <p:nvPr/>
-        </p:nvPicPr>
-        <p:blipFill>
-          <a:blip r:embed="rId3">
-            <a:extLst>
-              <a:ext uri="{96DAC541-7B7A-43D3-8B79-37D633B846F1}">
-                <asvg:svgBlip xmlns:asvg="http://schemas.microsoft.com/office/drawing/2016/SVG/main" r:embed="rId4"/>
-              </a:ext>
-            </a:extLst>
-          </a:blip>
-          <a:stretch>
-            <a:fillRect/>
-          </a:stretch>
-        </p:blipFill>
-        <p:spPr>
-          <a:xfrm>
-            <a:off x="5045006" y="6356057"/>
-            <a:ext cx="6409575" cy="363174"/>
-          </a:xfrm>
-          <a:prstGeom prst="rect">
-            <a:avLst/>
-          </a:prstGeom>
-        </p:spPr>
-      </p:pic>
-      <p:sp>
-        <p:nvSpPr>
-          <p:cNvPr id="84" name="Marcador de número de diapositiva 83">
-            <a:extLst>
-              <a:ext uri="{FF2B5EF4-FFF2-40B4-BE49-F238E27FC236}">
-                <a16:creationId xmlns:a16="http://schemas.microsoft.com/office/drawing/2014/main" id="{696E3846-1BD2-4F23-48AA-C7AF2A1EE6EB}"/>
-              </a:ext>
-            </a:extLst>
-          </p:cNvPr>
-          <p:cNvSpPr>
-            <a:spLocks noGrp="1"/>
-          </p:cNvSpPr>
-          <p:nvPr>
-            <p:ph type="sldNum" sz="quarter" idx="7"/>
-          </p:nvPr>
-        </p:nvSpPr>
-        <p:spPr/>
-        <p:txBody>
-          <a:bodyPr/>
-          <a:lstStyle/>
-          <a:p>
-            <a:fld id="{B6F15528-21DE-4FAA-801E-634DDDAF4B2B}" type="slidenum">
-              <a:rPr lang="es-ES" smtClean="0"/>
-              <a:t>16</a:t>
-            </a:fld>
-            <a:endParaRPr lang="es-ES"/>
-          </a:p>
-        </p:txBody>
-      </p:sp>
-      <p:sp>
-        <p:nvSpPr>
-          <p:cNvPr id="3" name="Marcador de pie de página 2">
-            <a:extLst>
-              <a:ext uri="{FF2B5EF4-FFF2-40B4-BE49-F238E27FC236}">
-                <a16:creationId xmlns:a16="http://schemas.microsoft.com/office/drawing/2014/main" id="{E32C0E2B-75B6-4768-A4C7-F165A264DA0B}"/>
-              </a:ext>
-            </a:extLst>
-          </p:cNvPr>
-          <p:cNvSpPr>
-            <a:spLocks noGrp="1"/>
-          </p:cNvSpPr>
-          <p:nvPr>
-            <p:ph type="ftr" sz="quarter" idx="5"/>
-          </p:nvPr>
-        </p:nvSpPr>
-        <p:spPr/>
-        <p:txBody>
-          <a:bodyPr/>
-          <a:lstStyle/>
-          <a:p>
-            <a:pPr marL="12700">
-              <a:spcBef>
-                <a:spcPts val="15"/>
-              </a:spcBef>
-            </a:pPr>
-            <a:r>
-              <a:rPr lang="es-ES" spc="-5"/>
-              <a:t>LAB 2.0. COUPLERS</a:t>
-            </a:r>
-            <a:endParaRPr lang="es-ES" spc="-5" dirty="0"/>
-          </a:p>
-        </p:txBody>
-      </p:sp>
-      <p:sp>
-        <p:nvSpPr>
-          <p:cNvPr id="2" name="CuadroTexto 1">
-            <a:extLst>
-              <a:ext uri="{FF2B5EF4-FFF2-40B4-BE49-F238E27FC236}">
-                <a16:creationId xmlns:a16="http://schemas.microsoft.com/office/drawing/2014/main" id="{82A62DD6-5488-72A1-9926-0CAEE59089A9}"/>
-              </a:ext>
-            </a:extLst>
-          </p:cNvPr>
-          <p:cNvSpPr txBox="1"/>
-          <p:nvPr/>
-        </p:nvSpPr>
-        <p:spPr>
-          <a:xfrm>
-            <a:off x="609441" y="4860334"/>
-            <a:ext cx="11199971" cy="1200329"/>
-          </a:xfrm>
-          <a:prstGeom prst="rect">
-            <a:avLst/>
-          </a:prstGeom>
-          <a:solidFill>
-            <a:schemeClr val="bg1">
-              <a:lumMod val="95000"/>
-            </a:schemeClr>
-          </a:solidFill>
-          <a:ln w="28575">
-            <a:solidFill>
-              <a:srgbClr val="E0700D"/>
-            </a:solidFill>
-          </a:ln>
-        </p:spPr>
-        <p:txBody>
-          <a:bodyPr wrap="square" rtlCol="0">
-            <a:spAutoFit/>
-          </a:bodyPr>
-          <a:lstStyle/>
-          <a:p>
-            <a:pPr algn="just"/>
-            <a:r>
-              <a:rPr lang="en-US" sz="1200" dirty="0">
-                <a:latin typeface="Arial" panose="020B0604020202020204" pitchFamily="34" charset="0"/>
-                <a:cs typeface="Arial" panose="020B0604020202020204" pitchFamily="34" charset="0"/>
-              </a:rPr>
-              <a:t>Comment results (Important. Compare with Directional Coupler)</a:t>
-            </a:r>
-          </a:p>
-          <a:p>
-            <a:pPr algn="just"/>
-            <a:endParaRPr lang="en-US" sz="1200" dirty="0">
-              <a:latin typeface="Arial" panose="020B0604020202020204" pitchFamily="34" charset="0"/>
-              <a:cs typeface="Arial" panose="020B0604020202020204" pitchFamily="34" charset="0"/>
-            </a:endParaRPr>
-          </a:p>
-          <a:p>
-            <a:pPr algn="just"/>
-            <a:endParaRPr lang="en-US" sz="1200" dirty="0">
-              <a:latin typeface="Arial" panose="020B0604020202020204" pitchFamily="34" charset="0"/>
-              <a:cs typeface="Arial" panose="020B0604020202020204" pitchFamily="34" charset="0"/>
-            </a:endParaRPr>
-          </a:p>
-          <a:p>
-            <a:pPr algn="just"/>
-            <a:endParaRPr lang="en-US" sz="1200" dirty="0">
-              <a:latin typeface="Arial" panose="020B0604020202020204" pitchFamily="34" charset="0"/>
-              <a:cs typeface="Arial" panose="020B0604020202020204" pitchFamily="34" charset="0"/>
-            </a:endParaRPr>
-          </a:p>
-          <a:p>
-            <a:pPr algn="just"/>
-            <a:endParaRPr lang="en-US" sz="1200" dirty="0">
-              <a:latin typeface="Arial" panose="020B0604020202020204" pitchFamily="34" charset="0"/>
-              <a:cs typeface="Arial" panose="020B0604020202020204" pitchFamily="34" charset="0"/>
-            </a:endParaRPr>
-          </a:p>
-          <a:p>
-            <a:pPr algn="just"/>
-            <a:endParaRPr lang="en-US" sz="1200" dirty="0">
-              <a:latin typeface="Arial" panose="020B0604020202020204" pitchFamily="34" charset="0"/>
-              <a:cs typeface="Arial" panose="020B0604020202020204" pitchFamily="34" charset="0"/>
-            </a:endParaRPr>
-          </a:p>
-        </p:txBody>
-      </p:sp>
-      <p:sp>
-        <p:nvSpPr>
-          <p:cNvPr id="4" name="Rectángulo 3">
-            <a:extLst>
-              <a:ext uri="{FF2B5EF4-FFF2-40B4-BE49-F238E27FC236}">
-                <a16:creationId xmlns:a16="http://schemas.microsoft.com/office/drawing/2014/main" id="{796EDE51-D41E-C23B-F402-2F7357DE8714}"/>
-              </a:ext>
-            </a:extLst>
-          </p:cNvPr>
-          <p:cNvSpPr/>
-          <p:nvPr/>
-        </p:nvSpPr>
-        <p:spPr>
-          <a:xfrm>
-            <a:off x="609441" y="1447800"/>
-            <a:ext cx="5486559" cy="3306028"/>
-          </a:xfrm>
-          <a:prstGeom prst="rect">
-            <a:avLst/>
-          </a:prstGeom>
-          <a:noFill/>
-          <a:ln w="28575">
-            <a:solidFill>
-              <a:srgbClr val="E0700D"/>
-            </a:solidFill>
-          </a:ln>
-        </p:spPr>
-        <p:style>
-          <a:lnRef idx="2">
-            <a:schemeClr val="accent1">
-              <a:shade val="15000"/>
-            </a:schemeClr>
-          </a:lnRef>
-          <a:fillRef idx="1">
-            <a:schemeClr val="accent1"/>
-          </a:fillRef>
-          <a:effectRef idx="0">
-            <a:schemeClr val="accent1"/>
-          </a:effectRef>
-          <a:fontRef idx="minor">
-            <a:schemeClr val="lt1"/>
-          </a:fontRef>
-        </p:style>
-        <p:txBody>
-          <a:bodyPr rtlCol="0" anchor="ctr"/>
-          <a:lstStyle/>
-          <a:p>
-            <a:pPr algn="ctr"/>
-            <a:endParaRPr lang="en-US"/>
-          </a:p>
-        </p:txBody>
-      </p:sp>
-      <p:sp>
-        <p:nvSpPr>
-          <p:cNvPr id="5" name="Rectángulo 4">
-            <a:extLst>
-              <a:ext uri="{FF2B5EF4-FFF2-40B4-BE49-F238E27FC236}">
-                <a16:creationId xmlns:a16="http://schemas.microsoft.com/office/drawing/2014/main" id="{5A3233C9-FE6F-52D8-4D87-224222BDA8E1}"/>
-              </a:ext>
-            </a:extLst>
-          </p:cNvPr>
-          <p:cNvSpPr/>
-          <p:nvPr/>
-        </p:nvSpPr>
-        <p:spPr>
-          <a:xfrm>
-            <a:off x="6321424" y="1447800"/>
-            <a:ext cx="5486559" cy="3306028"/>
-          </a:xfrm>
-          <a:prstGeom prst="rect">
-            <a:avLst/>
-          </a:prstGeom>
-          <a:noFill/>
-          <a:ln w="28575">
-            <a:solidFill>
-              <a:srgbClr val="E0700D"/>
-            </a:solidFill>
-          </a:ln>
-        </p:spPr>
-        <p:style>
-          <a:lnRef idx="2">
-            <a:schemeClr val="accent1">
-              <a:shade val="15000"/>
-            </a:schemeClr>
-          </a:lnRef>
-          <a:fillRef idx="1">
-            <a:schemeClr val="accent1"/>
-          </a:fillRef>
-          <a:effectRef idx="0">
-            <a:schemeClr val="accent1"/>
-          </a:effectRef>
-          <a:fontRef idx="minor">
-            <a:schemeClr val="lt1"/>
-          </a:fontRef>
-        </p:style>
-        <p:txBody>
-          <a:bodyPr rtlCol="0" anchor="ctr"/>
-          <a:lstStyle/>
-          <a:p>
-            <a:pPr algn="ctr"/>
-            <a:endParaRPr lang="en-US"/>
-          </a:p>
-        </p:txBody>
-      </p:sp>
-      <p:sp>
-        <p:nvSpPr>
-          <p:cNvPr id="6" name="CuadroTexto 5">
-            <a:extLst>
-              <a:ext uri="{FF2B5EF4-FFF2-40B4-BE49-F238E27FC236}">
-                <a16:creationId xmlns:a16="http://schemas.microsoft.com/office/drawing/2014/main" id="{0C016548-01A2-6E58-B80D-148384B98EB3}"/>
-              </a:ext>
-            </a:extLst>
-          </p:cNvPr>
-          <p:cNvSpPr txBox="1"/>
-          <p:nvPr/>
-        </p:nvSpPr>
-        <p:spPr>
-          <a:xfrm>
-            <a:off x="6331152" y="4342178"/>
-            <a:ext cx="2269787" cy="369332"/>
-          </a:xfrm>
-          <a:prstGeom prst="rect">
-            <a:avLst/>
-          </a:prstGeom>
-          <a:noFill/>
-        </p:spPr>
-        <p:txBody>
-          <a:bodyPr wrap="square">
-            <a:spAutoFit/>
-          </a:bodyPr>
-          <a:lstStyle/>
-          <a:p>
-            <a:r>
-              <a:rPr lang="en-US" dirty="0"/>
-              <a:t>slab = 150nm</a:t>
-            </a:r>
-            <a:endParaRPr lang="es-ES" dirty="0"/>
-          </a:p>
-        </p:txBody>
-      </p:sp>
-      <mc:AlternateContent xmlns:mc="http://schemas.openxmlformats.org/markup-compatibility/2006" xmlns:a14="http://schemas.microsoft.com/office/drawing/2010/main">
-        <mc:Choice Requires="a14">
-          <p:sp>
-            <p:nvSpPr>
-              <p:cNvPr id="9" name="CuadroTexto 8">
-                <a:extLst>
-                  <a:ext uri="{FF2B5EF4-FFF2-40B4-BE49-F238E27FC236}">
-                    <a16:creationId xmlns:a16="http://schemas.microsoft.com/office/drawing/2014/main" id="{075D03BE-0D6A-89E5-3C68-D7BD97B4676E}"/>
-                  </a:ext>
-                </a:extLst>
-              </p:cNvPr>
-              <p:cNvSpPr txBox="1"/>
-              <p:nvPr/>
-            </p:nvSpPr>
-            <p:spPr>
-              <a:xfrm>
-                <a:off x="1079403" y="2709096"/>
-                <a:ext cx="4546634" cy="923330"/>
-              </a:xfrm>
-              <a:prstGeom prst="rect">
-                <a:avLst/>
-              </a:prstGeom>
-              <a:noFill/>
-            </p:spPr>
-            <p:txBody>
-              <a:bodyPr wrap="square" rtlCol="0">
-                <a:spAutoFit/>
-              </a:bodyPr>
-              <a:lstStyle/>
-              <a:p>
-                <a:pPr algn="ctr"/>
-                <a:r>
-                  <a:rPr lang="en-US" b="1" dirty="0"/>
-                  <a:t>deep</a:t>
-                </a:r>
-                <a:r>
-                  <a:rPr lang="en-US" dirty="0"/>
-                  <a:t> waveguide</a:t>
-                </a:r>
-              </a:p>
-              <a:p>
-                <a:pPr algn="ctr"/>
-                <a:endParaRPr lang="en-US" dirty="0"/>
-              </a:p>
-              <a:p>
-                <a:pPr algn="ctr"/>
-                <a:r>
-                  <a:rPr lang="en-US" dirty="0"/>
-                  <a:t>Paste </a:t>
-                </a:r>
-                <a14:m>
-                  <m:oMath xmlns:m="http://schemas.openxmlformats.org/officeDocument/2006/math">
-                    <m:sSub>
-                      <m:sSubPr>
-                        <m:ctrlPr>
-                          <a:rPr lang="es-ES" sz="1800" b="0" i="1" smtClean="0">
-                            <a:latin typeface="Cambria Math" panose="02040503050406030204" pitchFamily="18" charset="0"/>
-                          </a:rPr>
-                        </m:ctrlPr>
-                      </m:sSubPr>
-                      <m:e>
-                        <m:r>
-                          <a:rPr lang="es-ES" sz="1800" b="0" i="1" smtClean="0">
-                            <a:latin typeface="Cambria Math" panose="02040503050406030204" pitchFamily="18" charset="0"/>
-                          </a:rPr>
-                          <m:t>𝐿</m:t>
-                        </m:r>
-                      </m:e>
-                      <m:sub>
-                        <m:r>
-                          <a:rPr lang="es-ES" sz="1800" b="0" i="1" smtClean="0">
-                            <a:latin typeface="Cambria Math" panose="02040503050406030204" pitchFamily="18" charset="0"/>
-                          </a:rPr>
-                          <m:t>𝜋</m:t>
-                        </m:r>
-                      </m:sub>
-                    </m:sSub>
-                  </m:oMath>
-                </a14:m>
-                <a:r>
-                  <a:rPr lang="en-US" dirty="0"/>
-                  <a:t> vs </a:t>
-                </a:r>
-                <a:r>
-                  <a:rPr lang="en-US" dirty="0" err="1"/>
-                  <a:t>wvl</a:t>
-                </a:r>
-                <a:r>
-                  <a:rPr lang="en-US" dirty="0"/>
-                  <a:t> for TE and TM plot here</a:t>
-                </a:r>
-              </a:p>
-            </p:txBody>
-          </p:sp>
-        </mc:Choice>
-        <mc:Fallback xmlns="">
-          <p:sp>
-            <p:nvSpPr>
-              <p:cNvPr id="9" name="CuadroTexto 8">
-                <a:extLst>
-                  <a:ext uri="{FF2B5EF4-FFF2-40B4-BE49-F238E27FC236}">
-                    <a16:creationId xmlns:a16="http://schemas.microsoft.com/office/drawing/2014/main" id="{075D03BE-0D6A-89E5-3C68-D7BD97B4676E}"/>
-                  </a:ext>
-                </a:extLst>
-              </p:cNvPr>
-              <p:cNvSpPr txBox="1">
-                <a:spLocks noRot="1" noChangeAspect="1" noMove="1" noResize="1" noEditPoints="1" noAdjustHandles="1" noChangeArrowheads="1" noChangeShapeType="1" noTextEdit="1"/>
-              </p:cNvSpPr>
-              <p:nvPr/>
-            </p:nvSpPr>
-            <p:spPr>
-              <a:xfrm>
-                <a:off x="1079403" y="2709096"/>
-                <a:ext cx="4546634" cy="923330"/>
-              </a:xfrm>
-              <a:prstGeom prst="rect">
-                <a:avLst/>
-              </a:prstGeom>
-              <a:blipFill>
-                <a:blip r:embed="rId5"/>
-                <a:stretch>
-                  <a:fillRect t="-3289" b="-9211"/>
-                </a:stretch>
-              </a:blipFill>
-            </p:spPr>
-            <p:txBody>
-              <a:bodyPr/>
-              <a:lstStyle/>
-              <a:p>
-                <a:r>
-                  <a:rPr lang="es-ES">
-                    <a:noFill/>
-                  </a:rPr>
-                  <a:t> </a:t>
-                </a:r>
-              </a:p>
-            </p:txBody>
-          </p:sp>
-        </mc:Fallback>
-      </mc:AlternateContent>
-      <mc:AlternateContent xmlns:mc="http://schemas.openxmlformats.org/markup-compatibility/2006" xmlns:a14="http://schemas.microsoft.com/office/drawing/2010/main">
-        <mc:Choice Requires="a14">
-          <p:sp>
-            <p:nvSpPr>
-              <p:cNvPr id="10" name="CuadroTexto 9">
-                <a:extLst>
-                  <a:ext uri="{FF2B5EF4-FFF2-40B4-BE49-F238E27FC236}">
-                    <a16:creationId xmlns:a16="http://schemas.microsoft.com/office/drawing/2014/main" id="{AC01EDEE-71CC-C570-700B-076F03FCF7E1}"/>
-                  </a:ext>
-                </a:extLst>
-              </p:cNvPr>
-              <p:cNvSpPr txBox="1"/>
-              <p:nvPr/>
-            </p:nvSpPr>
-            <p:spPr>
-              <a:xfrm>
-                <a:off x="6883366" y="2709096"/>
-                <a:ext cx="4546634" cy="923330"/>
-              </a:xfrm>
-              <a:prstGeom prst="rect">
-                <a:avLst/>
-              </a:prstGeom>
-              <a:noFill/>
-            </p:spPr>
-            <p:txBody>
-              <a:bodyPr wrap="square" rtlCol="0">
-                <a:spAutoFit/>
-              </a:bodyPr>
-              <a:lstStyle/>
-              <a:p>
-                <a:pPr algn="ctr"/>
-                <a:r>
-                  <a:rPr lang="en-US" b="1" dirty="0"/>
-                  <a:t>shallow</a:t>
-                </a:r>
-                <a:r>
-                  <a:rPr lang="en-US" dirty="0"/>
-                  <a:t> waveguide</a:t>
-                </a:r>
-              </a:p>
-              <a:p>
-                <a:pPr algn="ctr"/>
-                <a:endParaRPr lang="en-US" dirty="0"/>
-              </a:p>
-              <a:p>
-                <a:pPr algn="ctr"/>
-                <a:r>
-                  <a:rPr lang="en-US" dirty="0"/>
-                  <a:t>Paste </a:t>
-                </a:r>
-                <a14:m>
-                  <m:oMath xmlns:m="http://schemas.openxmlformats.org/officeDocument/2006/math">
-                    <m:sSub>
-                      <m:sSubPr>
-                        <m:ctrlPr>
-                          <a:rPr lang="es-ES" sz="1800" b="0" i="1" smtClean="0">
-                            <a:latin typeface="Cambria Math" panose="02040503050406030204" pitchFamily="18" charset="0"/>
-                          </a:rPr>
-                        </m:ctrlPr>
-                      </m:sSubPr>
-                      <m:e>
-                        <m:r>
-                          <a:rPr lang="es-ES" sz="1800" b="0" i="1" smtClean="0">
-                            <a:latin typeface="Cambria Math" panose="02040503050406030204" pitchFamily="18" charset="0"/>
-                          </a:rPr>
-                          <m:t>𝐿</m:t>
-                        </m:r>
-                      </m:e>
-                      <m:sub>
-                        <m:r>
-                          <a:rPr lang="es-ES" sz="1800" b="0" i="1" smtClean="0">
-                            <a:latin typeface="Cambria Math" panose="02040503050406030204" pitchFamily="18" charset="0"/>
-                          </a:rPr>
-                          <m:t>𝜋</m:t>
-                        </m:r>
-                      </m:sub>
-                    </m:sSub>
-                  </m:oMath>
-                </a14:m>
-                <a:r>
-                  <a:rPr lang="en-US" dirty="0"/>
-                  <a:t> vs </a:t>
-                </a:r>
-                <a:r>
-                  <a:rPr lang="en-US" dirty="0" err="1"/>
-                  <a:t>wvl</a:t>
-                </a:r>
-                <a:r>
-                  <a:rPr lang="en-US" dirty="0"/>
-                  <a:t> for TE and TM plot here</a:t>
-                </a:r>
-              </a:p>
-            </p:txBody>
-          </p:sp>
-        </mc:Choice>
-        <mc:Fallback xmlns="">
-          <p:sp>
-            <p:nvSpPr>
-              <p:cNvPr id="10" name="CuadroTexto 9">
-                <a:extLst>
-                  <a:ext uri="{FF2B5EF4-FFF2-40B4-BE49-F238E27FC236}">
-                    <a16:creationId xmlns:a16="http://schemas.microsoft.com/office/drawing/2014/main" id="{AC01EDEE-71CC-C570-700B-076F03FCF7E1}"/>
-                  </a:ext>
-                </a:extLst>
-              </p:cNvPr>
-              <p:cNvSpPr txBox="1">
-                <a:spLocks noRot="1" noChangeAspect="1" noMove="1" noResize="1" noEditPoints="1" noAdjustHandles="1" noChangeArrowheads="1" noChangeShapeType="1" noTextEdit="1"/>
-              </p:cNvSpPr>
-              <p:nvPr/>
-            </p:nvSpPr>
-            <p:spPr>
-              <a:xfrm>
-                <a:off x="6883366" y="2709096"/>
-                <a:ext cx="4546634" cy="923330"/>
-              </a:xfrm>
-              <a:prstGeom prst="rect">
-                <a:avLst/>
-              </a:prstGeom>
-              <a:blipFill>
-                <a:blip r:embed="rId6"/>
-                <a:stretch>
-                  <a:fillRect t="-3289" b="-9211"/>
-                </a:stretch>
-              </a:blipFill>
-            </p:spPr>
-            <p:txBody>
-              <a:bodyPr/>
-              <a:lstStyle/>
-              <a:p>
-                <a:r>
-                  <a:rPr lang="es-ES">
-                    <a:noFill/>
-                  </a:rPr>
-                  <a:t> </a:t>
-                </a:r>
-              </a:p>
-            </p:txBody>
-          </p:sp>
-        </mc:Fallback>
-      </mc:AlternateContent>
-    </p:spTree>
-    <p:extLst>
-      <p:ext uri="{BB962C8B-B14F-4D97-AF65-F5344CB8AC3E}">
-        <p14:creationId xmlns:p14="http://schemas.microsoft.com/office/powerpoint/2010/main" val="955145640"/>
-      </p:ext>
-    </p:extLst>
-  </p:cSld>
-  <p:clrMapOvr>
-    <a:masterClrMapping/>
-  </p:clrMapOvr>
-</p:sld>
-</file>
-
-<file path=ppt/slides/slide17.xml><?xml version="1.0" encoding="utf-8"?>
-<p:sld xmlns:a="http://schemas.openxmlformats.org/drawingml/2006/main" xmlns:r="http://schemas.openxmlformats.org/officeDocument/2006/relationships" xmlns:p="http://schemas.openxmlformats.org/presentationml/2006/main">
-  <p:cSld>
-    <p:spTree>
-      <p:nvGrpSpPr>
-        <p:cNvPr id="1" name="">
-          <a:extLst>
-            <a:ext uri="{FF2B5EF4-FFF2-40B4-BE49-F238E27FC236}">
-              <a16:creationId xmlns:a16="http://schemas.microsoft.com/office/drawing/2014/main" id="{2D55C897-D580-E5C1-161C-F8E072695C0C}"/>
-            </a:ext>
-          </a:extLst>
-        </p:cNvPr>
-        <p:cNvGrpSpPr/>
-        <p:nvPr/>
-      </p:nvGrpSpPr>
-      <p:grpSpPr>
-        <a:xfrm>
-          <a:off x="0" y="0"/>
-          <a:ext cx="0" cy="0"/>
-          <a:chOff x="0" y="0"/>
-          <a:chExt cx="0" cy="0"/>
-        </a:xfrm>
-      </p:grpSpPr>
-      <p:sp>
-        <p:nvSpPr>
-          <p:cNvPr id="16" name="object 16">
-            <a:extLst>
-              <a:ext uri="{FF2B5EF4-FFF2-40B4-BE49-F238E27FC236}">
-                <a16:creationId xmlns:a16="http://schemas.microsoft.com/office/drawing/2014/main" id="{53FFBD12-4EFF-41C1-4765-2AD268B2BD94}"/>
-              </a:ext>
-            </a:extLst>
-          </p:cNvPr>
-          <p:cNvSpPr txBox="1">
-            <a:spLocks noGrp="1"/>
-          </p:cNvSpPr>
-          <p:nvPr>
-            <p:ph type="title"/>
-          </p:nvPr>
-        </p:nvSpPr>
-        <p:spPr>
-          <a:xfrm>
-            <a:off x="685800" y="408883"/>
-            <a:ext cx="10994410" cy="705321"/>
-          </a:xfrm>
-          <a:prstGeom prst="rect">
-            <a:avLst/>
-          </a:prstGeom>
-        </p:spPr>
-        <p:txBody>
-          <a:bodyPr vert="horz" wrap="square" lIns="0" tIns="12700" rIns="0" bIns="0" rtlCol="0">
-            <a:spAutoFit/>
-          </a:bodyPr>
-          <a:lstStyle/>
-          <a:p>
-            <a:pPr marL="12700">
-              <a:lnSpc>
-                <a:spcPct val="100000"/>
-              </a:lnSpc>
-              <a:spcBef>
-                <a:spcPts val="100"/>
-              </a:spcBef>
-            </a:pPr>
-            <a:r>
-              <a:rPr lang="en-US" sz="2500" dirty="0"/>
-              <a:t>Extra #4 – MMI coupler body width dependence</a:t>
-            </a:r>
-            <a:br>
-              <a:rPr lang="en-US" sz="2500" spc="-5" dirty="0">
-                <a:latin typeface="+mj-lt"/>
-                <a:cs typeface="Lucida Sans"/>
-              </a:rPr>
-            </a:br>
-            <a:r>
-              <a:rPr lang="en-US" b="0" dirty="0"/>
-              <a:t>Wavelength 1.55 µm, </a:t>
-            </a:r>
-            <a:r>
-              <a:rPr lang="en-US" b="0" dirty="0" err="1"/>
-              <a:t>wMMI</a:t>
-            </a:r>
-            <a:r>
-              <a:rPr lang="en-US" b="0" dirty="0"/>
-              <a:t> = 5-10 µm (steps 0.5 µm)</a:t>
-            </a:r>
-            <a:endParaRPr lang="en-US" sz="2500" b="0" dirty="0">
-              <a:latin typeface="+mj-lt"/>
-              <a:cs typeface="Lucida Sans"/>
-            </a:endParaRPr>
-          </a:p>
-        </p:txBody>
-      </p:sp>
-      <p:pic>
-        <p:nvPicPr>
-          <p:cNvPr id="83" name="Gráfico 82">
-            <a:extLst>
-              <a:ext uri="{FF2B5EF4-FFF2-40B4-BE49-F238E27FC236}">
-                <a16:creationId xmlns:a16="http://schemas.microsoft.com/office/drawing/2014/main" id="{C14AF521-052E-A1FA-D63D-CB0826C48D28}"/>
-              </a:ext>
-            </a:extLst>
-          </p:cNvPr>
-          <p:cNvPicPr>
-            <a:picLocks noChangeAspect="1"/>
-          </p:cNvPicPr>
-          <p:nvPr/>
-        </p:nvPicPr>
-        <p:blipFill>
-          <a:blip r:embed="rId3">
-            <a:extLst>
-              <a:ext uri="{96DAC541-7B7A-43D3-8B79-37D633B846F1}">
-                <asvg:svgBlip xmlns:asvg="http://schemas.microsoft.com/office/drawing/2016/SVG/main" r:embed="rId4"/>
-              </a:ext>
-            </a:extLst>
-          </a:blip>
-          <a:stretch>
-            <a:fillRect/>
-          </a:stretch>
-        </p:blipFill>
-        <p:spPr>
-          <a:xfrm>
-            <a:off x="5045006" y="6356057"/>
-            <a:ext cx="6409575" cy="363174"/>
-          </a:xfrm>
-          <a:prstGeom prst="rect">
-            <a:avLst/>
-          </a:prstGeom>
-        </p:spPr>
-      </p:pic>
-      <p:sp>
-        <p:nvSpPr>
-          <p:cNvPr id="84" name="Marcador de número de diapositiva 83">
-            <a:extLst>
-              <a:ext uri="{FF2B5EF4-FFF2-40B4-BE49-F238E27FC236}">
-                <a16:creationId xmlns:a16="http://schemas.microsoft.com/office/drawing/2014/main" id="{6C87B233-8A68-967F-55BC-3A828B5F39BA}"/>
-              </a:ext>
-            </a:extLst>
-          </p:cNvPr>
-          <p:cNvSpPr>
-            <a:spLocks noGrp="1"/>
-          </p:cNvSpPr>
-          <p:nvPr>
-            <p:ph type="sldNum" sz="quarter" idx="7"/>
-          </p:nvPr>
-        </p:nvSpPr>
-        <p:spPr/>
-        <p:txBody>
-          <a:bodyPr/>
-          <a:lstStyle/>
-          <a:p>
-            <a:fld id="{B6F15528-21DE-4FAA-801E-634DDDAF4B2B}" type="slidenum">
-              <a:rPr lang="es-ES" smtClean="0"/>
-              <a:t>17</a:t>
-            </a:fld>
-            <a:endParaRPr lang="es-ES"/>
-          </a:p>
-        </p:txBody>
-      </p:sp>
-      <p:sp>
-        <p:nvSpPr>
-          <p:cNvPr id="3" name="Marcador de pie de página 2">
-            <a:extLst>
-              <a:ext uri="{FF2B5EF4-FFF2-40B4-BE49-F238E27FC236}">
-                <a16:creationId xmlns:a16="http://schemas.microsoft.com/office/drawing/2014/main" id="{DB1B524E-0E15-1C98-31B0-C98BD07BFBE8}"/>
-              </a:ext>
-            </a:extLst>
-          </p:cNvPr>
-          <p:cNvSpPr>
-            <a:spLocks noGrp="1"/>
-          </p:cNvSpPr>
-          <p:nvPr>
-            <p:ph type="ftr" sz="quarter" idx="5"/>
-          </p:nvPr>
-        </p:nvSpPr>
-        <p:spPr/>
-        <p:txBody>
-          <a:bodyPr/>
-          <a:lstStyle/>
-          <a:p>
-            <a:pPr marL="12700">
-              <a:spcBef>
-                <a:spcPts val="15"/>
-              </a:spcBef>
-            </a:pPr>
-            <a:r>
-              <a:rPr lang="es-ES" spc="-5"/>
-              <a:t>LAB 2.0. COUPLERS</a:t>
-            </a:r>
-            <a:endParaRPr lang="es-ES" spc="-5" dirty="0"/>
-          </a:p>
-        </p:txBody>
-      </p:sp>
-      <p:sp>
-        <p:nvSpPr>
-          <p:cNvPr id="2" name="CuadroTexto 1">
-            <a:extLst>
-              <a:ext uri="{FF2B5EF4-FFF2-40B4-BE49-F238E27FC236}">
-                <a16:creationId xmlns:a16="http://schemas.microsoft.com/office/drawing/2014/main" id="{8D88CB07-C5F5-9BB7-9F41-E171F0F0E2B9}"/>
-              </a:ext>
-            </a:extLst>
-          </p:cNvPr>
-          <p:cNvSpPr txBox="1"/>
-          <p:nvPr/>
-        </p:nvSpPr>
-        <p:spPr>
-          <a:xfrm>
-            <a:off x="609441" y="4860334"/>
-            <a:ext cx="11199971" cy="1384995"/>
-          </a:xfrm>
-          <a:prstGeom prst="rect">
-            <a:avLst/>
-          </a:prstGeom>
-          <a:solidFill>
-            <a:schemeClr val="bg1">
-              <a:lumMod val="95000"/>
-            </a:schemeClr>
-          </a:solidFill>
-          <a:ln w="28575">
-            <a:solidFill>
-              <a:srgbClr val="E0700D"/>
-            </a:solidFill>
-          </a:ln>
-        </p:spPr>
-        <p:txBody>
-          <a:bodyPr wrap="square" rtlCol="0">
-            <a:spAutoFit/>
-          </a:bodyPr>
-          <a:lstStyle/>
-          <a:p>
-            <a:pPr algn="just"/>
-            <a:r>
-              <a:rPr lang="en-US" sz="1200" dirty="0">
-                <a:latin typeface="Arial" panose="020B0604020202020204" pitchFamily="34" charset="0"/>
-                <a:cs typeface="Arial" panose="020B0604020202020204" pitchFamily="34" charset="0"/>
-              </a:rPr>
-              <a:t>Polarization independent coupler: is there any point for which the MMI coupler can work identically for TE and TM? Answer yes / no and explain why?</a:t>
-            </a:r>
-          </a:p>
-          <a:p>
-            <a:pPr algn="just"/>
-            <a:endParaRPr lang="en-US" sz="1200" dirty="0">
-              <a:latin typeface="Arial" panose="020B0604020202020204" pitchFamily="34" charset="0"/>
-              <a:cs typeface="Arial" panose="020B0604020202020204" pitchFamily="34" charset="0"/>
-            </a:endParaRPr>
-          </a:p>
-          <a:p>
-            <a:pPr algn="just"/>
-            <a:endParaRPr lang="en-US" sz="1200" dirty="0">
-              <a:latin typeface="Arial" panose="020B0604020202020204" pitchFamily="34" charset="0"/>
-              <a:cs typeface="Arial" panose="020B0604020202020204" pitchFamily="34" charset="0"/>
-            </a:endParaRPr>
-          </a:p>
-          <a:p>
-            <a:pPr algn="just"/>
-            <a:endParaRPr lang="en-US" sz="1200" dirty="0">
-              <a:latin typeface="Arial" panose="020B0604020202020204" pitchFamily="34" charset="0"/>
-              <a:cs typeface="Arial" panose="020B0604020202020204" pitchFamily="34" charset="0"/>
-            </a:endParaRPr>
-          </a:p>
-          <a:p>
-            <a:pPr algn="just"/>
-            <a:endParaRPr lang="en-US" sz="1200" dirty="0">
-              <a:latin typeface="Arial" panose="020B0604020202020204" pitchFamily="34" charset="0"/>
-              <a:cs typeface="Arial" panose="020B0604020202020204" pitchFamily="34" charset="0"/>
-            </a:endParaRPr>
-          </a:p>
-          <a:p>
-            <a:pPr algn="just"/>
-            <a:endParaRPr lang="en-US" sz="1200" dirty="0">
-              <a:latin typeface="Arial" panose="020B0604020202020204" pitchFamily="34" charset="0"/>
-              <a:cs typeface="Arial" panose="020B0604020202020204" pitchFamily="34" charset="0"/>
-            </a:endParaRPr>
-          </a:p>
-          <a:p>
-            <a:pPr algn="just"/>
-            <a:endParaRPr lang="en-US" sz="1200" dirty="0">
-              <a:latin typeface="Arial" panose="020B0604020202020204" pitchFamily="34" charset="0"/>
-              <a:cs typeface="Arial" panose="020B0604020202020204" pitchFamily="34" charset="0"/>
-            </a:endParaRPr>
-          </a:p>
-        </p:txBody>
-      </p:sp>
-      <p:sp>
-        <p:nvSpPr>
-          <p:cNvPr id="4" name="Rectángulo 3">
-            <a:extLst>
-              <a:ext uri="{FF2B5EF4-FFF2-40B4-BE49-F238E27FC236}">
-                <a16:creationId xmlns:a16="http://schemas.microsoft.com/office/drawing/2014/main" id="{B58B1BB0-E248-0BA3-D1B3-93649227103E}"/>
-              </a:ext>
-            </a:extLst>
-          </p:cNvPr>
-          <p:cNvSpPr/>
-          <p:nvPr/>
-        </p:nvSpPr>
-        <p:spPr>
-          <a:xfrm>
-            <a:off x="609441" y="1447800"/>
-            <a:ext cx="5486559" cy="3306028"/>
-          </a:xfrm>
-          <a:prstGeom prst="rect">
-            <a:avLst/>
-          </a:prstGeom>
-          <a:noFill/>
-          <a:ln w="28575">
-            <a:solidFill>
-              <a:srgbClr val="E0700D"/>
-            </a:solidFill>
-          </a:ln>
-        </p:spPr>
-        <p:style>
-          <a:lnRef idx="2">
-            <a:schemeClr val="accent1">
-              <a:shade val="15000"/>
-            </a:schemeClr>
-          </a:lnRef>
-          <a:fillRef idx="1">
-            <a:schemeClr val="accent1"/>
-          </a:fillRef>
-          <a:effectRef idx="0">
-            <a:schemeClr val="accent1"/>
-          </a:effectRef>
-          <a:fontRef idx="minor">
-            <a:schemeClr val="lt1"/>
-          </a:fontRef>
-        </p:style>
-        <p:txBody>
-          <a:bodyPr rtlCol="0" anchor="ctr"/>
-          <a:lstStyle/>
-          <a:p>
-            <a:pPr algn="ctr"/>
-            <a:endParaRPr lang="en-US"/>
-          </a:p>
-        </p:txBody>
-      </p:sp>
-      <p:sp>
-        <p:nvSpPr>
-          <p:cNvPr id="5" name="Rectángulo 4">
-            <a:extLst>
-              <a:ext uri="{FF2B5EF4-FFF2-40B4-BE49-F238E27FC236}">
-                <a16:creationId xmlns:a16="http://schemas.microsoft.com/office/drawing/2014/main" id="{8E0E2533-B1CA-72C4-3859-1CBDD5887887}"/>
-              </a:ext>
-            </a:extLst>
-          </p:cNvPr>
-          <p:cNvSpPr/>
-          <p:nvPr/>
-        </p:nvSpPr>
-        <p:spPr>
-          <a:xfrm>
-            <a:off x="6321424" y="1447800"/>
-            <a:ext cx="5486559" cy="3306028"/>
-          </a:xfrm>
-          <a:prstGeom prst="rect">
-            <a:avLst/>
-          </a:prstGeom>
-          <a:noFill/>
-          <a:ln w="28575">
-            <a:solidFill>
-              <a:srgbClr val="E0700D"/>
-            </a:solidFill>
-          </a:ln>
-        </p:spPr>
-        <p:style>
-          <a:lnRef idx="2">
-            <a:schemeClr val="accent1">
-              <a:shade val="15000"/>
-            </a:schemeClr>
-          </a:lnRef>
-          <a:fillRef idx="1">
-            <a:schemeClr val="accent1"/>
-          </a:fillRef>
-          <a:effectRef idx="0">
-            <a:schemeClr val="accent1"/>
-          </a:effectRef>
-          <a:fontRef idx="minor">
-            <a:schemeClr val="lt1"/>
-          </a:fontRef>
-        </p:style>
-        <p:txBody>
-          <a:bodyPr rtlCol="0" anchor="ctr"/>
-          <a:lstStyle/>
-          <a:p>
-            <a:pPr algn="ctr"/>
-            <a:endParaRPr lang="en-US"/>
-          </a:p>
-        </p:txBody>
-      </p:sp>
-      <p:sp>
-        <p:nvSpPr>
-          <p:cNvPr id="6" name="CuadroTexto 5">
-            <a:extLst>
-              <a:ext uri="{FF2B5EF4-FFF2-40B4-BE49-F238E27FC236}">
-                <a16:creationId xmlns:a16="http://schemas.microsoft.com/office/drawing/2014/main" id="{154B5534-E510-6404-1E30-B73FDF73AD42}"/>
-              </a:ext>
-            </a:extLst>
-          </p:cNvPr>
-          <p:cNvSpPr txBox="1"/>
-          <p:nvPr/>
-        </p:nvSpPr>
-        <p:spPr>
-          <a:xfrm>
-            <a:off x="6331152" y="4342178"/>
-            <a:ext cx="2269787" cy="369332"/>
-          </a:xfrm>
-          <a:prstGeom prst="rect">
-            <a:avLst/>
-          </a:prstGeom>
-          <a:noFill/>
-        </p:spPr>
-        <p:txBody>
-          <a:bodyPr wrap="square">
-            <a:spAutoFit/>
-          </a:bodyPr>
-          <a:lstStyle/>
-          <a:p>
-            <a:r>
-              <a:rPr lang="en-US" dirty="0"/>
-              <a:t>slab = 150nm</a:t>
-            </a:r>
-            <a:endParaRPr lang="es-ES" dirty="0"/>
-          </a:p>
-        </p:txBody>
-      </p:sp>
-      <mc:AlternateContent xmlns:mc="http://schemas.openxmlformats.org/markup-compatibility/2006" xmlns:a14="http://schemas.microsoft.com/office/drawing/2010/main">
-        <mc:Choice Requires="a14">
-          <p:sp>
-            <p:nvSpPr>
-              <p:cNvPr id="9" name="CuadroTexto 8">
-                <a:extLst>
-                  <a:ext uri="{FF2B5EF4-FFF2-40B4-BE49-F238E27FC236}">
-                    <a16:creationId xmlns:a16="http://schemas.microsoft.com/office/drawing/2014/main" id="{2BDFECD2-156D-6697-CFBF-8CD783F9B986}"/>
-                  </a:ext>
-                </a:extLst>
-              </p:cNvPr>
-              <p:cNvSpPr txBox="1"/>
-              <p:nvPr/>
-            </p:nvSpPr>
-            <p:spPr>
-              <a:xfrm>
-                <a:off x="1079403" y="2709096"/>
-                <a:ext cx="4546634" cy="923330"/>
-              </a:xfrm>
-              <a:prstGeom prst="rect">
-                <a:avLst/>
-              </a:prstGeom>
-              <a:noFill/>
-            </p:spPr>
-            <p:txBody>
-              <a:bodyPr wrap="square" rtlCol="0">
-                <a:spAutoFit/>
-              </a:bodyPr>
-              <a:lstStyle/>
-              <a:p>
-                <a:pPr algn="ctr"/>
-                <a:r>
-                  <a:rPr lang="en-US" b="1" dirty="0"/>
-                  <a:t>deep</a:t>
-                </a:r>
-                <a:r>
-                  <a:rPr lang="en-US" dirty="0"/>
-                  <a:t> waveguide</a:t>
-                </a:r>
-              </a:p>
-              <a:p>
-                <a:pPr algn="ctr"/>
-                <a:endParaRPr lang="en-US" dirty="0"/>
-              </a:p>
-              <a:p>
-                <a:pPr algn="ctr"/>
-                <a:r>
-                  <a:rPr lang="en-US" dirty="0"/>
-                  <a:t>Paste </a:t>
-                </a:r>
-                <a14:m>
-                  <m:oMath xmlns:m="http://schemas.openxmlformats.org/officeDocument/2006/math">
-                    <m:sSub>
-                      <m:sSubPr>
-                        <m:ctrlPr>
-                          <a:rPr lang="es-ES" sz="1800" b="0" i="1" smtClean="0">
-                            <a:latin typeface="Cambria Math" panose="02040503050406030204" pitchFamily="18" charset="0"/>
-                          </a:rPr>
-                        </m:ctrlPr>
-                      </m:sSubPr>
-                      <m:e>
-                        <m:r>
-                          <a:rPr lang="es-ES" sz="1800" b="0" i="1" smtClean="0">
-                            <a:latin typeface="Cambria Math" panose="02040503050406030204" pitchFamily="18" charset="0"/>
-                          </a:rPr>
-                          <m:t>𝐿</m:t>
-                        </m:r>
-                      </m:e>
-                      <m:sub>
-                        <m:r>
-                          <a:rPr lang="es-ES" sz="1800" b="0" i="1" smtClean="0">
-                            <a:latin typeface="Cambria Math" panose="02040503050406030204" pitchFamily="18" charset="0"/>
-                          </a:rPr>
-                          <m:t>𝜋</m:t>
-                        </m:r>
-                      </m:sub>
-                    </m:sSub>
-                  </m:oMath>
-                </a14:m>
-                <a:r>
-                  <a:rPr lang="en-US" dirty="0"/>
-                  <a:t> vs width for TE and TM plot here</a:t>
-                </a:r>
-              </a:p>
-            </p:txBody>
-          </p:sp>
-        </mc:Choice>
-        <mc:Fallback xmlns="">
-          <p:sp>
-            <p:nvSpPr>
-              <p:cNvPr id="9" name="CuadroTexto 8">
-                <a:extLst>
-                  <a:ext uri="{FF2B5EF4-FFF2-40B4-BE49-F238E27FC236}">
-                    <a16:creationId xmlns:a16="http://schemas.microsoft.com/office/drawing/2014/main" id="{2BDFECD2-156D-6697-CFBF-8CD783F9B986}"/>
-                  </a:ext>
-                </a:extLst>
-              </p:cNvPr>
-              <p:cNvSpPr txBox="1">
-                <a:spLocks noRot="1" noChangeAspect="1" noMove="1" noResize="1" noEditPoints="1" noAdjustHandles="1" noChangeArrowheads="1" noChangeShapeType="1" noTextEdit="1"/>
-              </p:cNvSpPr>
-              <p:nvPr/>
-            </p:nvSpPr>
-            <p:spPr>
-              <a:xfrm>
-                <a:off x="1079403" y="2709096"/>
-                <a:ext cx="4546634" cy="923330"/>
-              </a:xfrm>
-              <a:prstGeom prst="rect">
-                <a:avLst/>
-              </a:prstGeom>
-              <a:blipFill>
-                <a:blip r:embed="rId5"/>
-                <a:stretch>
-                  <a:fillRect t="-3289" b="-9211"/>
-                </a:stretch>
-              </a:blipFill>
-            </p:spPr>
-            <p:txBody>
-              <a:bodyPr/>
-              <a:lstStyle/>
-              <a:p>
-                <a:r>
-                  <a:rPr lang="es-ES">
-                    <a:noFill/>
-                  </a:rPr>
-                  <a:t> </a:t>
-                </a:r>
-              </a:p>
-            </p:txBody>
-          </p:sp>
-        </mc:Fallback>
-      </mc:AlternateContent>
-      <mc:AlternateContent xmlns:mc="http://schemas.openxmlformats.org/markup-compatibility/2006" xmlns:a14="http://schemas.microsoft.com/office/drawing/2010/main">
-        <mc:Choice Requires="a14">
-          <p:sp>
-            <p:nvSpPr>
-              <p:cNvPr id="10" name="CuadroTexto 9">
-                <a:extLst>
-                  <a:ext uri="{FF2B5EF4-FFF2-40B4-BE49-F238E27FC236}">
-                    <a16:creationId xmlns:a16="http://schemas.microsoft.com/office/drawing/2014/main" id="{3BFC64CA-DE35-A528-CF09-36A26DB3DEE4}"/>
-                  </a:ext>
-                </a:extLst>
-              </p:cNvPr>
-              <p:cNvSpPr txBox="1"/>
-              <p:nvPr/>
-            </p:nvSpPr>
-            <p:spPr>
-              <a:xfrm>
-                <a:off x="6883366" y="2709096"/>
-                <a:ext cx="4546634" cy="923330"/>
-              </a:xfrm>
-              <a:prstGeom prst="rect">
-                <a:avLst/>
-              </a:prstGeom>
-              <a:noFill/>
-            </p:spPr>
-            <p:txBody>
-              <a:bodyPr wrap="square" rtlCol="0">
-                <a:spAutoFit/>
-              </a:bodyPr>
-              <a:lstStyle/>
-              <a:p>
-                <a:pPr algn="ctr"/>
-                <a:r>
-                  <a:rPr lang="en-US" b="1" dirty="0"/>
-                  <a:t>shallow</a:t>
-                </a:r>
-                <a:r>
-                  <a:rPr lang="en-US" dirty="0"/>
-                  <a:t> waveguide</a:t>
-                </a:r>
-              </a:p>
-              <a:p>
-                <a:pPr algn="ctr"/>
-                <a:endParaRPr lang="en-US" dirty="0"/>
-              </a:p>
-              <a:p>
-                <a:pPr algn="ctr"/>
-                <a:r>
-                  <a:rPr lang="en-US" dirty="0"/>
-                  <a:t>Paste </a:t>
-                </a:r>
-                <a14:m>
-                  <m:oMath xmlns:m="http://schemas.openxmlformats.org/officeDocument/2006/math">
-                    <m:sSub>
-                      <m:sSubPr>
-                        <m:ctrlPr>
-                          <a:rPr lang="es-ES" sz="1800" b="0" i="1" smtClean="0">
-                            <a:latin typeface="Cambria Math" panose="02040503050406030204" pitchFamily="18" charset="0"/>
-                          </a:rPr>
-                        </m:ctrlPr>
-                      </m:sSubPr>
-                      <m:e>
-                        <m:r>
-                          <a:rPr lang="es-ES" sz="1800" b="0" i="1" smtClean="0">
-                            <a:latin typeface="Cambria Math" panose="02040503050406030204" pitchFamily="18" charset="0"/>
-                          </a:rPr>
-                          <m:t>𝐿</m:t>
-                        </m:r>
-                      </m:e>
-                      <m:sub>
-                        <m:r>
-                          <a:rPr lang="es-ES" sz="1800" b="0" i="1" smtClean="0">
-                            <a:latin typeface="Cambria Math" panose="02040503050406030204" pitchFamily="18" charset="0"/>
-                          </a:rPr>
-                          <m:t>𝜋</m:t>
-                        </m:r>
-                      </m:sub>
-                    </m:sSub>
-                  </m:oMath>
-                </a14:m>
-                <a:r>
-                  <a:rPr lang="en-US" dirty="0"/>
-                  <a:t> vs width for TE and TM plot here</a:t>
-                </a:r>
-              </a:p>
-            </p:txBody>
-          </p:sp>
-        </mc:Choice>
-        <mc:Fallback xmlns="">
-          <p:sp>
-            <p:nvSpPr>
-              <p:cNvPr id="10" name="CuadroTexto 9">
-                <a:extLst>
-                  <a:ext uri="{FF2B5EF4-FFF2-40B4-BE49-F238E27FC236}">
-                    <a16:creationId xmlns:a16="http://schemas.microsoft.com/office/drawing/2014/main" id="{3BFC64CA-DE35-A528-CF09-36A26DB3DEE4}"/>
-                  </a:ext>
-                </a:extLst>
-              </p:cNvPr>
-              <p:cNvSpPr txBox="1">
-                <a:spLocks noRot="1" noChangeAspect="1" noMove="1" noResize="1" noEditPoints="1" noAdjustHandles="1" noChangeArrowheads="1" noChangeShapeType="1" noTextEdit="1"/>
-              </p:cNvSpPr>
-              <p:nvPr/>
-            </p:nvSpPr>
-            <p:spPr>
-              <a:xfrm>
-                <a:off x="6883366" y="2709096"/>
-                <a:ext cx="4546634" cy="923330"/>
-              </a:xfrm>
-              <a:prstGeom prst="rect">
-                <a:avLst/>
-              </a:prstGeom>
-              <a:blipFill>
-                <a:blip r:embed="rId6"/>
-                <a:stretch>
-                  <a:fillRect t="-3289" b="-9211"/>
-                </a:stretch>
-              </a:blipFill>
-            </p:spPr>
-            <p:txBody>
-              <a:bodyPr/>
-              <a:lstStyle/>
-              <a:p>
-                <a:r>
-                  <a:rPr lang="es-ES">
-                    <a:noFill/>
-                  </a:rPr>
-                  <a:t> </a:t>
-                </a:r>
-              </a:p>
-            </p:txBody>
-          </p:sp>
-        </mc:Fallback>
-      </mc:AlternateContent>
-    </p:spTree>
-    <p:extLst>
-      <p:ext uri="{BB962C8B-B14F-4D97-AF65-F5344CB8AC3E}">
-        <p14:creationId xmlns:p14="http://schemas.microsoft.com/office/powerpoint/2010/main" val="535939439"/>
-      </p:ext>
-    </p:extLst>
-  </p:cSld>
-  <p:clrMapOvr>
-    <a:masterClrMapping/>
-  </p:clrMapOvr>
-</p:sld>
-</file>
-
-<file path=ppt/slides/slide18.xml><?xml version="1.0" encoding="utf-8"?>
-<p:sld xmlns:a="http://schemas.openxmlformats.org/drawingml/2006/main" xmlns:r="http://schemas.openxmlformats.org/officeDocument/2006/relationships" xmlns:p="http://schemas.openxmlformats.org/presentationml/2006/main">
-  <p:cSld>
-    <p:spTree>
-      <p:nvGrpSpPr>
-        <p:cNvPr id="1" name=""/>
-        <p:cNvGrpSpPr/>
-        <p:nvPr/>
-      </p:nvGrpSpPr>
-      <p:grpSpPr>
-        <a:xfrm>
-          <a:off x="0" y="0"/>
-          <a:ext cx="0" cy="0"/>
-          <a:chOff x="0" y="0"/>
-          <a:chExt cx="0" cy="0"/>
-        </a:xfrm>
-      </p:grpSpPr>
-      <p:sp>
-        <p:nvSpPr>
-          <p:cNvPr id="3" name="object 3"/>
-          <p:cNvSpPr/>
-          <p:nvPr/>
-        </p:nvSpPr>
-        <p:spPr>
-          <a:xfrm>
-            <a:off x="3945635" y="2636520"/>
-            <a:ext cx="8246363" cy="1584959"/>
-          </a:xfrm>
-          <a:prstGeom prst="rect">
-            <a:avLst/>
-          </a:prstGeom>
-          <a:blipFill>
-            <a:blip r:embed="rId2" cstate="print"/>
-            <a:stretch>
-              <a:fillRect/>
-            </a:stretch>
-          </a:blipFill>
-        </p:spPr>
-        <p:txBody>
-          <a:bodyPr wrap="square" lIns="0" tIns="0" rIns="0" bIns="0" rtlCol="0"/>
-          <a:lstStyle/>
-          <a:p>
-            <a:endParaRPr/>
-          </a:p>
-        </p:txBody>
-      </p:sp>
-      <p:sp>
-        <p:nvSpPr>
-          <p:cNvPr id="4" name="object 4"/>
-          <p:cNvSpPr txBox="1">
-            <a:spLocks noGrp="1"/>
-          </p:cNvSpPr>
-          <p:nvPr>
-            <p:ph type="title"/>
-          </p:nvPr>
-        </p:nvSpPr>
-        <p:spPr>
-          <a:xfrm>
-            <a:off x="4513326" y="3165729"/>
-            <a:ext cx="2233295" cy="513715"/>
-          </a:xfrm>
-          <a:prstGeom prst="rect">
-            <a:avLst/>
-          </a:prstGeom>
-        </p:spPr>
-        <p:txBody>
-          <a:bodyPr vert="horz" wrap="square" lIns="0" tIns="13335" rIns="0" bIns="0" rtlCol="0">
-            <a:spAutoFit/>
-          </a:bodyPr>
-          <a:lstStyle/>
-          <a:p>
-            <a:pPr marL="12700">
-              <a:lnSpc>
-                <a:spcPct val="100000"/>
-              </a:lnSpc>
-              <a:spcBef>
-                <a:spcPts val="105"/>
-              </a:spcBef>
-            </a:pPr>
-            <a:r>
-              <a:rPr sz="3200" b="1" spc="-5" dirty="0">
-                <a:solidFill>
-                  <a:srgbClr val="FFFFFF"/>
-                </a:solidFill>
-                <a:latin typeface="Lucida Sans"/>
-                <a:cs typeface="Lucida Sans"/>
-              </a:rPr>
-              <a:t>Thank</a:t>
-            </a:r>
-            <a:r>
-              <a:rPr sz="3200" b="1" spc="-55" dirty="0">
-                <a:solidFill>
-                  <a:srgbClr val="FFFFFF"/>
-                </a:solidFill>
-                <a:latin typeface="Lucida Sans"/>
-                <a:cs typeface="Lucida Sans"/>
-              </a:rPr>
-              <a:t> </a:t>
-            </a:r>
-            <a:r>
-              <a:rPr sz="3200" b="1" dirty="0">
-                <a:solidFill>
-                  <a:srgbClr val="FFFFFF"/>
-                </a:solidFill>
-                <a:latin typeface="Lucida Sans"/>
-                <a:cs typeface="Lucida Sans"/>
-              </a:rPr>
-              <a:t>you</a:t>
-            </a:r>
-            <a:endParaRPr sz="3200">
-              <a:latin typeface="Lucida Sans"/>
-              <a:cs typeface="Lucida Sans"/>
-            </a:endParaRPr>
-          </a:p>
-        </p:txBody>
-      </p:sp>
-      <p:sp>
-        <p:nvSpPr>
-          <p:cNvPr id="5" name="Marcador de número de diapositiva 4">
-            <a:extLst>
-              <a:ext uri="{FF2B5EF4-FFF2-40B4-BE49-F238E27FC236}">
-                <a16:creationId xmlns:a16="http://schemas.microsoft.com/office/drawing/2014/main" id="{B052DA19-AD24-7D24-2AE9-51F8F5A7F5E0}"/>
-              </a:ext>
-            </a:extLst>
-          </p:cNvPr>
-          <p:cNvSpPr>
-            <a:spLocks noGrp="1"/>
-          </p:cNvSpPr>
-          <p:nvPr>
-            <p:ph type="sldNum" sz="quarter" idx="7"/>
-          </p:nvPr>
-        </p:nvSpPr>
-        <p:spPr/>
-        <p:txBody>
-          <a:bodyPr/>
-          <a:lstStyle/>
-          <a:p>
-            <a:fld id="{B6F15528-21DE-4FAA-801E-634DDDAF4B2B}" type="slidenum">
-              <a:rPr lang="es-ES" smtClean="0"/>
-              <a:t>18</a:t>
             </a:fld>
             <a:endParaRPr lang="es-ES"/>
           </a:p>
@@ -8971,10 +2998,10 @@
           <p:nvPr/>
         </p:nvPicPr>
         <p:blipFill>
-          <a:blip r:embed="rId2">
+          <a:blip>
             <a:extLst>
               <a:ext uri="{96DAC541-7B7A-43D3-8B79-37D633B846F1}">
-                <asvg:svgBlip xmlns:asvg="http://schemas.microsoft.com/office/drawing/2016/SVG/main" r:embed="rId3"/>
+                <asvg:svgBlip xmlns:asvg="http://schemas.microsoft.com/office/drawing/2016/SVG/main" r:embed="rId2"/>
               </a:ext>
             </a:extLst>
           </a:blip>
@@ -9048,10 +3075,9 @@
               </a:spcBef>
             </a:pPr>
             <a:r>
-              <a:rPr lang="es-ES" spc="-5"/>
-              <a:t>LAB 2.0. COUPLERS</a:t>
-            </a:r>
-            <a:endParaRPr lang="es-ES" spc="-5" dirty="0"/>
+              <a:rPr lang="es-ES" spc="-5" dirty="0"/>
+              <a:t>LAB 2.0 COUPLERS</a:t>
+            </a:r>
           </a:p>
         </p:txBody>
       </p:sp>
@@ -9186,7 +3212,7 @@
                 </a:solidFill>
                 <a:sym typeface="Wingdings" pitchFamily="2" charset="2"/>
               </a:rPr>
-              <a:t>Fork the repo: https://github.com/cccanvas-upv/cifoin-lab2.git</a:t>
+              <a:t>Fork the repo: https://github.com/cccanvas-upv/ipsp-lab2.git</a:t>
             </a:r>
           </a:p>
           <a:p>
@@ -9230,23 +3256,7 @@
                   <a:sysClr val="windowText" lastClr="000000"/>
                 </a:solidFill>
               </a:rPr>
-              <a:t>Run the </a:t>
-            </a:r>
-            <a:r>
-              <a:rPr lang="en-US" kern="0" dirty="0" err="1">
-                <a:solidFill>
-                  <a:sysClr val="windowText" lastClr="000000"/>
-                </a:solidFill>
-              </a:rPr>
-              <a:t>Jupyter</a:t>
-            </a:r>
-            <a:r>
-              <a:rPr lang="en-US" kern="0" dirty="0">
-                <a:solidFill>
-                  <a:sysClr val="windowText" lastClr="000000"/>
-                </a:solidFill>
-              </a:rPr>
-              <a:t> Notebook: </a:t>
+              <a:t>Run the Jupyter Notebook: </a:t>
             </a:r>
           </a:p>
           <a:p>
@@ -10897,141 +4907,6 @@
 </file>
 
 <file path=ppt/slides/slide3.xml><?xml version="1.0" encoding="utf-8"?>
-<p:sld xmlns:a="http://schemas.openxmlformats.org/drawingml/2006/main" xmlns:r="http://schemas.openxmlformats.org/officeDocument/2006/relationships" xmlns:p="http://schemas.openxmlformats.org/presentationml/2006/main">
-  <p:cSld>
-    <p:spTree>
-      <p:nvGrpSpPr>
-        <p:cNvPr id="1" name=""/>
-        <p:cNvGrpSpPr/>
-        <p:nvPr/>
-      </p:nvGrpSpPr>
-      <p:grpSpPr>
-        <a:xfrm>
-          <a:off x="0" y="0"/>
-          <a:ext cx="0" cy="0"/>
-          <a:chOff x="0" y="0"/>
-          <a:chExt cx="0" cy="0"/>
-        </a:xfrm>
-      </p:grpSpPr>
-      <p:sp>
-        <p:nvSpPr>
-          <p:cNvPr id="4" name="Marcador de pie de página 3">
-            <a:extLst>
-              <a:ext uri="{FF2B5EF4-FFF2-40B4-BE49-F238E27FC236}">
-                <a16:creationId xmlns:a16="http://schemas.microsoft.com/office/drawing/2014/main" id="{1F74687F-7302-3F32-F9D1-0566D05F33AE}"/>
-              </a:ext>
-            </a:extLst>
-          </p:cNvPr>
-          <p:cNvSpPr>
-            <a:spLocks noGrp="1"/>
-          </p:cNvSpPr>
-          <p:nvPr>
-            <p:ph type="ftr" sz="quarter" idx="5"/>
-          </p:nvPr>
-        </p:nvSpPr>
-        <p:spPr/>
-        <p:txBody>
-          <a:bodyPr/>
-          <a:lstStyle/>
-          <a:p>
-            <a:pPr marL="12700">
-              <a:spcBef>
-                <a:spcPts val="15"/>
-              </a:spcBef>
-            </a:pPr>
-            <a:r>
-              <a:rPr lang="es-ES" spc="-5"/>
-              <a:t>LAB 2.0. COUPLERS</a:t>
-            </a:r>
-            <a:endParaRPr lang="es-ES" spc="-5" dirty="0"/>
-          </a:p>
-        </p:txBody>
-      </p:sp>
-      <p:sp>
-        <p:nvSpPr>
-          <p:cNvPr id="5" name="Marcador de número de diapositiva 4">
-            <a:extLst>
-              <a:ext uri="{FF2B5EF4-FFF2-40B4-BE49-F238E27FC236}">
-                <a16:creationId xmlns:a16="http://schemas.microsoft.com/office/drawing/2014/main" id="{78335A49-ACE2-C055-50CA-8DD755D2E76D}"/>
-              </a:ext>
-            </a:extLst>
-          </p:cNvPr>
-          <p:cNvSpPr>
-            <a:spLocks noGrp="1"/>
-          </p:cNvSpPr>
-          <p:nvPr>
-            <p:ph type="sldNum" sz="quarter" idx="7"/>
-          </p:nvPr>
-        </p:nvSpPr>
-        <p:spPr/>
-        <p:txBody>
-          <a:bodyPr/>
-          <a:lstStyle/>
-          <a:p>
-            <a:fld id="{B6F15528-21DE-4FAA-801E-634DDDAF4B2B}" type="slidenum">
-              <a:rPr lang="es-ES" smtClean="0"/>
-              <a:t>3</a:t>
-            </a:fld>
-            <a:endParaRPr lang="es-ES"/>
-          </a:p>
-        </p:txBody>
-      </p:sp>
-      <p:sp>
-        <p:nvSpPr>
-          <p:cNvPr id="6" name="Título 4">
-            <a:extLst>
-              <a:ext uri="{FF2B5EF4-FFF2-40B4-BE49-F238E27FC236}">
-                <a16:creationId xmlns:a16="http://schemas.microsoft.com/office/drawing/2014/main" id="{AF6692CA-D0D0-2BAF-E673-933E02AE2BB8}"/>
-              </a:ext>
-            </a:extLst>
-          </p:cNvPr>
-          <p:cNvSpPr>
-            <a:spLocks noGrp="1"/>
-          </p:cNvSpPr>
-          <p:nvPr>
-            <p:ph type="body" idx="1"/>
-          </p:nvPr>
-        </p:nvSpPr>
-        <p:spPr>
-          <a:xfrm>
-            <a:off x="609600" y="2152650"/>
-            <a:ext cx="10972800" cy="430887"/>
-          </a:xfrm>
-        </p:spPr>
-        <p:txBody>
-          <a:bodyPr/>
-          <a:lstStyle/>
-          <a:p>
-            <a:pPr algn="ctr"/>
-            <a:r>
-              <a:rPr lang="en-US" sz="2800" b="1" dirty="0">
-                <a:effectLst>
-                  <a:outerShdw blurRad="38100" dist="38100" dir="2700000" algn="tl">
-                    <a:srgbClr val="000000">
-                      <a:alpha val="43137"/>
-                    </a:srgbClr>
-                  </a:outerShdw>
-                </a:effectLst>
-              </a:rPr>
-              <a:t>Directional coupler</a:t>
-            </a:r>
-          </a:p>
-        </p:txBody>
-      </p:sp>
-    </p:spTree>
-    <p:extLst>
-      <p:ext uri="{BB962C8B-B14F-4D97-AF65-F5344CB8AC3E}">
-        <p14:creationId xmlns:p14="http://schemas.microsoft.com/office/powerpoint/2010/main" val="1640019522"/>
-      </p:ext>
-    </p:extLst>
-  </p:cSld>
-  <p:clrMapOvr>
-    <a:masterClrMapping/>
-  </p:clrMapOvr>
-</p:sld>
-</file>
-
-<file path=ppt/slides/slide4.xml><?xml version="1.0" encoding="utf-8"?>
 <p:sld xmlns:a="http://schemas.openxmlformats.org/drawingml/2006/main" xmlns:r="http://schemas.openxmlformats.org/officeDocument/2006/relationships" xmlns:p="http://schemas.openxmlformats.org/presentationml/2006/main">
   <p:cSld>
     <p:spTree>
@@ -11129,10 +5004,10 @@
           <p:nvPr/>
         </p:nvPicPr>
         <p:blipFill>
-          <a:blip r:embed="rId3">
+          <a:blip>
             <a:extLst>
               <a:ext uri="{96DAC541-7B7A-43D3-8B79-37D633B846F1}">
-                <asvg:svgBlip xmlns:asvg="http://schemas.microsoft.com/office/drawing/2016/SVG/main" r:embed="rId4"/>
+                <asvg:svgBlip xmlns:asvg="http://schemas.microsoft.com/office/drawing/2016/SVG/main" r:embed="rId3"/>
               </a:ext>
             </a:extLst>
           </a:blip>
@@ -11173,7 +5048,7 @@
           <a:p>
             <a:fld id="{B6F15528-21DE-4FAA-801E-634DDDAF4B2B}" type="slidenum">
               <a:rPr lang="es-ES" smtClean="0"/>
-              <a:t>4</a:t>
+              <a:t>3</a:t>
             </a:fld>
             <a:endParaRPr lang="es-ES"/>
           </a:p>
@@ -11207,7 +5082,7 @@
             </a:pPr>
             <a:r>
               <a:rPr lang="es-ES" spc="-5"/>
-              <a:t>LAB 2.0. COUPLERS</a:t>
+              <a:t>LAB 0.2. COUPLERS</a:t>
             </a:r>
             <a:endParaRPr lang="es-ES" spc="-5" dirty="0"/>
           </a:p>
@@ -11614,7 +5489,7 @@
 </p:sld>
 </file>
 
-<file path=ppt/slides/slide5.xml><?xml version="1.0" encoding="utf-8"?>
+<file path=ppt/slides/slide4.xml><?xml version="1.0" encoding="utf-8"?>
 <p:sld xmlns:a="http://schemas.openxmlformats.org/drawingml/2006/main" xmlns:r="http://schemas.openxmlformats.org/officeDocument/2006/relationships" xmlns:p="http://schemas.openxmlformats.org/presentationml/2006/main">
   <p:cSld>
     <p:spTree>
@@ -11688,7 +5563,7 @@
             </a:br>
             <a:r>
               <a:rPr lang="en-US" b="0" dirty="0"/>
-              <a:t>Wavelength 1.5 µm – width 1.2 µm – gap 0.6 µm – thickness 300 nm</a:t>
+              <a:t>Wavelength 1.5 µm – width 1.2 µm – gap 0.6 µm</a:t>
             </a:r>
             <a:endParaRPr lang="en-US" sz="2500" b="0" dirty="0">
               <a:latin typeface="+mj-lt"/>
@@ -11712,10 +5587,10 @@
           <p:nvPr/>
         </p:nvPicPr>
         <p:blipFill>
-          <a:blip r:embed="rId3">
+          <a:blip>
             <a:extLst>
               <a:ext uri="{96DAC541-7B7A-43D3-8B79-37D633B846F1}">
-                <asvg:svgBlip xmlns:asvg="http://schemas.microsoft.com/office/drawing/2016/SVG/main" r:embed="rId4"/>
+                <asvg:svgBlip xmlns:asvg="http://schemas.microsoft.com/office/drawing/2016/SVG/main" r:embed="rId3"/>
               </a:ext>
             </a:extLst>
           </a:blip>
@@ -11756,7 +5631,7 @@
           <a:p>
             <a:fld id="{B6F15528-21DE-4FAA-801E-634DDDAF4B2B}" type="slidenum">
               <a:rPr lang="es-ES" smtClean="0"/>
-              <a:t>5</a:t>
+              <a:t>4</a:t>
             </a:fld>
             <a:endParaRPr lang="es-ES"/>
           </a:p>
@@ -11790,7 +5665,7 @@
             </a:pPr>
             <a:r>
               <a:rPr lang="es-ES" spc="-5"/>
-              <a:t>LAB 2.0. COUPLERS</a:t>
+              <a:t>LAB 0.2. COUPLERS</a:t>
             </a:r>
             <a:endParaRPr lang="es-ES" spc="-5" dirty="0"/>
           </a:p>
@@ -12005,7 +5880,7 @@
           <p:nvPr/>
         </p:nvPicPr>
         <p:blipFill>
-          <a:blip r:embed="rId5" cstate="print">
+          <a:blip r:embed="rId4" cstate="print">
             <a:extLst>
               <a:ext uri="{28A0092B-C50C-407E-A947-70E740481C1C}">
                 <a14:useLocalDpi xmlns:a14="http://schemas.microsoft.com/office/drawing/2010/main" val="0"/>
@@ -12029,7 +5904,7 @@
     </p:spTree>
     <p:extLst>
       <p:ext uri="{BB962C8B-B14F-4D97-AF65-F5344CB8AC3E}">
-        <p14:creationId xmlns:p14="http://schemas.microsoft.com/office/powerpoint/2010/main" val="3663624071"/>
+        <p14:creationId xmlns:p14="http://schemas.microsoft.com/office/powerpoint/2010/main" val="3712356003"/>
       </p:ext>
     </p:extLst>
   </p:cSld>
@@ -12039,7 +5914,7 @@
 </p:sld>
 </file>
 
-<file path=ppt/slides/slide6.xml><?xml version="1.0" encoding="utf-8"?>
+<file path=ppt/slides/slide5.xml><?xml version="1.0" encoding="utf-8"?>
 <p:sld xmlns:a="http://schemas.openxmlformats.org/drawingml/2006/main" xmlns:r="http://schemas.openxmlformats.org/officeDocument/2006/relationships" xmlns:p="http://schemas.openxmlformats.org/presentationml/2006/main">
   <p:cSld>
     <p:spTree>
@@ -12113,7 +5988,7 @@
             </a:br>
             <a:r>
               <a:rPr lang="en-US" b="0" dirty="0"/>
-              <a:t>Wavelength 1.55 µm – Sweep gaps between 0.2 and 1.2 µm in steps of 0.2 µm</a:t>
+              <a:t>Waveguide width 1.2 µm, Gap between waveguides 0.6 µm – Wavelength 1.55 µm </a:t>
             </a:r>
             <a:endParaRPr lang="en-US" sz="2500" b="0" dirty="0">
               <a:latin typeface="+mj-lt"/>
@@ -12137,10 +6012,10 @@
           <p:nvPr/>
         </p:nvPicPr>
         <p:blipFill>
-          <a:blip r:embed="rId3">
+          <a:blip>
             <a:extLst>
               <a:ext uri="{96DAC541-7B7A-43D3-8B79-37D633B846F1}">
-                <asvg:svgBlip xmlns:asvg="http://schemas.microsoft.com/office/drawing/2016/SVG/main" r:embed="rId4"/>
+                <asvg:svgBlip xmlns:asvg="http://schemas.microsoft.com/office/drawing/2016/SVG/main" r:embed="rId3"/>
               </a:ext>
             </a:extLst>
           </a:blip>
@@ -12181,7 +6056,7 @@
           <a:p>
             <a:fld id="{B6F15528-21DE-4FAA-801E-634DDDAF4B2B}" type="slidenum">
               <a:rPr lang="es-ES" smtClean="0"/>
-              <a:t>6</a:t>
+              <a:t>5</a:t>
             </a:fld>
             <a:endParaRPr lang="es-ES"/>
           </a:p>
@@ -12215,7 +6090,7 @@
             </a:pPr>
             <a:r>
               <a:rPr lang="es-ES" spc="-5"/>
-              <a:t>LAB 2.0. COUPLERS</a:t>
+              <a:t>LAB 0.2. COUPLERS</a:t>
             </a:r>
             <a:endParaRPr lang="es-ES" spc="-5" dirty="0"/>
           </a:p>
@@ -12424,7 +6299,7 @@
     </p:spTree>
     <p:extLst>
       <p:ext uri="{BB962C8B-B14F-4D97-AF65-F5344CB8AC3E}">
-        <p14:creationId xmlns:p14="http://schemas.microsoft.com/office/powerpoint/2010/main" val="1558326841"/>
+        <p14:creationId xmlns:p14="http://schemas.microsoft.com/office/powerpoint/2010/main" val="2900117438"/>
       </p:ext>
     </p:extLst>
   </p:cSld>
@@ -12434,829 +6309,7 @@
 </p:sld>
 </file>
 
-<file path=ppt/slides/slide7.xml><?xml version="1.0" encoding="utf-8"?>
-<p:sld xmlns:a="http://schemas.openxmlformats.org/drawingml/2006/main" xmlns:r="http://schemas.openxmlformats.org/officeDocument/2006/relationships" xmlns:p="http://schemas.openxmlformats.org/presentationml/2006/main">
-  <p:cSld>
-    <p:spTree>
-      <p:nvGrpSpPr>
-        <p:cNvPr id="1" name="">
-          <a:extLst>
-            <a:ext uri="{FF2B5EF4-FFF2-40B4-BE49-F238E27FC236}">
-              <a16:creationId xmlns:a16="http://schemas.microsoft.com/office/drawing/2014/main" id="{371656EC-E197-239C-60DD-C11F7BA4B44A}"/>
-            </a:ext>
-          </a:extLst>
-        </p:cNvPr>
-        <p:cNvGrpSpPr/>
-        <p:nvPr/>
-      </p:nvGrpSpPr>
-      <p:grpSpPr>
-        <a:xfrm>
-          <a:off x="0" y="0"/>
-          <a:ext cx="0" cy="0"/>
-          <a:chOff x="0" y="0"/>
-          <a:chExt cx="0" cy="0"/>
-        </a:xfrm>
-      </p:grpSpPr>
-      <p:sp>
-        <p:nvSpPr>
-          <p:cNvPr id="16" name="object 16">
-            <a:extLst>
-              <a:ext uri="{FF2B5EF4-FFF2-40B4-BE49-F238E27FC236}">
-                <a16:creationId xmlns:a16="http://schemas.microsoft.com/office/drawing/2014/main" id="{5431EA70-9578-8BF1-5A05-77CDC26788B4}"/>
-              </a:ext>
-            </a:extLst>
-          </p:cNvPr>
-          <p:cNvSpPr txBox="1">
-            <a:spLocks noGrp="1"/>
-          </p:cNvSpPr>
-          <p:nvPr>
-            <p:ph type="title"/>
-          </p:nvPr>
-        </p:nvSpPr>
-        <p:spPr>
-          <a:xfrm>
-            <a:off x="685800" y="408883"/>
-            <a:ext cx="10994410" cy="705321"/>
-          </a:xfrm>
-          <a:prstGeom prst="rect">
-            <a:avLst/>
-          </a:prstGeom>
-        </p:spPr>
-        <p:txBody>
-          <a:bodyPr vert="horz" wrap="square" lIns="0" tIns="12700" rIns="0" bIns="0" rtlCol="0">
-            <a:spAutoFit/>
-          </a:bodyPr>
-          <a:lstStyle/>
-          <a:p>
-            <a:pPr marL="12700">
-              <a:lnSpc>
-                <a:spcPct val="100000"/>
-              </a:lnSpc>
-              <a:spcBef>
-                <a:spcPts val="100"/>
-              </a:spcBef>
-            </a:pPr>
-            <a:r>
-              <a:rPr lang="en-US" sz="2500" dirty="0"/>
-              <a:t>Learning outcome #4 – Parallel uncoupled waveguides – TE0 mode</a:t>
-            </a:r>
-            <a:br>
-              <a:rPr lang="en-US" sz="2500" spc="-5" dirty="0">
-                <a:latin typeface="+mj-lt"/>
-                <a:cs typeface="Lucida Sans"/>
-              </a:rPr>
-            </a:br>
-            <a:r>
-              <a:rPr lang="en-US" b="0" dirty="0"/>
-              <a:t>Wavelength 1.55 µm, width 1.0 µm, gap to be found for uncoupled </a:t>
-            </a:r>
-            <a:r>
-              <a:rPr lang="en-US" b="0" dirty="0" err="1"/>
-              <a:t>wvgs</a:t>
-            </a:r>
-            <a:endParaRPr lang="en-US" sz="2500" b="0" dirty="0">
-              <a:latin typeface="+mj-lt"/>
-              <a:cs typeface="Lucida Sans"/>
-            </a:endParaRPr>
-          </a:p>
-        </p:txBody>
-      </p:sp>
-      <p:pic>
-        <p:nvPicPr>
-          <p:cNvPr id="83" name="Gráfico 82">
-            <a:extLst>
-              <a:ext uri="{FF2B5EF4-FFF2-40B4-BE49-F238E27FC236}">
-                <a16:creationId xmlns:a16="http://schemas.microsoft.com/office/drawing/2014/main" id="{B6A02C28-9CC3-6E88-B695-04A48E5FDEAC}"/>
-              </a:ext>
-            </a:extLst>
-          </p:cNvPr>
-          <p:cNvPicPr>
-            <a:picLocks noChangeAspect="1"/>
-          </p:cNvPicPr>
-          <p:nvPr/>
-        </p:nvPicPr>
-        <p:blipFill>
-          <a:blip r:embed="rId3">
-            <a:extLst>
-              <a:ext uri="{96DAC541-7B7A-43D3-8B79-37D633B846F1}">
-                <asvg:svgBlip xmlns:asvg="http://schemas.microsoft.com/office/drawing/2016/SVG/main" r:embed="rId4"/>
-              </a:ext>
-            </a:extLst>
-          </a:blip>
-          <a:stretch>
-            <a:fillRect/>
-          </a:stretch>
-        </p:blipFill>
-        <p:spPr>
-          <a:xfrm>
-            <a:off x="5045006" y="6356057"/>
-            <a:ext cx="6409575" cy="363174"/>
-          </a:xfrm>
-          <a:prstGeom prst="rect">
-            <a:avLst/>
-          </a:prstGeom>
-        </p:spPr>
-      </p:pic>
-      <p:sp>
-        <p:nvSpPr>
-          <p:cNvPr id="84" name="Marcador de número de diapositiva 83">
-            <a:extLst>
-              <a:ext uri="{FF2B5EF4-FFF2-40B4-BE49-F238E27FC236}">
-                <a16:creationId xmlns:a16="http://schemas.microsoft.com/office/drawing/2014/main" id="{FB7F118F-AD79-0ED0-CE53-A8EE4409B4F8}"/>
-              </a:ext>
-            </a:extLst>
-          </p:cNvPr>
-          <p:cNvSpPr>
-            <a:spLocks noGrp="1"/>
-          </p:cNvSpPr>
-          <p:nvPr>
-            <p:ph type="sldNum" sz="quarter" idx="7"/>
-          </p:nvPr>
-        </p:nvSpPr>
-        <p:spPr/>
-        <p:txBody>
-          <a:bodyPr/>
-          <a:lstStyle/>
-          <a:p>
-            <a:fld id="{B6F15528-21DE-4FAA-801E-634DDDAF4B2B}" type="slidenum">
-              <a:rPr lang="es-ES" smtClean="0"/>
-              <a:t>7</a:t>
-            </a:fld>
-            <a:endParaRPr lang="es-ES"/>
-          </a:p>
-        </p:txBody>
-      </p:sp>
-      <p:sp>
-        <p:nvSpPr>
-          <p:cNvPr id="3" name="Marcador de pie de página 2">
-            <a:extLst>
-              <a:ext uri="{FF2B5EF4-FFF2-40B4-BE49-F238E27FC236}">
-                <a16:creationId xmlns:a16="http://schemas.microsoft.com/office/drawing/2014/main" id="{10846C9D-3FE3-8524-3349-96E1AD1712B3}"/>
-              </a:ext>
-            </a:extLst>
-          </p:cNvPr>
-          <p:cNvSpPr>
-            <a:spLocks noGrp="1"/>
-          </p:cNvSpPr>
-          <p:nvPr>
-            <p:ph type="ftr" sz="quarter" idx="5"/>
-          </p:nvPr>
-        </p:nvSpPr>
-        <p:spPr/>
-        <p:txBody>
-          <a:bodyPr/>
-          <a:lstStyle/>
-          <a:p>
-            <a:pPr marL="12700">
-              <a:spcBef>
-                <a:spcPts val="15"/>
-              </a:spcBef>
-            </a:pPr>
-            <a:r>
-              <a:rPr lang="es-ES" spc="-5"/>
-              <a:t>LAB 2.0. COUPLERS</a:t>
-            </a:r>
-            <a:endParaRPr lang="es-ES" spc="-5" dirty="0"/>
-          </a:p>
-        </p:txBody>
-      </p:sp>
-      <p:sp>
-        <p:nvSpPr>
-          <p:cNvPr id="2" name="CuadroTexto 1">
-            <a:extLst>
-              <a:ext uri="{FF2B5EF4-FFF2-40B4-BE49-F238E27FC236}">
-                <a16:creationId xmlns:a16="http://schemas.microsoft.com/office/drawing/2014/main" id="{CA5F0FDF-2A95-453B-4ECA-AEB637FF2694}"/>
-              </a:ext>
-            </a:extLst>
-          </p:cNvPr>
-          <p:cNvSpPr txBox="1"/>
-          <p:nvPr/>
-        </p:nvSpPr>
-        <p:spPr>
-          <a:xfrm>
-            <a:off x="609441" y="4627196"/>
-            <a:ext cx="11199971" cy="2123658"/>
-          </a:xfrm>
-          <a:prstGeom prst="rect">
-            <a:avLst/>
-          </a:prstGeom>
-          <a:solidFill>
-            <a:schemeClr val="bg1">
-              <a:lumMod val="95000"/>
-            </a:schemeClr>
-          </a:solidFill>
-          <a:ln w="28575">
-            <a:solidFill>
-              <a:srgbClr val="E0700D"/>
-            </a:solidFill>
-          </a:ln>
-        </p:spPr>
-        <p:txBody>
-          <a:bodyPr wrap="square" rtlCol="0">
-            <a:spAutoFit/>
-          </a:bodyPr>
-          <a:lstStyle/>
-          <a:p>
-            <a:pPr algn="just"/>
-            <a:r>
-              <a:rPr lang="en-US" sz="1200" b="1" dirty="0">
-                <a:latin typeface="Arial" panose="020B0604020202020204" pitchFamily="34" charset="0"/>
-                <a:cs typeface="Arial" panose="020B0604020202020204" pitchFamily="34" charset="0"/>
-              </a:rPr>
-              <a:t>Hints:</a:t>
-            </a:r>
-          </a:p>
-          <a:p>
-            <a:pPr algn="just"/>
-            <a:r>
-              <a:rPr lang="en-US" sz="1200" dirty="0">
-                <a:latin typeface="Arial" panose="020B0604020202020204" pitchFamily="34" charset="0"/>
-                <a:cs typeface="Arial" panose="020B0604020202020204" pitchFamily="34" charset="0"/>
-              </a:rPr>
-              <a:t>All waveguides running in parallel are coupled somehow. Controlling the degree of coupling is key for those waveguides you don’t want coupling over certain level (i.e. uncoupled waveguides). Uncoupled waveguide definition, we will use K&lt;0.01. Parallel waveguide length = 10 mm (typical length of a chip). Find minimum gap shallow / deep w=1.0µm </a:t>
-            </a:r>
-            <a:r>
-              <a:rPr lang="en-US" sz="1200" dirty="0" err="1">
-                <a:latin typeface="Arial" panose="020B0604020202020204" pitchFamily="34" charset="0"/>
-                <a:cs typeface="Arial" panose="020B0604020202020204" pitchFamily="34" charset="0"/>
-              </a:rPr>
-              <a:t>wvl</a:t>
-            </a:r>
-            <a:r>
-              <a:rPr lang="en-US" sz="1200" dirty="0">
-                <a:latin typeface="Arial" panose="020B0604020202020204" pitchFamily="34" charset="0"/>
-                <a:cs typeface="Arial" panose="020B0604020202020204" pitchFamily="34" charset="0"/>
-              </a:rPr>
-              <a:t> 1.55 µm.</a:t>
-            </a:r>
-          </a:p>
-          <a:p>
-            <a:pPr algn="just"/>
-            <a:endParaRPr lang="en-US" sz="1200" dirty="0">
-              <a:latin typeface="Arial" panose="020B0604020202020204" pitchFamily="34" charset="0"/>
-              <a:cs typeface="Arial" panose="020B0604020202020204" pitchFamily="34" charset="0"/>
-            </a:endParaRPr>
-          </a:p>
-          <a:p>
-            <a:pPr algn="just"/>
-            <a:endParaRPr lang="en-US" sz="1200" dirty="0">
-              <a:latin typeface="Arial" panose="020B0604020202020204" pitchFamily="34" charset="0"/>
-              <a:cs typeface="Arial" panose="020B0604020202020204" pitchFamily="34" charset="0"/>
-            </a:endParaRPr>
-          </a:p>
-          <a:p>
-            <a:pPr algn="just"/>
-            <a:endParaRPr lang="en-US" sz="1200" dirty="0">
-              <a:latin typeface="Arial" panose="020B0604020202020204" pitchFamily="34" charset="0"/>
-              <a:cs typeface="Arial" panose="020B0604020202020204" pitchFamily="34" charset="0"/>
-            </a:endParaRPr>
-          </a:p>
-          <a:p>
-            <a:pPr algn="just"/>
-            <a:endParaRPr lang="en-US" sz="1200" dirty="0">
-              <a:latin typeface="Arial" panose="020B0604020202020204" pitchFamily="34" charset="0"/>
-              <a:cs typeface="Arial" panose="020B0604020202020204" pitchFamily="34" charset="0"/>
-            </a:endParaRPr>
-          </a:p>
-          <a:p>
-            <a:pPr algn="just"/>
-            <a:endParaRPr lang="en-US" sz="1200" dirty="0">
-              <a:latin typeface="Arial" panose="020B0604020202020204" pitchFamily="34" charset="0"/>
-              <a:cs typeface="Arial" panose="020B0604020202020204" pitchFamily="34" charset="0"/>
-            </a:endParaRPr>
-          </a:p>
-          <a:p>
-            <a:pPr algn="just"/>
-            <a:endParaRPr lang="en-US" sz="1200" dirty="0">
-              <a:latin typeface="Arial" panose="020B0604020202020204" pitchFamily="34" charset="0"/>
-              <a:cs typeface="Arial" panose="020B0604020202020204" pitchFamily="34" charset="0"/>
-            </a:endParaRPr>
-          </a:p>
-          <a:p>
-            <a:pPr algn="just"/>
-            <a:endParaRPr lang="en-US" sz="1200" dirty="0">
-              <a:latin typeface="Arial" panose="020B0604020202020204" pitchFamily="34" charset="0"/>
-              <a:cs typeface="Arial" panose="020B0604020202020204" pitchFamily="34" charset="0"/>
-            </a:endParaRPr>
-          </a:p>
-        </p:txBody>
-      </p:sp>
-      <p:sp>
-        <p:nvSpPr>
-          <p:cNvPr id="4" name="Rectángulo 3">
-            <a:extLst>
-              <a:ext uri="{FF2B5EF4-FFF2-40B4-BE49-F238E27FC236}">
-                <a16:creationId xmlns:a16="http://schemas.microsoft.com/office/drawing/2014/main" id="{FB4B77A0-B37C-3130-FB52-4E560C66946F}"/>
-              </a:ext>
-            </a:extLst>
-          </p:cNvPr>
-          <p:cNvSpPr/>
-          <p:nvPr/>
-        </p:nvSpPr>
-        <p:spPr>
-          <a:xfrm>
-            <a:off x="609441" y="1219200"/>
-            <a:ext cx="5486559" cy="3306028"/>
-          </a:xfrm>
-          <a:prstGeom prst="rect">
-            <a:avLst/>
-          </a:prstGeom>
-          <a:noFill/>
-          <a:ln w="28575">
-            <a:solidFill>
-              <a:srgbClr val="E0700D"/>
-            </a:solidFill>
-          </a:ln>
-        </p:spPr>
-        <p:style>
-          <a:lnRef idx="2">
-            <a:schemeClr val="accent1">
-              <a:shade val="15000"/>
-            </a:schemeClr>
-          </a:lnRef>
-          <a:fillRef idx="1">
-            <a:schemeClr val="accent1"/>
-          </a:fillRef>
-          <a:effectRef idx="0">
-            <a:schemeClr val="accent1"/>
-          </a:effectRef>
-          <a:fontRef idx="minor">
-            <a:schemeClr val="lt1"/>
-          </a:fontRef>
-        </p:style>
-        <p:txBody>
-          <a:bodyPr rtlCol="0" anchor="ctr"/>
-          <a:lstStyle/>
-          <a:p>
-            <a:pPr algn="ctr"/>
-            <a:endParaRPr lang="en-US"/>
-          </a:p>
-        </p:txBody>
-      </p:sp>
-      <p:sp>
-        <p:nvSpPr>
-          <p:cNvPr id="5" name="Rectángulo 4">
-            <a:extLst>
-              <a:ext uri="{FF2B5EF4-FFF2-40B4-BE49-F238E27FC236}">
-                <a16:creationId xmlns:a16="http://schemas.microsoft.com/office/drawing/2014/main" id="{DA7ECAA3-0876-C0FB-D7E5-448FCC5ED226}"/>
-              </a:ext>
-            </a:extLst>
-          </p:cNvPr>
-          <p:cNvSpPr/>
-          <p:nvPr/>
-        </p:nvSpPr>
-        <p:spPr>
-          <a:xfrm>
-            <a:off x="6321424" y="1219200"/>
-            <a:ext cx="5486559" cy="3306028"/>
-          </a:xfrm>
-          <a:prstGeom prst="rect">
-            <a:avLst/>
-          </a:prstGeom>
-          <a:noFill/>
-          <a:ln w="28575">
-            <a:solidFill>
-              <a:srgbClr val="E0700D"/>
-            </a:solidFill>
-          </a:ln>
-        </p:spPr>
-        <p:style>
-          <a:lnRef idx="2">
-            <a:schemeClr val="accent1">
-              <a:shade val="15000"/>
-            </a:schemeClr>
-          </a:lnRef>
-          <a:fillRef idx="1">
-            <a:schemeClr val="accent1"/>
-          </a:fillRef>
-          <a:effectRef idx="0">
-            <a:schemeClr val="accent1"/>
-          </a:effectRef>
-          <a:fontRef idx="minor">
-            <a:schemeClr val="lt1"/>
-          </a:fontRef>
-        </p:style>
-        <p:txBody>
-          <a:bodyPr rtlCol="0" anchor="ctr"/>
-          <a:lstStyle/>
-          <a:p>
-            <a:pPr algn="ctr"/>
-            <a:endParaRPr lang="en-US"/>
-          </a:p>
-        </p:txBody>
-      </p:sp>
-      <mc:AlternateContent xmlns:mc="http://schemas.openxmlformats.org/markup-compatibility/2006" xmlns:a14="http://schemas.microsoft.com/office/drawing/2010/main">
-        <mc:Choice Requires="a14">
-          <p:sp>
-            <p:nvSpPr>
-              <p:cNvPr id="9" name="CuadroTexto 8">
-                <a:extLst>
-                  <a:ext uri="{FF2B5EF4-FFF2-40B4-BE49-F238E27FC236}">
-                    <a16:creationId xmlns:a16="http://schemas.microsoft.com/office/drawing/2014/main" id="{C1467207-8D05-D4C6-EBD2-209F796AE977}"/>
-                  </a:ext>
-                </a:extLst>
-              </p:cNvPr>
-              <p:cNvSpPr txBox="1"/>
-              <p:nvPr/>
-            </p:nvSpPr>
-            <p:spPr>
-              <a:xfrm>
-                <a:off x="1079403" y="2480496"/>
-                <a:ext cx="4546634" cy="1477328"/>
-              </a:xfrm>
-              <a:prstGeom prst="rect">
-                <a:avLst/>
-              </a:prstGeom>
-              <a:noFill/>
-            </p:spPr>
-            <p:txBody>
-              <a:bodyPr wrap="square" rtlCol="0">
-                <a:spAutoFit/>
-              </a:bodyPr>
-              <a:lstStyle/>
-              <a:p>
-                <a:pPr algn="ctr"/>
-                <a:r>
-                  <a:rPr lang="en-US" b="1" dirty="0"/>
-                  <a:t>deep</a:t>
-                </a:r>
-                <a:r>
-                  <a:rPr lang="en-US" dirty="0"/>
-                  <a:t> waveguide</a:t>
-                </a:r>
-              </a:p>
-              <a:p>
-                <a:pPr algn="ctr"/>
-                <a:endParaRPr lang="en-US" dirty="0"/>
-              </a:p>
-              <a:p>
-                <a:pPr algn="ctr"/>
-                <a:r>
-                  <a:rPr lang="en-US" dirty="0"/>
-                  <a:t>Paste </a:t>
-                </a:r>
-                <a14:m>
-                  <m:oMath xmlns:m="http://schemas.openxmlformats.org/officeDocument/2006/math">
-                    <m:r>
-                      <a:rPr lang="es-ES" b="0" i="1" smtClean="0">
-                        <a:latin typeface="Cambria Math" panose="02040503050406030204" pitchFamily="18" charset="0"/>
-                      </a:rPr>
-                      <m:t>𝐾</m:t>
-                    </m:r>
-                  </m:oMath>
-                </a14:m>
-                <a:r>
-                  <a:rPr lang="en-US" dirty="0"/>
-                  <a:t> vs gap for 10 mm </a:t>
-                </a:r>
-                <a:r>
-                  <a:rPr lang="en-US" dirty="0" err="1"/>
-                  <a:t>wvgs</a:t>
-                </a:r>
-                <a:r>
-                  <a:rPr lang="en-US" dirty="0"/>
-                  <a:t> to be uncoupled</a:t>
-                </a:r>
-              </a:p>
-              <a:p>
-                <a:pPr algn="ctr"/>
-                <a:endParaRPr lang="en-US" dirty="0"/>
-              </a:p>
-            </p:txBody>
-          </p:sp>
-        </mc:Choice>
-        <mc:Fallback xmlns="">
-          <p:sp>
-            <p:nvSpPr>
-              <p:cNvPr id="9" name="CuadroTexto 8">
-                <a:extLst>
-                  <a:ext uri="{FF2B5EF4-FFF2-40B4-BE49-F238E27FC236}">
-                    <a16:creationId xmlns:a16="http://schemas.microsoft.com/office/drawing/2014/main" id="{C1467207-8D05-D4C6-EBD2-209F796AE977}"/>
-                  </a:ext>
-                </a:extLst>
-              </p:cNvPr>
-              <p:cNvSpPr txBox="1">
-                <a:spLocks noRot="1" noChangeAspect="1" noMove="1" noResize="1" noEditPoints="1" noAdjustHandles="1" noChangeArrowheads="1" noChangeShapeType="1" noTextEdit="1"/>
-              </p:cNvSpPr>
-              <p:nvPr/>
-            </p:nvSpPr>
-            <p:spPr>
-              <a:xfrm>
-                <a:off x="1079403" y="2480496"/>
-                <a:ext cx="4546634" cy="1477328"/>
-              </a:xfrm>
-              <a:prstGeom prst="rect">
-                <a:avLst/>
-              </a:prstGeom>
-              <a:blipFill>
-                <a:blip r:embed="rId5"/>
-                <a:stretch>
-                  <a:fillRect t="-2479"/>
-                </a:stretch>
-              </a:blipFill>
-            </p:spPr>
-            <p:txBody>
-              <a:bodyPr/>
-              <a:lstStyle/>
-              <a:p>
-                <a:r>
-                  <a:rPr lang="es-ES">
-                    <a:noFill/>
-                  </a:rPr>
-                  <a:t> </a:t>
-                </a:r>
-              </a:p>
-            </p:txBody>
-          </p:sp>
-        </mc:Fallback>
-      </mc:AlternateContent>
-      <mc:AlternateContent xmlns:mc="http://schemas.openxmlformats.org/markup-compatibility/2006">
-        <mc:Choice xmlns:a14="http://schemas.microsoft.com/office/drawing/2010/main" Requires="a14">
-          <p:sp>
-            <p:nvSpPr>
-              <p:cNvPr id="10" name="CuadroTexto 9">
-                <a:extLst>
-                  <a:ext uri="{FF2B5EF4-FFF2-40B4-BE49-F238E27FC236}">
-                    <a16:creationId xmlns:a16="http://schemas.microsoft.com/office/drawing/2014/main" id="{32E39C0C-95E1-ED90-891A-5D634D9DB76B}"/>
-                  </a:ext>
-                </a:extLst>
-              </p:cNvPr>
-              <p:cNvSpPr txBox="1"/>
-              <p:nvPr/>
-            </p:nvSpPr>
-            <p:spPr>
-              <a:xfrm>
-                <a:off x="6883366" y="2480496"/>
-                <a:ext cx="4546634" cy="1477328"/>
-              </a:xfrm>
-              <a:prstGeom prst="rect">
-                <a:avLst/>
-              </a:prstGeom>
-              <a:noFill/>
-            </p:spPr>
-            <p:txBody>
-              <a:bodyPr wrap="square" rtlCol="0">
-                <a:spAutoFit/>
-              </a:bodyPr>
-              <a:lstStyle/>
-              <a:p>
-                <a:pPr algn="ctr"/>
-                <a:r>
-                  <a:rPr lang="en-US" b="1" dirty="0"/>
-                  <a:t>shallow</a:t>
-                </a:r>
-                <a:r>
-                  <a:rPr lang="en-US" dirty="0"/>
-                  <a:t> waveguide</a:t>
-                </a:r>
-              </a:p>
-              <a:p>
-                <a:pPr algn="ctr"/>
-                <a:r>
-                  <a:rPr lang="en-US" dirty="0" err="1"/>
-                  <a:t>slab_thickness</a:t>
-                </a:r>
-                <a:r>
-                  <a:rPr lang="en-US" dirty="0"/>
-                  <a:t> = 150 nm</a:t>
-                </a:r>
-              </a:p>
-              <a:p>
-                <a:pPr algn="ctr"/>
-                <a:endParaRPr lang="en-US" dirty="0"/>
-              </a:p>
-              <a:p>
-                <a:pPr algn="ctr"/>
-                <a:r>
-                  <a:rPr lang="en-US" dirty="0"/>
-                  <a:t>Paste </a:t>
-                </a:r>
-                <a14:m>
-                  <m:oMath xmlns:m="http://schemas.openxmlformats.org/officeDocument/2006/math">
-                    <m:r>
-                      <a:rPr lang="es-ES" i="1">
-                        <a:latin typeface="Cambria Math" panose="02040503050406030204" pitchFamily="18" charset="0"/>
-                      </a:rPr>
-                      <m:t>𝐾</m:t>
-                    </m:r>
-                  </m:oMath>
-                </a14:m>
-                <a:r>
-                  <a:rPr lang="en-US" dirty="0"/>
-                  <a:t> vs gap for 10 mm </a:t>
-                </a:r>
-                <a:r>
-                  <a:rPr lang="en-US" dirty="0" err="1"/>
-                  <a:t>wvgs</a:t>
-                </a:r>
-                <a:r>
-                  <a:rPr lang="en-US" dirty="0"/>
-                  <a:t> to be uncoupled</a:t>
-                </a:r>
-              </a:p>
-            </p:txBody>
-          </p:sp>
-        </mc:Choice>
-        <mc:Fallback>
-          <p:sp>
-            <p:nvSpPr>
-              <p:cNvPr id="10" name="CuadroTexto 9">
-                <a:extLst>
-                  <a:ext uri="{FF2B5EF4-FFF2-40B4-BE49-F238E27FC236}">
-                    <a16:creationId xmlns:a16="http://schemas.microsoft.com/office/drawing/2014/main" id="{32E39C0C-95E1-ED90-891A-5D634D9DB76B}"/>
-                  </a:ext>
-                </a:extLst>
-              </p:cNvPr>
-              <p:cNvSpPr txBox="1">
-                <a:spLocks noRot="1" noChangeAspect="1" noMove="1" noResize="1" noEditPoints="1" noAdjustHandles="1" noChangeArrowheads="1" noChangeShapeType="1" noTextEdit="1"/>
-              </p:cNvSpPr>
-              <p:nvPr/>
-            </p:nvSpPr>
-            <p:spPr>
-              <a:xfrm>
-                <a:off x="6883366" y="2480496"/>
-                <a:ext cx="4546634" cy="1477328"/>
-              </a:xfrm>
-              <a:prstGeom prst="rect">
-                <a:avLst/>
-              </a:prstGeom>
-              <a:blipFill>
-                <a:blip r:embed="rId6"/>
-                <a:stretch>
-                  <a:fillRect t="-2479" b="-5785"/>
-                </a:stretch>
-              </a:blipFill>
-            </p:spPr>
-            <p:txBody>
-              <a:bodyPr/>
-              <a:lstStyle/>
-              <a:p>
-                <a:r>
-                  <a:rPr lang="es-ES">
-                    <a:noFill/>
-                  </a:rPr>
-                  <a:t> </a:t>
-                </a:r>
-              </a:p>
-            </p:txBody>
-          </p:sp>
-        </mc:Fallback>
-      </mc:AlternateContent>
-    </p:spTree>
-    <p:extLst>
-      <p:ext uri="{BB962C8B-B14F-4D97-AF65-F5344CB8AC3E}">
-        <p14:creationId xmlns:p14="http://schemas.microsoft.com/office/powerpoint/2010/main" val="3712356003"/>
-      </p:ext>
-    </p:extLst>
-  </p:cSld>
-  <p:clrMapOvr>
-    <a:masterClrMapping/>
-  </p:clrMapOvr>
-</p:sld>
-</file>
-
-<file path=ppt/slides/slide8.xml><?xml version="1.0" encoding="utf-8"?>
-<p:sld xmlns:a="http://schemas.openxmlformats.org/drawingml/2006/main" xmlns:r="http://schemas.openxmlformats.org/officeDocument/2006/relationships" xmlns:p="http://schemas.openxmlformats.org/presentationml/2006/main">
-  <p:cSld>
-    <p:spTree>
-      <p:nvGrpSpPr>
-        <p:cNvPr id="1" name="">
-          <a:extLst>
-            <a:ext uri="{FF2B5EF4-FFF2-40B4-BE49-F238E27FC236}">
-              <a16:creationId xmlns:a16="http://schemas.microsoft.com/office/drawing/2014/main" id="{E43D4982-2E99-3EE0-CEBE-CEF54821C335}"/>
-            </a:ext>
-          </a:extLst>
-        </p:cNvPr>
-        <p:cNvGrpSpPr/>
-        <p:nvPr/>
-      </p:nvGrpSpPr>
-      <p:grpSpPr>
-        <a:xfrm>
-          <a:off x="0" y="0"/>
-          <a:ext cx="0" cy="0"/>
-          <a:chOff x="0" y="0"/>
-          <a:chExt cx="0" cy="0"/>
-        </a:xfrm>
-      </p:grpSpPr>
-      <p:sp>
-        <p:nvSpPr>
-          <p:cNvPr id="4" name="Marcador de pie de página 3">
-            <a:extLst>
-              <a:ext uri="{FF2B5EF4-FFF2-40B4-BE49-F238E27FC236}">
-                <a16:creationId xmlns:a16="http://schemas.microsoft.com/office/drawing/2014/main" id="{A60D29C4-F13C-8947-EF1D-2CBDDD14AC5C}"/>
-              </a:ext>
-            </a:extLst>
-          </p:cNvPr>
-          <p:cNvSpPr>
-            <a:spLocks noGrp="1"/>
-          </p:cNvSpPr>
-          <p:nvPr>
-            <p:ph type="ftr" sz="quarter" idx="5"/>
-          </p:nvPr>
-        </p:nvSpPr>
-        <p:spPr/>
-        <p:txBody>
-          <a:bodyPr/>
-          <a:lstStyle/>
-          <a:p>
-            <a:pPr marL="12700">
-              <a:spcBef>
-                <a:spcPts val="15"/>
-              </a:spcBef>
-            </a:pPr>
-            <a:r>
-              <a:rPr lang="es-ES" spc="-5"/>
-              <a:t>LAB 2.0. COUPLERS</a:t>
-            </a:r>
-            <a:endParaRPr lang="es-ES" spc="-5" dirty="0"/>
-          </a:p>
-        </p:txBody>
-      </p:sp>
-      <p:sp>
-        <p:nvSpPr>
-          <p:cNvPr id="5" name="Marcador de número de diapositiva 4">
-            <a:extLst>
-              <a:ext uri="{FF2B5EF4-FFF2-40B4-BE49-F238E27FC236}">
-                <a16:creationId xmlns:a16="http://schemas.microsoft.com/office/drawing/2014/main" id="{28A4EFD1-1AF6-F17D-1B27-5115800F99B0}"/>
-              </a:ext>
-            </a:extLst>
-          </p:cNvPr>
-          <p:cNvSpPr>
-            <a:spLocks noGrp="1"/>
-          </p:cNvSpPr>
-          <p:nvPr>
-            <p:ph type="sldNum" sz="quarter" idx="7"/>
-          </p:nvPr>
-        </p:nvSpPr>
-        <p:spPr/>
-        <p:txBody>
-          <a:bodyPr/>
-          <a:lstStyle/>
-          <a:p>
-            <a:fld id="{B6F15528-21DE-4FAA-801E-634DDDAF4B2B}" type="slidenum">
-              <a:rPr lang="es-ES" smtClean="0"/>
-              <a:t>8</a:t>
-            </a:fld>
-            <a:endParaRPr lang="es-ES"/>
-          </a:p>
-        </p:txBody>
-      </p:sp>
-      <p:sp>
-        <p:nvSpPr>
-          <p:cNvPr id="6" name="Título 4">
-            <a:extLst>
-              <a:ext uri="{FF2B5EF4-FFF2-40B4-BE49-F238E27FC236}">
-                <a16:creationId xmlns:a16="http://schemas.microsoft.com/office/drawing/2014/main" id="{8111062F-F9A0-241E-6CCB-6E8BE4D8C60A}"/>
-              </a:ext>
-            </a:extLst>
-          </p:cNvPr>
-          <p:cNvSpPr>
-            <a:spLocks noGrp="1"/>
-          </p:cNvSpPr>
-          <p:nvPr>
-            <p:ph type="body" idx="1"/>
-          </p:nvPr>
-        </p:nvSpPr>
-        <p:spPr>
-          <a:xfrm>
-            <a:off x="609600" y="2152650"/>
-            <a:ext cx="10972800" cy="430887"/>
-          </a:xfrm>
-        </p:spPr>
-        <p:txBody>
-          <a:bodyPr/>
-          <a:lstStyle/>
-          <a:p>
-            <a:pPr algn="ctr"/>
-            <a:r>
-              <a:rPr lang="en-US" sz="2800" b="1" dirty="0">
-                <a:effectLst>
-                  <a:outerShdw blurRad="38100" dist="38100" dir="2700000" algn="tl">
-                    <a:srgbClr val="000000">
-                      <a:alpha val="43137"/>
-                    </a:srgbClr>
-                  </a:outerShdw>
-                </a:effectLst>
-              </a:rPr>
-              <a:t>Multimode Interferometer (MMI) Coupler</a:t>
-            </a:r>
-          </a:p>
-        </p:txBody>
-      </p:sp>
-    </p:spTree>
-    <p:extLst>
-      <p:ext uri="{BB962C8B-B14F-4D97-AF65-F5344CB8AC3E}">
-        <p14:creationId xmlns:p14="http://schemas.microsoft.com/office/powerpoint/2010/main" val="3873318961"/>
-      </p:ext>
-    </p:extLst>
-  </p:cSld>
-  <p:clrMapOvr>
-    <a:masterClrMapping/>
-  </p:clrMapOvr>
-</p:sld>
-</file>
-
-<file path=ppt/slides/slide9.xml><?xml version="1.0" encoding="utf-8"?>
+<file path=ppt/slides/slide6.xml><?xml version="1.0" encoding="utf-8"?>
 <p:sld xmlns:a="http://schemas.openxmlformats.org/drawingml/2006/main" xmlns:r="http://schemas.openxmlformats.org/officeDocument/2006/relationships" xmlns:p="http://schemas.openxmlformats.org/presentationml/2006/main">
   <p:cSld>
     <p:spTree>
@@ -13320,7 +6373,7 @@
             </a:pPr>
             <a:r>
               <a:rPr lang="en-US" sz="2500" dirty="0"/>
-              <a:t>Learning outcome #5 – Multimode Interference (MMI) Coupler cross-section</a:t>
+              <a:t>Learning outcome #4 – Multimode Interference (MMI) Coupler cross-section</a:t>
             </a:r>
             <a:endParaRPr lang="en-US" sz="2500" b="0" dirty="0">
               <a:latin typeface="+mj-lt"/>
@@ -13344,10 +6397,10 @@
           <p:nvPr/>
         </p:nvPicPr>
         <p:blipFill>
-          <a:blip r:embed="rId3">
+          <a:blip>
             <a:extLst>
               <a:ext uri="{96DAC541-7B7A-43D3-8B79-37D633B846F1}">
-                <asvg:svgBlip xmlns:asvg="http://schemas.microsoft.com/office/drawing/2016/SVG/main" r:embed="rId4"/>
+                <asvg:svgBlip xmlns:asvg="http://schemas.microsoft.com/office/drawing/2016/SVG/main" r:embed="rId3"/>
               </a:ext>
             </a:extLst>
           </a:blip>
@@ -13388,7 +6441,7 @@
           <a:p>
             <a:fld id="{B6F15528-21DE-4FAA-801E-634DDDAF4B2B}" type="slidenum">
               <a:rPr lang="es-ES" smtClean="0"/>
-              <a:t>9</a:t>
+              <a:t>6</a:t>
             </a:fld>
             <a:endParaRPr lang="es-ES"/>
           </a:p>
@@ -13422,14 +6475,14 @@
             </a:pPr>
             <a:r>
               <a:rPr lang="es-ES" spc="-5"/>
-              <a:t>LAB 2.0. COUPLERS</a:t>
+              <a:t>LAB 0.2. COUPLERS</a:t>
             </a:r>
             <a:endParaRPr lang="es-ES" spc="-5" dirty="0"/>
           </a:p>
         </p:txBody>
       </p:sp>
-      <mc:AlternateContent xmlns:mc="http://schemas.openxmlformats.org/markup-compatibility/2006">
-        <mc:Choice xmlns:a14="http://schemas.microsoft.com/office/drawing/2010/main" Requires="a14">
+      <mc:AlternateContent xmlns:mc="http://schemas.openxmlformats.org/markup-compatibility/2006" xmlns:a14="http://schemas.microsoft.com/office/drawing/2010/main">
+        <mc:Choice Requires="a14">
           <p:sp>
             <p:nvSpPr>
               <p:cNvPr id="4" name="Marcador de texto 2">
@@ -13556,7 +6609,7 @@
                 </a:pPr>
                 <a:r>
                   <a:rPr lang="en-US" sz="2000" dirty="0"/>
-                  <a:t>Describe how to obtain the length </a:t>
+                  <a:t>Describe how to obtain the beating length </a:t>
                 </a:r>
                 <a14:m>
                   <m:oMath xmlns:m="http://schemas.openxmlformats.org/officeDocument/2006/math">
@@ -13605,7 +6658,7 @@
                 </a:pPr>
                 <a:r>
                   <a:rPr lang="en-US" sz="2000" b="1" dirty="0"/>
-                  <a:t>ALL EXAMPLE #2: </a:t>
+                  <a:t>ALL EXAMPLE #1: </a:t>
                 </a:r>
                 <a:r>
                   <a:rPr lang="en-US" sz="2000" dirty="0"/>
@@ -13650,7 +6703,7 @@
               </a:p>
               <a:p>
                 <a:pPr algn="just"/>
-                <a:endParaRPr lang="en-US" sz="2000" b="1" i="1" u="sng" dirty="0"/>
+                <a:endParaRPr lang="en-US" sz="2000" b="1" i="1" dirty="0"/>
               </a:p>
               <a:p>
                 <a:pPr algn="just"/>
@@ -13663,7 +6716,7 @@
             </p:txBody>
           </p:sp>
         </mc:Choice>
-        <mc:Fallback>
+        <mc:Fallback xmlns="">
           <p:sp>
             <p:nvSpPr>
               <p:cNvPr id="4" name="Marcador de texto 2">
@@ -13819,9 +6872,954 @@
     </p:spTree>
     <p:extLst>
       <p:ext uri="{BB962C8B-B14F-4D97-AF65-F5344CB8AC3E}">
-        <p14:creationId xmlns:p14="http://schemas.microsoft.com/office/powerpoint/2010/main" val="1802451501"/>
+        <p14:creationId xmlns:p14="http://schemas.microsoft.com/office/powerpoint/2010/main" val="3660438245"/>
       </p:ext>
     </p:extLst>
+  </p:cSld>
+  <p:clrMapOvr>
+    <a:masterClrMapping/>
+  </p:clrMapOvr>
+</p:sld>
+</file>
+
+<file path=ppt/slides/slide7.xml><?xml version="1.0" encoding="utf-8"?>
+<p:sld xmlns:a="http://schemas.openxmlformats.org/drawingml/2006/main" xmlns:r="http://schemas.openxmlformats.org/officeDocument/2006/relationships" xmlns:p="http://schemas.openxmlformats.org/presentationml/2006/main">
+  <p:cSld>
+    <p:spTree>
+      <p:nvGrpSpPr>
+        <p:cNvPr id="1" name="">
+          <a:extLst>
+            <a:ext uri="{FF2B5EF4-FFF2-40B4-BE49-F238E27FC236}">
+              <a16:creationId xmlns:a16="http://schemas.microsoft.com/office/drawing/2014/main" id="{91BF7C0E-2677-BADF-D636-6F9B71E665FA}"/>
+            </a:ext>
+          </a:extLst>
+        </p:cNvPr>
+        <p:cNvGrpSpPr/>
+        <p:nvPr/>
+      </p:nvGrpSpPr>
+      <p:grpSpPr>
+        <a:xfrm>
+          <a:off x="0" y="0"/>
+          <a:ext cx="0" cy="0"/>
+          <a:chOff x="0" y="0"/>
+          <a:chExt cx="0" cy="0"/>
+        </a:xfrm>
+      </p:grpSpPr>
+      <p:sp>
+        <p:nvSpPr>
+          <p:cNvPr id="16" name="object 16">
+            <a:extLst>
+              <a:ext uri="{FF2B5EF4-FFF2-40B4-BE49-F238E27FC236}">
+                <a16:creationId xmlns:a16="http://schemas.microsoft.com/office/drawing/2014/main" id="{2B8D44BF-A3B5-6BED-C39C-FA8260E83536}"/>
+              </a:ext>
+            </a:extLst>
+          </p:cNvPr>
+          <p:cNvSpPr txBox="1">
+            <a:spLocks noGrp="1"/>
+          </p:cNvSpPr>
+          <p:nvPr>
+            <p:ph type="title"/>
+          </p:nvPr>
+        </p:nvSpPr>
+        <p:spPr>
+          <a:xfrm>
+            <a:off x="685800" y="408883"/>
+            <a:ext cx="10994410" cy="705321"/>
+          </a:xfrm>
+          <a:prstGeom prst="rect">
+            <a:avLst/>
+          </a:prstGeom>
+        </p:spPr>
+        <p:txBody>
+          <a:bodyPr vert="horz" wrap="square" lIns="0" tIns="12700" rIns="0" bIns="0" rtlCol="0">
+            <a:spAutoFit/>
+          </a:bodyPr>
+          <a:lstStyle/>
+          <a:p>
+            <a:pPr marL="12700">
+              <a:lnSpc>
+                <a:spcPct val="100000"/>
+              </a:lnSpc>
+              <a:spcBef>
+                <a:spcPts val="100"/>
+              </a:spcBef>
+            </a:pPr>
+            <a:r>
+              <a:rPr lang="en-US" sz="2500" dirty="0"/>
+              <a:t>Learning outcome #5 – 2x2 Multimode Interference Coupler </a:t>
+            </a:r>
+            <a:br>
+              <a:rPr lang="en-US" sz="2500" dirty="0"/>
+            </a:br>
+            <a:r>
+              <a:rPr lang="en-US" b="0" dirty="0"/>
+              <a:t>Body width 6 µm and 12 µm – Wavelength 1.55 µm </a:t>
+            </a:r>
+            <a:endParaRPr lang="en-US" sz="2500" b="0" dirty="0">
+              <a:latin typeface="+mj-lt"/>
+              <a:cs typeface="Lucida Sans"/>
+            </a:endParaRPr>
+          </a:p>
+        </p:txBody>
+      </p:sp>
+      <p:pic>
+        <p:nvPicPr>
+          <p:cNvPr id="83" name="Gráfico 82">
+            <a:extLst>
+              <a:ext uri="{FF2B5EF4-FFF2-40B4-BE49-F238E27FC236}">
+                <a16:creationId xmlns:a16="http://schemas.microsoft.com/office/drawing/2014/main" id="{5DFCF1AD-6B06-F914-AC0B-80F0ED838EF9}"/>
+              </a:ext>
+            </a:extLst>
+          </p:cNvPr>
+          <p:cNvPicPr>
+            <a:picLocks noChangeAspect="1"/>
+          </p:cNvPicPr>
+          <p:nvPr/>
+        </p:nvPicPr>
+        <p:blipFill>
+          <a:blip>
+            <a:extLst>
+              <a:ext uri="{96DAC541-7B7A-43D3-8B79-37D633B846F1}">
+                <asvg:svgBlip xmlns:asvg="http://schemas.microsoft.com/office/drawing/2016/SVG/main" r:embed="rId3"/>
+              </a:ext>
+            </a:extLst>
+          </a:blip>
+          <a:stretch>
+            <a:fillRect/>
+          </a:stretch>
+        </p:blipFill>
+        <p:spPr>
+          <a:xfrm>
+            <a:off x="5045006" y="6356057"/>
+            <a:ext cx="6409575" cy="363174"/>
+          </a:xfrm>
+          <a:prstGeom prst="rect">
+            <a:avLst/>
+          </a:prstGeom>
+        </p:spPr>
+      </p:pic>
+      <p:sp>
+        <p:nvSpPr>
+          <p:cNvPr id="84" name="Marcador de número de diapositiva 83">
+            <a:extLst>
+              <a:ext uri="{FF2B5EF4-FFF2-40B4-BE49-F238E27FC236}">
+                <a16:creationId xmlns:a16="http://schemas.microsoft.com/office/drawing/2014/main" id="{4A656CCE-66E0-EAE0-5C63-DF1315DF6299}"/>
+              </a:ext>
+            </a:extLst>
+          </p:cNvPr>
+          <p:cNvSpPr>
+            <a:spLocks noGrp="1"/>
+          </p:cNvSpPr>
+          <p:nvPr>
+            <p:ph type="sldNum" sz="quarter" idx="7"/>
+          </p:nvPr>
+        </p:nvSpPr>
+        <p:spPr/>
+        <p:txBody>
+          <a:bodyPr/>
+          <a:lstStyle/>
+          <a:p>
+            <a:fld id="{B6F15528-21DE-4FAA-801E-634DDDAF4B2B}" type="slidenum">
+              <a:rPr lang="es-ES" smtClean="0"/>
+              <a:t>7</a:t>
+            </a:fld>
+            <a:endParaRPr lang="es-ES"/>
+          </a:p>
+        </p:txBody>
+      </p:sp>
+      <p:sp>
+        <p:nvSpPr>
+          <p:cNvPr id="3" name="Marcador de pie de página 2">
+            <a:extLst>
+              <a:ext uri="{FF2B5EF4-FFF2-40B4-BE49-F238E27FC236}">
+                <a16:creationId xmlns:a16="http://schemas.microsoft.com/office/drawing/2014/main" id="{D3AB6581-C493-80EB-A67F-5289454DAA28}"/>
+              </a:ext>
+            </a:extLst>
+          </p:cNvPr>
+          <p:cNvSpPr>
+            <a:spLocks noGrp="1"/>
+          </p:cNvSpPr>
+          <p:nvPr>
+            <p:ph type="ftr" sz="quarter" idx="5"/>
+          </p:nvPr>
+        </p:nvSpPr>
+        <p:spPr/>
+        <p:txBody>
+          <a:bodyPr/>
+          <a:lstStyle/>
+          <a:p>
+            <a:pPr marL="12700">
+              <a:spcBef>
+                <a:spcPts val="15"/>
+              </a:spcBef>
+            </a:pPr>
+            <a:r>
+              <a:rPr lang="es-ES" spc="-5"/>
+              <a:t>LAB 0.2. COUPLERS</a:t>
+            </a:r>
+            <a:endParaRPr lang="es-ES" spc="-5" dirty="0"/>
+          </a:p>
+        </p:txBody>
+      </p:sp>
+      <p:sp>
+        <p:nvSpPr>
+          <p:cNvPr id="2" name="CuadroTexto 1">
+            <a:extLst>
+              <a:ext uri="{FF2B5EF4-FFF2-40B4-BE49-F238E27FC236}">
+                <a16:creationId xmlns:a16="http://schemas.microsoft.com/office/drawing/2014/main" id="{B5029729-ADF3-3B30-4FF9-83BE1DB82BD7}"/>
+              </a:ext>
+            </a:extLst>
+          </p:cNvPr>
+          <p:cNvSpPr txBox="1"/>
+          <p:nvPr/>
+        </p:nvSpPr>
+        <p:spPr>
+          <a:xfrm>
+            <a:off x="609441" y="4860334"/>
+            <a:ext cx="11199971" cy="1200329"/>
+          </a:xfrm>
+          <a:prstGeom prst="rect">
+            <a:avLst/>
+          </a:prstGeom>
+          <a:solidFill>
+            <a:schemeClr val="bg1">
+              <a:lumMod val="95000"/>
+            </a:schemeClr>
+          </a:solidFill>
+          <a:ln w="28575">
+            <a:solidFill>
+              <a:srgbClr val="E0700D"/>
+            </a:solidFill>
+          </a:ln>
+        </p:spPr>
+        <p:txBody>
+          <a:bodyPr wrap="square" rtlCol="0">
+            <a:spAutoFit/>
+          </a:bodyPr>
+          <a:lstStyle/>
+          <a:p>
+            <a:pPr algn="just"/>
+            <a:r>
+              <a:rPr lang="en-US" sz="1200" dirty="0">
+                <a:latin typeface="Arial" panose="020B0604020202020204" pitchFamily="34" charset="0"/>
+                <a:cs typeface="Arial" panose="020B0604020202020204" pitchFamily="34" charset="0"/>
+              </a:rPr>
+              <a:t>Comment results (Coupling relationship, </a:t>
+            </a:r>
+            <a:r>
+              <a:rPr lang="en-US" sz="1200" dirty="0" err="1">
+                <a:latin typeface="Arial" panose="020B0604020202020204" pitchFamily="34" charset="0"/>
+                <a:cs typeface="Arial" panose="020B0604020202020204" pitchFamily="34" charset="0"/>
+              </a:rPr>
+              <a:t>Lpi</a:t>
+            </a:r>
+            <a:r>
+              <a:rPr lang="en-US" sz="1200" dirty="0">
+                <a:latin typeface="Arial" panose="020B0604020202020204" pitchFamily="34" charset="0"/>
+                <a:cs typeface="Arial" panose="020B0604020202020204" pitchFamily="34" charset="0"/>
+              </a:rPr>
+              <a:t>,  losses, comparison with Directional Coupler… )</a:t>
+            </a:r>
+          </a:p>
+          <a:p>
+            <a:pPr algn="just"/>
+            <a:endParaRPr lang="en-US" sz="1200" dirty="0">
+              <a:latin typeface="Arial" panose="020B0604020202020204" pitchFamily="34" charset="0"/>
+              <a:cs typeface="Arial" panose="020B0604020202020204" pitchFamily="34" charset="0"/>
+            </a:endParaRPr>
+          </a:p>
+          <a:p>
+            <a:pPr algn="just"/>
+            <a:endParaRPr lang="en-US" sz="1200" dirty="0">
+              <a:latin typeface="Arial" panose="020B0604020202020204" pitchFamily="34" charset="0"/>
+              <a:cs typeface="Arial" panose="020B0604020202020204" pitchFamily="34" charset="0"/>
+            </a:endParaRPr>
+          </a:p>
+          <a:p>
+            <a:pPr algn="just"/>
+            <a:endParaRPr lang="en-US" sz="1200" dirty="0">
+              <a:latin typeface="Arial" panose="020B0604020202020204" pitchFamily="34" charset="0"/>
+              <a:cs typeface="Arial" panose="020B0604020202020204" pitchFamily="34" charset="0"/>
+            </a:endParaRPr>
+          </a:p>
+          <a:p>
+            <a:pPr algn="just"/>
+            <a:endParaRPr lang="en-US" sz="1200" dirty="0">
+              <a:latin typeface="Arial" panose="020B0604020202020204" pitchFamily="34" charset="0"/>
+              <a:cs typeface="Arial" panose="020B0604020202020204" pitchFamily="34" charset="0"/>
+            </a:endParaRPr>
+          </a:p>
+          <a:p>
+            <a:pPr algn="just"/>
+            <a:endParaRPr lang="en-US" sz="1200" dirty="0">
+              <a:latin typeface="Arial" panose="020B0604020202020204" pitchFamily="34" charset="0"/>
+              <a:cs typeface="Arial" panose="020B0604020202020204" pitchFamily="34" charset="0"/>
+            </a:endParaRPr>
+          </a:p>
+        </p:txBody>
+      </p:sp>
+      <p:sp>
+        <p:nvSpPr>
+          <p:cNvPr id="7" name="Rectángulo 6">
+            <a:extLst>
+              <a:ext uri="{FF2B5EF4-FFF2-40B4-BE49-F238E27FC236}">
+                <a16:creationId xmlns:a16="http://schemas.microsoft.com/office/drawing/2014/main" id="{98DE5FDA-4E91-E843-E84A-1467BFAA9986}"/>
+              </a:ext>
+            </a:extLst>
+          </p:cNvPr>
+          <p:cNvSpPr/>
+          <p:nvPr/>
+        </p:nvSpPr>
+        <p:spPr>
+          <a:xfrm>
+            <a:off x="609441" y="1418373"/>
+            <a:ext cx="11199971" cy="3306028"/>
+          </a:xfrm>
+          <a:prstGeom prst="rect">
+            <a:avLst/>
+          </a:prstGeom>
+          <a:noFill/>
+          <a:ln w="28575">
+            <a:solidFill>
+              <a:srgbClr val="E0700D"/>
+            </a:solidFill>
+          </a:ln>
+        </p:spPr>
+        <p:style>
+          <a:lnRef idx="2">
+            <a:schemeClr val="accent1">
+              <a:shade val="15000"/>
+            </a:schemeClr>
+          </a:lnRef>
+          <a:fillRef idx="1">
+            <a:schemeClr val="accent1"/>
+          </a:fillRef>
+          <a:effectRef idx="0">
+            <a:schemeClr val="accent1"/>
+          </a:effectRef>
+          <a:fontRef idx="minor">
+            <a:schemeClr val="lt1"/>
+          </a:fontRef>
+        </p:style>
+        <p:txBody>
+          <a:bodyPr rtlCol="0" anchor="ctr"/>
+          <a:lstStyle/>
+          <a:p>
+            <a:pPr algn="ctr"/>
+            <a:endParaRPr lang="en-US"/>
+          </a:p>
+        </p:txBody>
+      </p:sp>
+      <p:sp>
+        <p:nvSpPr>
+          <p:cNvPr id="8" name="CuadroTexto 7">
+            <a:extLst>
+              <a:ext uri="{FF2B5EF4-FFF2-40B4-BE49-F238E27FC236}">
+                <a16:creationId xmlns:a16="http://schemas.microsoft.com/office/drawing/2014/main" id="{0DA14DBA-172E-DA2C-0573-6A00BF18F4A5}"/>
+              </a:ext>
+            </a:extLst>
+          </p:cNvPr>
+          <p:cNvSpPr txBox="1"/>
+          <p:nvPr/>
+        </p:nvSpPr>
+        <p:spPr>
+          <a:xfrm>
+            <a:off x="2286000" y="2671278"/>
+            <a:ext cx="7718580" cy="923330"/>
+          </a:xfrm>
+          <a:prstGeom prst="rect">
+            <a:avLst/>
+          </a:prstGeom>
+          <a:noFill/>
+        </p:spPr>
+        <p:txBody>
+          <a:bodyPr wrap="square" rtlCol="0">
+            <a:spAutoFit/>
+          </a:bodyPr>
+          <a:lstStyle/>
+          <a:p>
+            <a:pPr algn="ctr"/>
+            <a:r>
+              <a:rPr lang="en-US" b="1" dirty="0"/>
+              <a:t>deep</a:t>
+            </a:r>
+            <a:r>
+              <a:rPr lang="en-US" dirty="0"/>
+              <a:t> waveguide</a:t>
+            </a:r>
+          </a:p>
+          <a:p>
+            <a:pPr algn="ctr"/>
+            <a:endParaRPr lang="en-US" dirty="0"/>
+          </a:p>
+          <a:p>
+            <a:pPr algn="ctr"/>
+            <a:r>
+              <a:rPr lang="en-US" dirty="0"/>
+              <a:t>Paste propagation plots and output text here</a:t>
+            </a:r>
+          </a:p>
+        </p:txBody>
+      </p:sp>
+    </p:spTree>
+    <p:extLst>
+      <p:ext uri="{BB962C8B-B14F-4D97-AF65-F5344CB8AC3E}">
+        <p14:creationId xmlns:p14="http://schemas.microsoft.com/office/powerpoint/2010/main" val="2815679427"/>
+      </p:ext>
+    </p:extLst>
+  </p:cSld>
+  <p:clrMapOvr>
+    <a:masterClrMapping/>
+  </p:clrMapOvr>
+</p:sld>
+</file>
+
+<file path=ppt/slides/slide8.xml><?xml version="1.0" encoding="utf-8"?>
+<p:sld xmlns:a="http://schemas.openxmlformats.org/drawingml/2006/main" xmlns:r="http://schemas.openxmlformats.org/officeDocument/2006/relationships" xmlns:p="http://schemas.openxmlformats.org/presentationml/2006/main">
+  <p:cSld>
+    <p:spTree>
+      <p:nvGrpSpPr>
+        <p:cNvPr id="1" name="">
+          <a:extLst>
+            <a:ext uri="{FF2B5EF4-FFF2-40B4-BE49-F238E27FC236}">
+              <a16:creationId xmlns:a16="http://schemas.microsoft.com/office/drawing/2014/main" id="{200A1363-C83E-82B6-7BDE-AD2801F8B66D}"/>
+            </a:ext>
+          </a:extLst>
+        </p:cNvPr>
+        <p:cNvGrpSpPr/>
+        <p:nvPr/>
+      </p:nvGrpSpPr>
+      <p:grpSpPr>
+        <a:xfrm>
+          <a:off x="0" y="0"/>
+          <a:ext cx="0" cy="0"/>
+          <a:chOff x="0" y="0"/>
+          <a:chExt cx="0" cy="0"/>
+        </a:xfrm>
+      </p:grpSpPr>
+      <p:sp>
+        <p:nvSpPr>
+          <p:cNvPr id="16" name="object 16">
+            <a:extLst>
+              <a:ext uri="{FF2B5EF4-FFF2-40B4-BE49-F238E27FC236}">
+                <a16:creationId xmlns:a16="http://schemas.microsoft.com/office/drawing/2014/main" id="{1E256546-3103-104D-A87F-78AEBE5D595E}"/>
+              </a:ext>
+            </a:extLst>
+          </p:cNvPr>
+          <p:cNvSpPr txBox="1">
+            <a:spLocks noGrp="1"/>
+          </p:cNvSpPr>
+          <p:nvPr>
+            <p:ph type="title"/>
+          </p:nvPr>
+        </p:nvSpPr>
+        <p:spPr>
+          <a:xfrm>
+            <a:off x="685800" y="408883"/>
+            <a:ext cx="10994410" cy="705321"/>
+          </a:xfrm>
+          <a:prstGeom prst="rect">
+            <a:avLst/>
+          </a:prstGeom>
+        </p:spPr>
+        <p:txBody>
+          <a:bodyPr vert="horz" wrap="square" lIns="0" tIns="12700" rIns="0" bIns="0" rtlCol="0">
+            <a:spAutoFit/>
+          </a:bodyPr>
+          <a:lstStyle/>
+          <a:p>
+            <a:pPr marL="12700">
+              <a:lnSpc>
+                <a:spcPct val="100000"/>
+              </a:lnSpc>
+              <a:spcBef>
+                <a:spcPts val="100"/>
+              </a:spcBef>
+            </a:pPr>
+            <a:r>
+              <a:rPr lang="en-US" sz="2500" dirty="0"/>
+              <a:t>Learning outcome #6 – 1x4 Multimode Interference Coupler </a:t>
+            </a:r>
+            <a:br>
+              <a:rPr lang="en-US" sz="2500" dirty="0"/>
+            </a:br>
+            <a:r>
+              <a:rPr lang="en-US" b="0" dirty="0"/>
+              <a:t>Wavelength 1.55 µm, </a:t>
+            </a:r>
+            <a:r>
+              <a:rPr lang="en-US" b="0" dirty="0" err="1"/>
+              <a:t>wMMI</a:t>
+            </a:r>
+            <a:r>
+              <a:rPr lang="en-US" b="0" dirty="0"/>
+              <a:t> = ? µm</a:t>
+            </a:r>
+            <a:endParaRPr lang="en-US" sz="2500" b="0" dirty="0">
+              <a:latin typeface="+mj-lt"/>
+              <a:cs typeface="Lucida Sans"/>
+            </a:endParaRPr>
+          </a:p>
+        </p:txBody>
+      </p:sp>
+      <p:pic>
+        <p:nvPicPr>
+          <p:cNvPr id="83" name="Gráfico 82">
+            <a:extLst>
+              <a:ext uri="{FF2B5EF4-FFF2-40B4-BE49-F238E27FC236}">
+                <a16:creationId xmlns:a16="http://schemas.microsoft.com/office/drawing/2014/main" id="{4BFCA3D8-29F6-7091-7099-77888A9F863B}"/>
+              </a:ext>
+            </a:extLst>
+          </p:cNvPr>
+          <p:cNvPicPr>
+            <a:picLocks noChangeAspect="1"/>
+          </p:cNvPicPr>
+          <p:nvPr/>
+        </p:nvPicPr>
+        <p:blipFill>
+          <a:blip>
+            <a:extLst>
+              <a:ext uri="{96DAC541-7B7A-43D3-8B79-37D633B846F1}">
+                <asvg:svgBlip xmlns:asvg="http://schemas.microsoft.com/office/drawing/2016/SVG/main" r:embed="rId3"/>
+              </a:ext>
+            </a:extLst>
+          </a:blip>
+          <a:stretch>
+            <a:fillRect/>
+          </a:stretch>
+        </p:blipFill>
+        <p:spPr>
+          <a:xfrm>
+            <a:off x="5045006" y="6356057"/>
+            <a:ext cx="6409575" cy="363174"/>
+          </a:xfrm>
+          <a:prstGeom prst="rect">
+            <a:avLst/>
+          </a:prstGeom>
+        </p:spPr>
+      </p:pic>
+      <p:sp>
+        <p:nvSpPr>
+          <p:cNvPr id="84" name="Marcador de número de diapositiva 83">
+            <a:extLst>
+              <a:ext uri="{FF2B5EF4-FFF2-40B4-BE49-F238E27FC236}">
+                <a16:creationId xmlns:a16="http://schemas.microsoft.com/office/drawing/2014/main" id="{42E75535-0FBC-4C5F-9AC5-7008914FCF56}"/>
+              </a:ext>
+            </a:extLst>
+          </p:cNvPr>
+          <p:cNvSpPr>
+            <a:spLocks noGrp="1"/>
+          </p:cNvSpPr>
+          <p:nvPr>
+            <p:ph type="sldNum" sz="quarter" idx="7"/>
+          </p:nvPr>
+        </p:nvSpPr>
+        <p:spPr/>
+        <p:txBody>
+          <a:bodyPr/>
+          <a:lstStyle/>
+          <a:p>
+            <a:fld id="{B6F15528-21DE-4FAA-801E-634DDDAF4B2B}" type="slidenum">
+              <a:rPr lang="es-ES" smtClean="0"/>
+              <a:t>8</a:t>
+            </a:fld>
+            <a:endParaRPr lang="es-ES"/>
+          </a:p>
+        </p:txBody>
+      </p:sp>
+      <p:sp>
+        <p:nvSpPr>
+          <p:cNvPr id="3" name="Marcador de pie de página 2">
+            <a:extLst>
+              <a:ext uri="{FF2B5EF4-FFF2-40B4-BE49-F238E27FC236}">
+                <a16:creationId xmlns:a16="http://schemas.microsoft.com/office/drawing/2014/main" id="{07AC2AFF-A7D9-EBCD-7C5A-6CDF61B69366}"/>
+              </a:ext>
+            </a:extLst>
+          </p:cNvPr>
+          <p:cNvSpPr>
+            <a:spLocks noGrp="1"/>
+          </p:cNvSpPr>
+          <p:nvPr>
+            <p:ph type="ftr" sz="quarter" idx="5"/>
+          </p:nvPr>
+        </p:nvSpPr>
+        <p:spPr/>
+        <p:txBody>
+          <a:bodyPr/>
+          <a:lstStyle/>
+          <a:p>
+            <a:pPr marL="12700">
+              <a:spcBef>
+                <a:spcPts val="15"/>
+              </a:spcBef>
+            </a:pPr>
+            <a:r>
+              <a:rPr lang="es-ES" spc="-5"/>
+              <a:t>LAB 2.0. COUPLERS</a:t>
+            </a:r>
+            <a:endParaRPr lang="es-ES" spc="-5" dirty="0"/>
+          </a:p>
+        </p:txBody>
+      </p:sp>
+      <p:sp>
+        <p:nvSpPr>
+          <p:cNvPr id="2" name="CuadroTexto 1">
+            <a:extLst>
+              <a:ext uri="{FF2B5EF4-FFF2-40B4-BE49-F238E27FC236}">
+                <a16:creationId xmlns:a16="http://schemas.microsoft.com/office/drawing/2014/main" id="{42D73A2E-0E5A-8A39-6B70-F9E94D6DBB70}"/>
+              </a:ext>
+            </a:extLst>
+          </p:cNvPr>
+          <p:cNvSpPr txBox="1"/>
+          <p:nvPr/>
+        </p:nvSpPr>
+        <p:spPr>
+          <a:xfrm>
+            <a:off x="609441" y="4819471"/>
+            <a:ext cx="11199971" cy="1200329"/>
+          </a:xfrm>
+          <a:prstGeom prst="rect">
+            <a:avLst/>
+          </a:prstGeom>
+          <a:solidFill>
+            <a:schemeClr val="bg1">
+              <a:lumMod val="95000"/>
+            </a:schemeClr>
+          </a:solidFill>
+          <a:ln w="28575">
+            <a:solidFill>
+              <a:srgbClr val="E0700D"/>
+            </a:solidFill>
+          </a:ln>
+        </p:spPr>
+        <p:txBody>
+          <a:bodyPr wrap="square" rtlCol="0">
+            <a:spAutoFit/>
+          </a:bodyPr>
+          <a:lstStyle/>
+          <a:p>
+            <a:pPr algn="just"/>
+            <a:r>
+              <a:rPr lang="en-US" sz="1200" dirty="0">
+                <a:latin typeface="Arial" panose="020B0604020202020204" pitchFamily="34" charset="0"/>
+                <a:cs typeface="Arial" panose="020B0604020202020204" pitchFamily="34" charset="0"/>
+              </a:rPr>
+              <a:t>Repeat all the design </a:t>
+            </a:r>
+            <a:r>
+              <a:rPr lang="en-US" sz="1200">
+                <a:latin typeface="Arial" panose="020B0604020202020204" pitchFamily="34" charset="0"/>
+                <a:cs typeface="Arial" panose="020B0604020202020204" pitchFamily="34" charset="0"/>
+              </a:rPr>
+              <a:t>process for a </a:t>
+            </a:r>
+            <a:r>
+              <a:rPr lang="en-US" sz="1200" dirty="0">
+                <a:latin typeface="Arial" panose="020B0604020202020204" pitchFamily="34" charset="0"/>
+                <a:cs typeface="Arial" panose="020B0604020202020204" pitchFamily="34" charset="0"/>
+              </a:rPr>
+              <a:t>1x4 MMI Coupler.  </a:t>
+            </a:r>
+          </a:p>
+          <a:p>
+            <a:pPr algn="just"/>
+            <a:endParaRPr lang="en-US" sz="1200" dirty="0">
+              <a:latin typeface="Arial" panose="020B0604020202020204" pitchFamily="34" charset="0"/>
+              <a:cs typeface="Arial" panose="020B0604020202020204" pitchFamily="34" charset="0"/>
+            </a:endParaRPr>
+          </a:p>
+          <a:p>
+            <a:pPr algn="just"/>
+            <a:endParaRPr lang="en-US" sz="1200" dirty="0">
+              <a:latin typeface="Arial" panose="020B0604020202020204" pitchFamily="34" charset="0"/>
+              <a:cs typeface="Arial" panose="020B0604020202020204" pitchFamily="34" charset="0"/>
+            </a:endParaRPr>
+          </a:p>
+          <a:p>
+            <a:pPr algn="just"/>
+            <a:endParaRPr lang="en-US" sz="1200" dirty="0">
+              <a:latin typeface="Arial" panose="020B0604020202020204" pitchFamily="34" charset="0"/>
+              <a:cs typeface="Arial" panose="020B0604020202020204" pitchFamily="34" charset="0"/>
+            </a:endParaRPr>
+          </a:p>
+          <a:p>
+            <a:pPr algn="just"/>
+            <a:endParaRPr lang="en-US" sz="1200" dirty="0">
+              <a:latin typeface="Arial" panose="020B0604020202020204" pitchFamily="34" charset="0"/>
+              <a:cs typeface="Arial" panose="020B0604020202020204" pitchFamily="34" charset="0"/>
+            </a:endParaRPr>
+          </a:p>
+          <a:p>
+            <a:pPr algn="just"/>
+            <a:endParaRPr lang="en-US" sz="1200" dirty="0">
+              <a:latin typeface="Arial" panose="020B0604020202020204" pitchFamily="34" charset="0"/>
+              <a:cs typeface="Arial" panose="020B0604020202020204" pitchFamily="34" charset="0"/>
+            </a:endParaRPr>
+          </a:p>
+        </p:txBody>
+      </p:sp>
+      <p:sp>
+        <p:nvSpPr>
+          <p:cNvPr id="7" name="Rectángulo 6">
+            <a:extLst>
+              <a:ext uri="{FF2B5EF4-FFF2-40B4-BE49-F238E27FC236}">
+                <a16:creationId xmlns:a16="http://schemas.microsoft.com/office/drawing/2014/main" id="{AFB86587-21D4-5A33-7D00-DDF170C919BA}"/>
+              </a:ext>
+            </a:extLst>
+          </p:cNvPr>
+          <p:cNvSpPr/>
+          <p:nvPr/>
+        </p:nvSpPr>
+        <p:spPr>
+          <a:xfrm>
+            <a:off x="609441" y="1377510"/>
+            <a:ext cx="11199971" cy="3306028"/>
+          </a:xfrm>
+          <a:prstGeom prst="rect">
+            <a:avLst/>
+          </a:prstGeom>
+          <a:noFill/>
+          <a:ln w="28575">
+            <a:solidFill>
+              <a:srgbClr val="E0700D"/>
+            </a:solidFill>
+          </a:ln>
+        </p:spPr>
+        <p:style>
+          <a:lnRef idx="2">
+            <a:schemeClr val="accent1">
+              <a:shade val="15000"/>
+            </a:schemeClr>
+          </a:lnRef>
+          <a:fillRef idx="1">
+            <a:schemeClr val="accent1"/>
+          </a:fillRef>
+          <a:effectRef idx="0">
+            <a:schemeClr val="accent1"/>
+          </a:effectRef>
+          <a:fontRef idx="minor">
+            <a:schemeClr val="lt1"/>
+          </a:fontRef>
+        </p:style>
+        <p:txBody>
+          <a:bodyPr rtlCol="0" anchor="ctr"/>
+          <a:lstStyle/>
+          <a:p>
+            <a:pPr algn="ctr"/>
+            <a:endParaRPr lang="en-US"/>
+          </a:p>
+        </p:txBody>
+      </p:sp>
+      <p:sp>
+        <p:nvSpPr>
+          <p:cNvPr id="8" name="CuadroTexto 7">
+            <a:extLst>
+              <a:ext uri="{FF2B5EF4-FFF2-40B4-BE49-F238E27FC236}">
+                <a16:creationId xmlns:a16="http://schemas.microsoft.com/office/drawing/2014/main" id="{C3506757-32B7-9151-DA89-AADDB7F7D093}"/>
+              </a:ext>
+            </a:extLst>
+          </p:cNvPr>
+          <p:cNvSpPr txBox="1"/>
+          <p:nvPr/>
+        </p:nvSpPr>
+        <p:spPr>
+          <a:xfrm>
+            <a:off x="2286000" y="2630415"/>
+            <a:ext cx="7718580" cy="923330"/>
+          </a:xfrm>
+          <a:prstGeom prst="rect">
+            <a:avLst/>
+          </a:prstGeom>
+          <a:noFill/>
+        </p:spPr>
+        <p:txBody>
+          <a:bodyPr wrap="square" rtlCol="0">
+            <a:spAutoFit/>
+          </a:bodyPr>
+          <a:lstStyle/>
+          <a:p>
+            <a:pPr algn="ctr"/>
+            <a:r>
+              <a:rPr lang="en-US" b="1" dirty="0"/>
+              <a:t>deep</a:t>
+            </a:r>
+            <a:r>
+              <a:rPr lang="en-US" dirty="0"/>
+              <a:t> waveguide</a:t>
+            </a:r>
+          </a:p>
+          <a:p>
+            <a:pPr algn="ctr"/>
+            <a:endParaRPr lang="en-US" dirty="0"/>
+          </a:p>
+          <a:p>
+            <a:pPr algn="ctr"/>
+            <a:r>
+              <a:rPr lang="en-US" dirty="0"/>
+              <a:t>Paste propagation plots and console results</a:t>
+            </a:r>
+          </a:p>
+        </p:txBody>
+      </p:sp>
+    </p:spTree>
+    <p:extLst>
+      <p:ext uri="{BB962C8B-B14F-4D97-AF65-F5344CB8AC3E}">
+        <p14:creationId xmlns:p14="http://schemas.microsoft.com/office/powerpoint/2010/main" val="699864314"/>
+      </p:ext>
+    </p:extLst>
+  </p:cSld>
+  <p:clrMapOvr>
+    <a:masterClrMapping/>
+  </p:clrMapOvr>
+</p:sld>
+</file>
+
+<file path=ppt/slides/slide9.xml><?xml version="1.0" encoding="utf-8"?>
+<p:sld xmlns:a="http://schemas.openxmlformats.org/drawingml/2006/main" xmlns:r="http://schemas.openxmlformats.org/officeDocument/2006/relationships" xmlns:p="http://schemas.openxmlformats.org/presentationml/2006/main">
+  <p:cSld>
+    <p:spTree>
+      <p:nvGrpSpPr>
+        <p:cNvPr id="1" name=""/>
+        <p:cNvGrpSpPr/>
+        <p:nvPr/>
+      </p:nvGrpSpPr>
+      <p:grpSpPr>
+        <a:xfrm>
+          <a:off x="0" y="0"/>
+          <a:ext cx="0" cy="0"/>
+          <a:chOff x="0" y="0"/>
+          <a:chExt cx="0" cy="0"/>
+        </a:xfrm>
+      </p:grpSpPr>
+      <p:sp>
+        <p:nvSpPr>
+          <p:cNvPr id="3" name="object 3"/>
+          <p:cNvSpPr/>
+          <p:nvPr/>
+        </p:nvSpPr>
+        <p:spPr>
+          <a:xfrm>
+            <a:off x="3945635" y="2636520"/>
+            <a:ext cx="8246363" cy="1584959"/>
+          </a:xfrm>
+          <a:prstGeom prst="rect">
+            <a:avLst/>
+          </a:prstGeom>
+          <a:blipFill>
+            <a:blip r:embed="rId2" cstate="print"/>
+            <a:stretch>
+              <a:fillRect/>
+            </a:stretch>
+          </a:blipFill>
+        </p:spPr>
+        <p:txBody>
+          <a:bodyPr wrap="square" lIns="0" tIns="0" rIns="0" bIns="0" rtlCol="0"/>
+          <a:lstStyle/>
+          <a:p>
+            <a:endParaRPr/>
+          </a:p>
+        </p:txBody>
+      </p:sp>
+      <p:sp>
+        <p:nvSpPr>
+          <p:cNvPr id="4" name="object 4"/>
+          <p:cNvSpPr txBox="1">
+            <a:spLocks noGrp="1"/>
+          </p:cNvSpPr>
+          <p:nvPr>
+            <p:ph type="title"/>
+          </p:nvPr>
+        </p:nvSpPr>
+        <p:spPr>
+          <a:xfrm>
+            <a:off x="4513326" y="3165729"/>
+            <a:ext cx="2233295" cy="513715"/>
+          </a:xfrm>
+          <a:prstGeom prst="rect">
+            <a:avLst/>
+          </a:prstGeom>
+        </p:spPr>
+        <p:txBody>
+          <a:bodyPr vert="horz" wrap="square" lIns="0" tIns="13335" rIns="0" bIns="0" rtlCol="0">
+            <a:spAutoFit/>
+          </a:bodyPr>
+          <a:lstStyle/>
+          <a:p>
+            <a:pPr marL="12700">
+              <a:lnSpc>
+                <a:spcPct val="100000"/>
+              </a:lnSpc>
+              <a:spcBef>
+                <a:spcPts val="105"/>
+              </a:spcBef>
+            </a:pPr>
+            <a:r>
+              <a:rPr sz="3200" b="1" spc="-5" dirty="0">
+                <a:solidFill>
+                  <a:srgbClr val="FFFFFF"/>
+                </a:solidFill>
+                <a:latin typeface="Lucida Sans"/>
+                <a:cs typeface="Lucida Sans"/>
+              </a:rPr>
+              <a:t>Thank</a:t>
+            </a:r>
+            <a:r>
+              <a:rPr sz="3200" b="1" spc="-55" dirty="0">
+                <a:solidFill>
+                  <a:srgbClr val="FFFFFF"/>
+                </a:solidFill>
+                <a:latin typeface="Lucida Sans"/>
+                <a:cs typeface="Lucida Sans"/>
+              </a:rPr>
+              <a:t> </a:t>
+            </a:r>
+            <a:r>
+              <a:rPr sz="3200" b="1" dirty="0">
+                <a:solidFill>
+                  <a:srgbClr val="FFFFFF"/>
+                </a:solidFill>
+                <a:latin typeface="Lucida Sans"/>
+                <a:cs typeface="Lucida Sans"/>
+              </a:rPr>
+              <a:t>you</a:t>
+            </a:r>
+            <a:endParaRPr sz="3200">
+              <a:latin typeface="Lucida Sans"/>
+              <a:cs typeface="Lucida Sans"/>
+            </a:endParaRPr>
+          </a:p>
+        </p:txBody>
+      </p:sp>
+      <p:sp>
+        <p:nvSpPr>
+          <p:cNvPr id="5" name="Marcador de número de diapositiva 4">
+            <a:extLst>
+              <a:ext uri="{FF2B5EF4-FFF2-40B4-BE49-F238E27FC236}">
+                <a16:creationId xmlns:a16="http://schemas.microsoft.com/office/drawing/2014/main" id="{B052DA19-AD24-7D24-2AE9-51F8F5A7F5E0}"/>
+              </a:ext>
+            </a:extLst>
+          </p:cNvPr>
+          <p:cNvSpPr>
+            <a:spLocks noGrp="1"/>
+          </p:cNvSpPr>
+          <p:nvPr>
+            <p:ph type="sldNum" sz="quarter" idx="7"/>
+          </p:nvPr>
+        </p:nvSpPr>
+        <p:spPr/>
+        <p:txBody>
+          <a:bodyPr/>
+          <a:lstStyle/>
+          <a:p>
+            <a:fld id="{B6F15528-21DE-4FAA-801E-634DDDAF4B2B}" type="slidenum">
+              <a:rPr lang="es-ES" smtClean="0"/>
+              <a:t>9</a:t>
+            </a:fld>
+            <a:endParaRPr lang="es-ES"/>
+          </a:p>
+        </p:txBody>
+      </p:sp>
+    </p:spTree>
   </p:cSld>
   <p:clrMapOvr>
     <a:masterClrMapping/>
